--- a/ACQUA_SOLAR_COMERCIO_DE_EQUIPA.pptx
+++ b/ACQUA_SOLAR_COMERCIO_DE_EQUIPA.pptx
@@ -162,7 +162,7 @@
                 <c:formatCode>General</c:formatCode>
                 <c:ptCount val="2"/>
                 <c:pt idx="0">
-                  <c:v>11</c:v>
+                  <c:v>0</c:v>
                 </c:pt>
                 <c:pt idx="1">
                   <c:v>22</c:v>
@@ -3688,7 +3688,7 @@
         <p:spPr>
           <a:xfrm>
             <a:off x="1005840" y="2240279"/>
-            <a:ext cx="2377439" cy="891540"/>
+            <a:ext cx="2377440" cy="868680"/>
           </a:xfrm>
           <a:prstGeom prst="rect">
             <a:avLst/>
@@ -3722,8 +3722,8 @@
         </p:nvSpPr>
         <p:spPr>
           <a:xfrm>
-            <a:off x="1005840" y="3058668"/>
-            <a:ext cx="2377439" cy="548640"/>
+            <a:off x="1005840" y="3090672"/>
+            <a:ext cx="2377440" cy="411480"/>
           </a:xfrm>
           <a:prstGeom prst="rect">
             <a:avLst/>
@@ -3803,7 +3803,7 @@
         <p:spPr>
           <a:xfrm>
             <a:off x="3931920" y="2240279"/>
-            <a:ext cx="2377439" cy="891540"/>
+            <a:ext cx="2377440" cy="868680"/>
           </a:xfrm>
           <a:prstGeom prst="rect">
             <a:avLst/>
@@ -3837,8 +3837,8 @@
         </p:nvSpPr>
         <p:spPr>
           <a:xfrm>
-            <a:off x="3931920" y="3058668"/>
-            <a:ext cx="2377439" cy="548640"/>
+            <a:off x="3931920" y="3090672"/>
+            <a:ext cx="2377440" cy="411480"/>
           </a:xfrm>
           <a:prstGeom prst="rect">
             <a:avLst/>
@@ -3918,7 +3918,7 @@
         <p:spPr>
           <a:xfrm>
             <a:off x="6858000" y="2240279"/>
-            <a:ext cx="2377439" cy="891540"/>
+            <a:ext cx="2377440" cy="868680"/>
           </a:xfrm>
           <a:prstGeom prst="rect">
             <a:avLst/>
@@ -3952,8 +3952,8 @@
         </p:nvSpPr>
         <p:spPr>
           <a:xfrm>
-            <a:off x="6858000" y="3058668"/>
-            <a:ext cx="2377439" cy="548640"/>
+            <a:off x="6858000" y="3090672"/>
+            <a:ext cx="2377440" cy="411480"/>
           </a:xfrm>
           <a:prstGeom prst="rect">
             <a:avLst/>
@@ -4033,7 +4033,7 @@
         <p:spPr>
           <a:xfrm>
             <a:off x="9784080" y="2240279"/>
-            <a:ext cx="2377439" cy="891540"/>
+            <a:ext cx="2377440" cy="868680"/>
           </a:xfrm>
           <a:prstGeom prst="rect">
             <a:avLst/>
@@ -4067,8 +4067,8 @@
         </p:nvSpPr>
         <p:spPr>
           <a:xfrm>
-            <a:off x="9784080" y="3058668"/>
-            <a:ext cx="2377439" cy="548640"/>
+            <a:off x="9784080" y="3090672"/>
+            <a:ext cx="2377440" cy="411480"/>
           </a:xfrm>
           <a:prstGeom prst="rect">
             <a:avLst/>
@@ -4121,7 +4121,7 @@
               <a:tr h="475488">
                 <a:tc>
                   <a:txBody>
-                    <a:bodyPr wrap="square"/>
+                    <a:bodyPr/>
                     <a:lstStyle/>
                     <a:p>
                       <a:pPr algn="ctr"/>
@@ -4144,7 +4144,7 @@
                 </a:tc>
                 <a:tc>
                   <a:txBody>
-                    <a:bodyPr wrap="square"/>
+                    <a:bodyPr/>
                     <a:lstStyle/>
                     <a:p>
                       <a:pPr algn="ctr"/>
@@ -4167,7 +4167,7 @@
                 </a:tc>
                 <a:tc>
                   <a:txBody>
-                    <a:bodyPr wrap="square"/>
+                    <a:bodyPr/>
                     <a:lstStyle/>
                     <a:p>
                       <a:pPr algn="ctr"/>
@@ -4190,7 +4190,7 @@
                 </a:tc>
                 <a:tc>
                   <a:txBody>
-                    <a:bodyPr wrap="square"/>
+                    <a:bodyPr/>
                     <a:lstStyle/>
                     <a:p>
                       <a:pPr algn="ctr"/>
@@ -4215,18 +4215,18 @@
               <a:tr h="475488">
                 <a:tc>
                   <a:txBody>
-                    <a:bodyPr wrap="square"/>
-                    <a:lstStyle/>
-                    <a:p>
-                      <a:pPr algn="l"/>
-                      <a:r>
-                        <a:rPr sz="1000" b="0">
-                          <a:solidFill>
-                            <a:srgbClr val="1D1B43"/>
-                          </a:solidFill>
-                          <a:latin typeface="Calibri"/>
-                        </a:rPr>
-                        <a:t>Total Entregas</a:t>
+                    <a:bodyPr/>
+                    <a:lstStyle/>
+                    <a:p>
+                      <a:pPr algn="l"/>
+                      <a:r>
+                        <a:rPr sz="1000" b="0">
+                          <a:solidFill>
+                            <a:srgbClr val="1D1B43"/>
+                          </a:solidFill>
+                          <a:latin typeface="Calibri"/>
+                        </a:rPr>
+                        <a:t>Total</a:t>
                       </a:r>
                     </a:p>
                   </a:txBody>
@@ -4238,18 +4238,18 @@
                 </a:tc>
                 <a:tc>
                   <a:txBody>
-                    <a:bodyPr wrap="square"/>
-                    <a:lstStyle/>
-                    <a:p>
-                      <a:pPr algn="l"/>
-                      <a:r>
-                        <a:rPr sz="1000" b="0">
-                          <a:solidFill>
-                            <a:srgbClr val="1D1B43"/>
-                          </a:solidFill>
-                          <a:latin typeface="Calibri"/>
-                        </a:rPr>
-                        <a:t>11</a:t>
+                    <a:bodyPr/>
+                    <a:lstStyle/>
+                    <a:p>
+                      <a:pPr algn="l"/>
+                      <a:r>
+                        <a:rPr sz="1000" b="0">
+                          <a:solidFill>
+                            <a:srgbClr val="1D1B43"/>
+                          </a:solidFill>
+                          <a:latin typeface="Calibri"/>
+                        </a:rPr>
+                        <a:t>0</a:t>
                       </a:r>
                     </a:p>
                   </a:txBody>
@@ -4261,7 +4261,7 @@
                 </a:tc>
                 <a:tc>
                   <a:txBody>
-                    <a:bodyPr wrap="square"/>
+                    <a:bodyPr/>
                     <a:lstStyle/>
                     <a:p>
                       <a:pPr algn="l"/>
@@ -4284,18 +4284,18 @@
                 </a:tc>
                 <a:tc>
                   <a:txBody>
-                    <a:bodyPr wrap="square"/>
-                    <a:lstStyle/>
-                    <a:p>
-                      <a:pPr algn="l"/>
-                      <a:r>
-                        <a:rPr sz="1000" b="0">
-                          <a:solidFill>
-                            <a:srgbClr val="1D1B43"/>
-                          </a:solidFill>
-                          <a:latin typeface="Calibri"/>
-                        </a:rPr>
-                        <a:t>+ 13</a:t>
+                    <a:bodyPr/>
+                    <a:lstStyle/>
+                    <a:p>
+                      <a:pPr algn="l"/>
+                      <a:r>
+                        <a:rPr sz="1000" b="0">
+                          <a:solidFill>
+                            <a:srgbClr val="1D1B43"/>
+                          </a:solidFill>
+                          <a:latin typeface="Calibri"/>
+                        </a:rPr>
+                        <a:t>+ 24</a:t>
                       </a:r>
                     </a:p>
                   </a:txBody>
@@ -4309,7 +4309,7 @@
               <a:tr h="475488">
                 <a:tc>
                   <a:txBody>
-                    <a:bodyPr wrap="square"/>
+                    <a:bodyPr/>
                     <a:lstStyle/>
                     <a:p>
                       <a:pPr algn="l"/>
@@ -4332,18 +4332,18 @@
                 </a:tc>
                 <a:tc>
                   <a:txBody>
-                    <a:bodyPr wrap="square"/>
-                    <a:lstStyle/>
-                    <a:p>
-                      <a:pPr algn="l"/>
-                      <a:r>
-                        <a:rPr sz="1000" b="0">
-                          <a:solidFill>
-                            <a:srgbClr val="1D1B43"/>
-                          </a:solidFill>
-                          <a:latin typeface="Calibri"/>
-                        </a:rPr>
-                        <a:t>11</a:t>
+                    <a:bodyPr/>
+                    <a:lstStyle/>
+                    <a:p>
+                      <a:pPr algn="l"/>
+                      <a:r>
+                        <a:rPr sz="1000" b="0">
+                          <a:solidFill>
+                            <a:srgbClr val="1D1B43"/>
+                          </a:solidFill>
+                          <a:latin typeface="Calibri"/>
+                        </a:rPr>
+                        <a:t>0</a:t>
                       </a:r>
                     </a:p>
                   </a:txBody>
@@ -4355,7 +4355,7 @@
                 </a:tc>
                 <a:tc>
                   <a:txBody>
-                    <a:bodyPr wrap="square"/>
+                    <a:bodyPr/>
                     <a:lstStyle/>
                     <a:p>
                       <a:pPr algn="l"/>
@@ -4378,18 +4378,18 @@
                 </a:tc>
                 <a:tc>
                   <a:txBody>
-                    <a:bodyPr wrap="square"/>
-                    <a:lstStyle/>
-                    <a:p>
-                      <a:pPr algn="l"/>
-                      <a:r>
-                        <a:rPr sz="1000" b="0">
-                          <a:solidFill>
-                            <a:srgbClr val="1D1B43"/>
-                          </a:solidFill>
-                          <a:latin typeface="Calibri"/>
-                        </a:rPr>
-                        <a:t>+ 11</a:t>
+                    <a:bodyPr/>
+                    <a:lstStyle/>
+                    <a:p>
+                      <a:pPr algn="l"/>
+                      <a:r>
+                        <a:rPr sz="1000" b="0">
+                          <a:solidFill>
+                            <a:srgbClr val="1D1B43"/>
+                          </a:solidFill>
+                          <a:latin typeface="Calibri"/>
+                        </a:rPr>
+                        <a:t>+ 22</a:t>
                       </a:r>
                     </a:p>
                   </a:txBody>
@@ -4403,18 +4403,18 @@
               <a:tr h="475488">
                 <a:tc>
                   <a:txBody>
-                    <a:bodyPr wrap="square"/>
-                    <a:lstStyle/>
-                    <a:p>
-                      <a:pPr algn="l"/>
-                      <a:r>
-                        <a:rPr sz="1000" b="0">
-                          <a:solidFill>
-                            <a:srgbClr val="1D1B43"/>
-                          </a:solidFill>
-                          <a:latin typeface="Calibri"/>
-                        </a:rPr>
-                        <a:t>Fora do Prazo</a:t>
+                    <a:bodyPr/>
+                    <a:lstStyle/>
+                    <a:p>
+                      <a:pPr algn="l"/>
+                      <a:r>
+                        <a:rPr sz="1000" b="0">
+                          <a:solidFill>
+                            <a:srgbClr val="1D1B43"/>
+                          </a:solidFill>
+                          <a:latin typeface="Calibri"/>
+                        </a:rPr>
+                        <a:t>Fora Prazo</a:t>
                       </a:r>
                     </a:p>
                   </a:txBody>
@@ -4426,7 +4426,7 @@
                 </a:tc>
                 <a:tc>
                   <a:txBody>
-                    <a:bodyPr wrap="square"/>
+                    <a:bodyPr/>
                     <a:lstStyle/>
                     <a:p>
                       <a:pPr algn="l"/>
@@ -4449,7 +4449,7 @@
                 </a:tc>
                 <a:tc>
                   <a:txBody>
-                    <a:bodyPr wrap="square"/>
+                    <a:bodyPr/>
                     <a:lstStyle/>
                     <a:p>
                       <a:pPr algn="l"/>
@@ -4472,7 +4472,7 @@
                 </a:tc>
                 <a:tc>
                   <a:txBody>
-                    <a:bodyPr wrap="square"/>
+                    <a:bodyPr/>
                     <a:lstStyle/>
                     <a:p>
                       <a:pPr algn="l"/>
@@ -4497,7 +4497,7 @@
               <a:tr h="475488">
                 <a:tc>
                   <a:txBody>
-                    <a:bodyPr wrap="square"/>
+                    <a:bodyPr/>
                     <a:lstStyle/>
                     <a:p>
                       <a:pPr algn="l"/>
@@ -4520,18 +4520,18 @@
                 </a:tc>
                 <a:tc>
                   <a:txBody>
-                    <a:bodyPr wrap="square"/>
-                    <a:lstStyle/>
-                    <a:p>
-                      <a:pPr algn="l"/>
-                      <a:r>
-                        <a:rPr sz="1000" b="0">
-                          <a:solidFill>
-                            <a:srgbClr val="1D1B43"/>
-                          </a:solidFill>
-                          <a:latin typeface="Calibri"/>
-                        </a:rPr>
-                        <a:t>100.0%</a:t>
+                    <a:bodyPr/>
+                    <a:lstStyle/>
+                    <a:p>
+                      <a:pPr algn="l"/>
+                      <a:r>
+                        <a:rPr sz="1000" b="0">
+                          <a:solidFill>
+                            <a:srgbClr val="1D1B43"/>
+                          </a:solidFill>
+                          <a:latin typeface="Calibri"/>
+                        </a:rPr>
+                        <a:t>91.7%</a:t>
                       </a:r>
                     </a:p>
                   </a:txBody>
@@ -4543,7 +4543,7 @@
                 </a:tc>
                 <a:tc>
                   <a:txBody>
-                    <a:bodyPr wrap="square"/>
+                    <a:bodyPr/>
                     <a:lstStyle/>
                     <a:p>
                       <a:pPr algn="l"/>
@@ -4566,18 +4566,18 @@
                 </a:tc>
                 <a:tc>
                   <a:txBody>
-                    <a:bodyPr wrap="square"/>
-                    <a:lstStyle/>
-                    <a:p>
-                      <a:pPr algn="l"/>
-                      <a:r>
-                        <a:rPr sz="1000" b="0">
-                          <a:solidFill>
-                            <a:srgbClr val="1D1B43"/>
-                          </a:solidFill>
-                          <a:latin typeface="Calibri"/>
-                        </a:rPr>
-                        <a:t>- 8.3pp</a:t>
+                    <a:bodyPr/>
+                    <a:lstStyle/>
+                    <a:p>
+                      <a:pPr algn="l"/>
+                      <a:r>
+                        <a:rPr sz="1000" b="0">
+                          <a:solidFill>
+                            <a:srgbClr val="1D1B43"/>
+                          </a:solidFill>
+                          <a:latin typeface="Calibri"/>
+                        </a:rPr>
+                        <a:t>+ 0.0pp</a:t>
                       </a:r>
                     </a:p>
                   </a:txBody>
@@ -4766,7 +4766,7 @@
               <a:tr h="438912">
                 <a:tc>
                   <a:txBody>
-                    <a:bodyPr wrap="square"/>
+                    <a:bodyPr/>
                     <a:lstStyle/>
                     <a:p>
                       <a:pPr algn="ctr"/>
@@ -4789,7 +4789,7 @@
                 </a:tc>
                 <a:tc>
                   <a:txBody>
-                    <a:bodyPr wrap="square"/>
+                    <a:bodyPr/>
                     <a:lstStyle/>
                     <a:p>
                       <a:pPr algn="ctr"/>
@@ -4812,7 +4812,7 @@
                 </a:tc>
                 <a:tc>
                   <a:txBody>
-                    <a:bodyPr wrap="square"/>
+                    <a:bodyPr/>
                     <a:lstStyle/>
                     <a:p>
                       <a:pPr algn="ctr"/>
@@ -4835,7 +4835,7 @@
                 </a:tc>
                 <a:tc>
                   <a:txBody>
-                    <a:bodyPr wrap="square"/>
+                    <a:bodyPr/>
                     <a:lstStyle/>
                     <a:p>
                       <a:pPr algn="ctr"/>
@@ -4858,7 +4858,7 @@
                 </a:tc>
                 <a:tc>
                   <a:txBody>
-                    <a:bodyPr wrap="square"/>
+                    <a:bodyPr/>
                     <a:lstStyle/>
                     <a:p>
                       <a:pPr algn="ctr"/>
@@ -4883,7 +4883,7 @@
               <a:tr h="438912">
                 <a:tc>
                   <a:txBody>
-                    <a:bodyPr wrap="square"/>
+                    <a:bodyPr/>
                     <a:lstStyle/>
                     <a:p>
                       <a:pPr algn="l"/>
@@ -4906,18 +4906,18 @@
                 </a:tc>
                 <a:tc>
                   <a:txBody>
-                    <a:bodyPr wrap="square"/>
-                    <a:lstStyle/>
-                    <a:p>
-                      <a:pPr algn="l"/>
-                      <a:r>
-                        <a:rPr sz="1000" b="0">
-                          <a:solidFill>
-                            <a:srgbClr val="1D1B43"/>
-                          </a:solidFill>
-                          <a:latin typeface="Calibri"/>
-                        </a:rPr>
-                        <a:t>11</a:t>
+                    <a:bodyPr/>
+                    <a:lstStyle/>
+                    <a:p>
+                      <a:pPr algn="l"/>
+                      <a:r>
+                        <a:rPr sz="1000" b="0">
+                          <a:solidFill>
+                            <a:srgbClr val="1D1B43"/>
+                          </a:solidFill>
+                          <a:latin typeface="Calibri"/>
+                        </a:rPr>
+                        <a:t>0</a:t>
                       </a:r>
                     </a:p>
                   </a:txBody>
@@ -4929,18 +4929,18 @@
                 </a:tc>
                 <a:tc>
                   <a:txBody>
-                    <a:bodyPr wrap="square"/>
-                    <a:lstStyle/>
-                    <a:p>
-                      <a:pPr algn="l"/>
-                      <a:r>
-                        <a:rPr sz="1000" b="0">
-                          <a:solidFill>
-                            <a:srgbClr val="1D1B43"/>
-                          </a:solidFill>
-                          <a:latin typeface="Calibri"/>
-                        </a:rPr>
-                        <a:t>11</a:t>
+                    <a:bodyPr/>
+                    <a:lstStyle/>
+                    <a:p>
+                      <a:pPr algn="l"/>
+                      <a:r>
+                        <a:rPr sz="1000" b="0">
+                          <a:solidFill>
+                            <a:srgbClr val="1D1B43"/>
+                          </a:solidFill>
+                          <a:latin typeface="Calibri"/>
+                        </a:rPr>
+                        <a:t>0</a:t>
                       </a:r>
                     </a:p>
                   </a:txBody>
@@ -4952,7 +4952,7 @@
                 </a:tc>
                 <a:tc>
                   <a:txBody>
-                    <a:bodyPr wrap="square"/>
+                    <a:bodyPr/>
                     <a:lstStyle/>
                     <a:p>
                       <a:pPr algn="l"/>
@@ -4975,18 +4975,18 @@
                 </a:tc>
                 <a:tc>
                   <a:txBody>
-                    <a:bodyPr wrap="square"/>
-                    <a:lstStyle/>
-                    <a:p>
-                      <a:pPr algn="l"/>
-                      <a:r>
-                        <a:rPr sz="1000" b="0">
-                          <a:solidFill>
-                            <a:srgbClr val="1D1B43"/>
-                          </a:solidFill>
-                          <a:latin typeface="Calibri"/>
-                        </a:rPr>
-                        <a:t>100.0%</a:t>
+                    <a:bodyPr/>
+                    <a:lstStyle/>
+                    <a:p>
+                      <a:pPr algn="l"/>
+                      <a:r>
+                        <a:rPr sz="1000" b="0">
+                          <a:solidFill>
+                            <a:srgbClr val="1D1B43"/>
+                          </a:solidFill>
+                          <a:latin typeface="Calibri"/>
+                        </a:rPr>
+                        <a:t>91.7%</a:t>
                       </a:r>
                     </a:p>
                   </a:txBody>
@@ -5000,7 +5000,7 @@
               <a:tr h="438912">
                 <a:tc>
                   <a:txBody>
-                    <a:bodyPr wrap="square"/>
+                    <a:bodyPr/>
                     <a:lstStyle/>
                     <a:p>
                       <a:pPr algn="l"/>
@@ -5023,7 +5023,7 @@
                 </a:tc>
                 <a:tc>
                   <a:txBody>
-                    <a:bodyPr wrap="square"/>
+                    <a:bodyPr/>
                     <a:lstStyle/>
                     <a:p>
                       <a:pPr algn="l"/>
@@ -5046,7 +5046,7 @@
                 </a:tc>
                 <a:tc>
                   <a:txBody>
-                    <a:bodyPr wrap="square"/>
+                    <a:bodyPr/>
                     <a:lstStyle/>
                     <a:p>
                       <a:pPr algn="l"/>
@@ -5069,7 +5069,7 @@
                 </a:tc>
                 <a:tc>
                   <a:txBody>
-                    <a:bodyPr wrap="square"/>
+                    <a:bodyPr/>
                     <a:lstStyle/>
                     <a:p>
                       <a:pPr algn="l"/>
@@ -5092,7 +5092,7 @@
                 </a:tc>
                 <a:tc>
                   <a:txBody>
-                    <a:bodyPr wrap="square"/>
+                    <a:bodyPr/>
                     <a:lstStyle/>
                     <a:p>
                       <a:pPr algn="l"/>
@@ -5352,7 +5352,7 @@
               <a:tr h="384048">
                 <a:tc>
                   <a:txBody>
-                    <a:bodyPr wrap="square"/>
+                    <a:bodyPr/>
                     <a:lstStyle/>
                     <a:p>
                       <a:pPr algn="ctr"/>
@@ -5375,7 +5375,7 @@
                 </a:tc>
                 <a:tc>
                   <a:txBody>
-                    <a:bodyPr wrap="square"/>
+                    <a:bodyPr/>
                     <a:lstStyle/>
                     <a:p>
                       <a:pPr algn="ctr"/>
@@ -5398,7 +5398,7 @@
                 </a:tc>
                 <a:tc>
                   <a:txBody>
-                    <a:bodyPr wrap="square"/>
+                    <a:bodyPr/>
                     <a:lstStyle/>
                     <a:p>
                       <a:pPr algn="ctr"/>
@@ -5421,7 +5421,7 @@
                 </a:tc>
                 <a:tc>
                   <a:txBody>
-                    <a:bodyPr wrap="square"/>
+                    <a:bodyPr/>
                     <a:lstStyle/>
                     <a:p>
                       <a:pPr algn="ctr"/>
@@ -5444,7 +5444,7 @@
                 </a:tc>
                 <a:tc>
                   <a:txBody>
-                    <a:bodyPr wrap="square"/>
+                    <a:bodyPr/>
                     <a:lstStyle/>
                     <a:p>
                       <a:pPr algn="ctr"/>
@@ -5469,7 +5469,7 @@
               <a:tr h="384048">
                 <a:tc>
                   <a:txBody>
-                    <a:bodyPr wrap="square"/>
+                    <a:bodyPr/>
                     <a:lstStyle/>
                     <a:p>
                       <a:pPr algn="l"/>
@@ -5492,7 +5492,7 @@
                 </a:tc>
                 <a:tc>
                   <a:txBody>
-                    <a:bodyPr wrap="square"/>
+                    <a:bodyPr/>
                     <a:lstStyle/>
                     <a:p>
                       <a:pPr algn="l"/>
@@ -5515,7 +5515,7 @@
                 </a:tc>
                 <a:tc>
                   <a:txBody>
-                    <a:bodyPr wrap="square"/>
+                    <a:bodyPr/>
                     <a:lstStyle/>
                     <a:p>
                       <a:pPr algn="l"/>
@@ -5538,7 +5538,7 @@
                 </a:tc>
                 <a:tc>
                   <a:txBody>
-                    <a:bodyPr wrap="square"/>
+                    <a:bodyPr/>
                     <a:lstStyle/>
                     <a:p>
                       <a:pPr algn="l"/>
@@ -5561,7 +5561,7 @@
                 </a:tc>
                 <a:tc>
                   <a:txBody>
-                    <a:bodyPr wrap="square"/>
+                    <a:bodyPr/>
                     <a:lstStyle/>
                     <a:p>
                       <a:pPr algn="l"/>
@@ -5586,7 +5586,7 @@
               <a:tr h="384048">
                 <a:tc>
                   <a:txBody>
-                    <a:bodyPr wrap="square"/>
+                    <a:bodyPr/>
                     <a:lstStyle/>
                     <a:p>
                       <a:pPr algn="l"/>
@@ -5609,7 +5609,7 @@
                 </a:tc>
                 <a:tc>
                   <a:txBody>
-                    <a:bodyPr wrap="square"/>
+                    <a:bodyPr/>
                     <a:lstStyle/>
                     <a:p>
                       <a:pPr algn="l"/>
@@ -5632,7 +5632,7 @@
                 </a:tc>
                 <a:tc>
                   <a:txBody>
-                    <a:bodyPr wrap="square"/>
+                    <a:bodyPr/>
                     <a:lstStyle/>
                     <a:p>
                       <a:pPr algn="l"/>
@@ -5655,7 +5655,7 @@
                 </a:tc>
                 <a:tc>
                   <a:txBody>
-                    <a:bodyPr wrap="square"/>
+                    <a:bodyPr/>
                     <a:lstStyle/>
                     <a:p>
                       <a:pPr algn="l"/>
@@ -5678,7 +5678,7 @@
                 </a:tc>
                 <a:tc>
                   <a:txBody>
-                    <a:bodyPr wrap="square"/>
+                    <a:bodyPr/>
                     <a:lstStyle/>
                     <a:p>
                       <a:pPr algn="l"/>
@@ -5861,7 +5861,7 @@
               <a:tr h="438912">
                 <a:tc>
                   <a:txBody>
-                    <a:bodyPr wrap="square"/>
+                    <a:bodyPr/>
                     <a:lstStyle/>
                     <a:p>
                       <a:pPr algn="ctr"/>
@@ -5884,7 +5884,7 @@
                 </a:tc>
                 <a:tc>
                   <a:txBody>
-                    <a:bodyPr wrap="square"/>
+                    <a:bodyPr/>
                     <a:lstStyle/>
                     <a:p>
                       <a:pPr algn="ctr"/>
@@ -5907,7 +5907,7 @@
                 </a:tc>
                 <a:tc>
                   <a:txBody>
-                    <a:bodyPr wrap="square"/>
+                    <a:bodyPr/>
                     <a:lstStyle/>
                     <a:p>
                       <a:pPr algn="ctr"/>
@@ -5930,7 +5930,7 @@
                 </a:tc>
                 <a:tc>
                   <a:txBody>
-                    <a:bodyPr wrap="square"/>
+                    <a:bodyPr/>
                     <a:lstStyle/>
                     <a:p>
                       <a:pPr algn="ctr"/>
@@ -5953,7 +5953,7 @@
                 </a:tc>
                 <a:tc>
                   <a:txBody>
-                    <a:bodyPr wrap="square"/>
+                    <a:bodyPr/>
                     <a:lstStyle/>
                     <a:p>
                       <a:pPr algn="ctr"/>
@@ -5976,7 +5976,7 @@
                 </a:tc>
                 <a:tc>
                   <a:txBody>
-                    <a:bodyPr wrap="square"/>
+                    <a:bodyPr/>
                     <a:lstStyle/>
                     <a:p>
                       <a:pPr algn="ctr"/>
@@ -6001,7 +6001,7 @@
               <a:tr h="438912">
                 <a:tc>
                   <a:txBody>
-                    <a:bodyPr wrap="square"/>
+                    <a:bodyPr/>
                     <a:lstStyle/>
                     <a:p>
                       <a:pPr algn="l"/>
@@ -6024,7 +6024,7 @@
                 </a:tc>
                 <a:tc>
                   <a:txBody>
-                    <a:bodyPr wrap="square"/>
+                    <a:bodyPr/>
                     <a:lstStyle/>
                     <a:p>
                       <a:pPr algn="l"/>
@@ -6047,7 +6047,7 @@
                 </a:tc>
                 <a:tc>
                   <a:txBody>
-                    <a:bodyPr wrap="square"/>
+                    <a:bodyPr/>
                     <a:lstStyle/>
                     <a:p>
                       <a:pPr algn="l"/>
@@ -6070,7 +6070,7 @@
                 </a:tc>
                 <a:tc>
                   <a:txBody>
-                    <a:bodyPr wrap="square"/>
+                    <a:bodyPr/>
                     <a:lstStyle/>
                     <a:p>
                       <a:pPr algn="l"/>
@@ -6093,7 +6093,7 @@
                 </a:tc>
                 <a:tc>
                   <a:txBody>
-                    <a:bodyPr wrap="square"/>
+                    <a:bodyPr/>
                     <a:lstStyle/>
                     <a:p>
                       <a:pPr algn="l"/>
@@ -6116,7 +6116,7 @@
                 </a:tc>
                 <a:tc>
                   <a:txBody>
-                    <a:bodyPr wrap="square"/>
+                    <a:bodyPr/>
                     <a:lstStyle/>
                     <a:p>
                       <a:pPr algn="l"/>
@@ -6141,7 +6141,7 @@
               <a:tr h="438912">
                 <a:tc>
                   <a:txBody>
-                    <a:bodyPr wrap="square"/>
+                    <a:bodyPr/>
                     <a:lstStyle/>
                     <a:p>
                       <a:pPr algn="l"/>
@@ -6164,7 +6164,7 @@
                 </a:tc>
                 <a:tc>
                   <a:txBody>
-                    <a:bodyPr wrap="square"/>
+                    <a:bodyPr/>
                     <a:lstStyle/>
                     <a:p>
                       <a:pPr algn="l"/>
@@ -6187,7 +6187,7 @@
                 </a:tc>
                 <a:tc>
                   <a:txBody>
-                    <a:bodyPr wrap="square"/>
+                    <a:bodyPr/>
                     <a:lstStyle/>
                     <a:p>
                       <a:pPr algn="l"/>
@@ -6210,7 +6210,7 @@
                 </a:tc>
                 <a:tc>
                   <a:txBody>
-                    <a:bodyPr wrap="square"/>
+                    <a:bodyPr/>
                     <a:lstStyle/>
                     <a:p>
                       <a:pPr algn="l"/>
@@ -6233,7 +6233,7 @@
                 </a:tc>
                 <a:tc>
                   <a:txBody>
-                    <a:bodyPr wrap="square"/>
+                    <a:bodyPr/>
                     <a:lstStyle/>
                     <a:p>
                       <a:pPr algn="l"/>
@@ -6256,7 +6256,7 @@
                 </a:tc>
                 <a:tc>
                   <a:txBody>
-                    <a:bodyPr wrap="square"/>
+                    <a:bodyPr/>
                     <a:lstStyle/>
                     <a:p>
                       <a:pPr algn="l"/>
@@ -6281,7 +6281,7 @@
               <a:tr h="438912">
                 <a:tc>
                   <a:txBody>
-                    <a:bodyPr wrap="square"/>
+                    <a:bodyPr/>
                     <a:lstStyle/>
                     <a:p>
                       <a:pPr algn="l"/>
@@ -6304,7 +6304,7 @@
                 </a:tc>
                 <a:tc>
                   <a:txBody>
-                    <a:bodyPr wrap="square"/>
+                    <a:bodyPr/>
                     <a:lstStyle/>
                     <a:p>
                       <a:pPr algn="l"/>
@@ -6327,7 +6327,7 @@
                 </a:tc>
                 <a:tc>
                   <a:txBody>
-                    <a:bodyPr wrap="square"/>
+                    <a:bodyPr/>
                     <a:lstStyle/>
                     <a:p>
                       <a:pPr algn="l"/>
@@ -6350,7 +6350,7 @@
                 </a:tc>
                 <a:tc>
                   <a:txBody>
-                    <a:bodyPr wrap="square"/>
+                    <a:bodyPr/>
                     <a:lstStyle/>
                     <a:p>
                       <a:pPr algn="l"/>
@@ -6373,7 +6373,7 @@
                 </a:tc>
                 <a:tc>
                   <a:txBody>
-                    <a:bodyPr wrap="square"/>
+                    <a:bodyPr/>
                     <a:lstStyle/>
                     <a:p>
                       <a:pPr algn="l"/>
@@ -6396,7 +6396,7 @@
                 </a:tc>
                 <a:tc>
                   <a:txBody>
-                    <a:bodyPr wrap="square"/>
+                    <a:bodyPr/>
                     <a:lstStyle/>
                     <a:p>
                       <a:pPr algn="l"/>
@@ -6421,7 +6421,7 @@
               <a:tr h="438912">
                 <a:tc>
                   <a:txBody>
-                    <a:bodyPr wrap="square"/>
+                    <a:bodyPr/>
                     <a:lstStyle/>
                     <a:p>
                       <a:pPr algn="l"/>
@@ -6444,7 +6444,7 @@
                 </a:tc>
                 <a:tc>
                   <a:txBody>
-                    <a:bodyPr wrap="square"/>
+                    <a:bodyPr/>
                     <a:lstStyle/>
                     <a:p>
                       <a:pPr algn="l"/>
@@ -6467,7 +6467,7 @@
                 </a:tc>
                 <a:tc>
                   <a:txBody>
-                    <a:bodyPr wrap="square"/>
+                    <a:bodyPr/>
                     <a:lstStyle/>
                     <a:p>
                       <a:pPr algn="l"/>
@@ -6490,7 +6490,7 @@
                 </a:tc>
                 <a:tc>
                   <a:txBody>
-                    <a:bodyPr wrap="square"/>
+                    <a:bodyPr/>
                     <a:lstStyle/>
                     <a:p>
                       <a:pPr algn="l"/>
@@ -6513,7 +6513,7 @@
                 </a:tc>
                 <a:tc>
                   <a:txBody>
-                    <a:bodyPr wrap="square"/>
+                    <a:bodyPr/>
                     <a:lstStyle/>
                     <a:p>
                       <a:pPr algn="l"/>
@@ -6536,7 +6536,7 @@
                 </a:tc>
                 <a:tc>
                   <a:txBody>
-                    <a:bodyPr wrap="square"/>
+                    <a:bodyPr/>
                     <a:lstStyle/>
                     <a:p>
                       <a:pPr algn="l"/>
@@ -6561,7 +6561,7 @@
               <a:tr h="438912">
                 <a:tc>
                   <a:txBody>
-                    <a:bodyPr wrap="square"/>
+                    <a:bodyPr/>
                     <a:lstStyle/>
                     <a:p>
                       <a:pPr algn="l"/>
@@ -6584,7 +6584,7 @@
                 </a:tc>
                 <a:tc>
                   <a:txBody>
-                    <a:bodyPr wrap="square"/>
+                    <a:bodyPr/>
                     <a:lstStyle/>
                     <a:p>
                       <a:pPr algn="l"/>
@@ -6607,7 +6607,7 @@
                 </a:tc>
                 <a:tc>
                   <a:txBody>
-                    <a:bodyPr wrap="square"/>
+                    <a:bodyPr/>
                     <a:lstStyle/>
                     <a:p>
                       <a:pPr algn="l"/>
@@ -6630,7 +6630,7 @@
                 </a:tc>
                 <a:tc>
                   <a:txBody>
-                    <a:bodyPr wrap="square"/>
+                    <a:bodyPr/>
                     <a:lstStyle/>
                     <a:p>
                       <a:pPr algn="l"/>
@@ -6653,7 +6653,7 @@
                 </a:tc>
                 <a:tc>
                   <a:txBody>
-                    <a:bodyPr wrap="square"/>
+                    <a:bodyPr/>
                     <a:lstStyle/>
                     <a:p>
                       <a:pPr algn="l"/>
@@ -6676,7 +6676,7 @@
                 </a:tc>
                 <a:tc>
                   <a:txBody>
-                    <a:bodyPr wrap="square"/>
+                    <a:bodyPr/>
                     <a:lstStyle/>
                     <a:p>
                       <a:pPr algn="l"/>
@@ -6701,7 +6701,7 @@
               <a:tr h="438912">
                 <a:tc>
                   <a:txBody>
-                    <a:bodyPr wrap="square"/>
+                    <a:bodyPr/>
                     <a:lstStyle/>
                     <a:p>
                       <a:pPr algn="l"/>
@@ -6724,7 +6724,7 @@
                 </a:tc>
                 <a:tc>
                   <a:txBody>
-                    <a:bodyPr wrap="square"/>
+                    <a:bodyPr/>
                     <a:lstStyle/>
                     <a:p>
                       <a:pPr algn="l"/>
@@ -6747,7 +6747,7 @@
                 </a:tc>
                 <a:tc>
                   <a:txBody>
-                    <a:bodyPr wrap="square"/>
+                    <a:bodyPr/>
                     <a:lstStyle/>
                     <a:p>
                       <a:pPr algn="l"/>
@@ -6770,7 +6770,7 @@
                 </a:tc>
                 <a:tc>
                   <a:txBody>
-                    <a:bodyPr wrap="square"/>
+                    <a:bodyPr/>
                     <a:lstStyle/>
                     <a:p>
                       <a:pPr algn="l"/>
@@ -6793,7 +6793,7 @@
                 </a:tc>
                 <a:tc>
                   <a:txBody>
-                    <a:bodyPr wrap="square"/>
+                    <a:bodyPr/>
                     <a:lstStyle/>
                     <a:p>
                       <a:pPr algn="l"/>
@@ -6816,7 +6816,7 @@
                 </a:tc>
                 <a:tc>
                   <a:txBody>
-                    <a:bodyPr wrap="square"/>
+                    <a:bodyPr/>
                     <a:lstStyle/>
                     <a:p>
                       <a:pPr algn="l"/>
@@ -6841,7 +6841,7 @@
               <a:tr h="438912">
                 <a:tc>
                   <a:txBody>
-                    <a:bodyPr wrap="square"/>
+                    <a:bodyPr/>
                     <a:lstStyle/>
                     <a:p>
                       <a:pPr algn="l"/>
@@ -6864,7 +6864,7 @@
                 </a:tc>
                 <a:tc>
                   <a:txBody>
-                    <a:bodyPr wrap="square"/>
+                    <a:bodyPr/>
                     <a:lstStyle/>
                     <a:p>
                       <a:pPr algn="l"/>
@@ -6887,7 +6887,7 @@
                 </a:tc>
                 <a:tc>
                   <a:txBody>
-                    <a:bodyPr wrap="square"/>
+                    <a:bodyPr/>
                     <a:lstStyle/>
                     <a:p>
                       <a:pPr algn="l"/>
@@ -6910,7 +6910,7 @@
                 </a:tc>
                 <a:tc>
                   <a:txBody>
-                    <a:bodyPr wrap="square"/>
+                    <a:bodyPr/>
                     <a:lstStyle/>
                     <a:p>
                       <a:pPr algn="l"/>
@@ -6933,7 +6933,7 @@
                 </a:tc>
                 <a:tc>
                   <a:txBody>
-                    <a:bodyPr wrap="square"/>
+                    <a:bodyPr/>
                     <a:lstStyle/>
                     <a:p>
                       <a:pPr algn="l"/>
@@ -6956,7 +6956,7 @@
                 </a:tc>
                 <a:tc>
                   <a:txBody>
-                    <a:bodyPr wrap="square"/>
+                    <a:bodyPr/>
                     <a:lstStyle/>
                     <a:p>
                       <a:pPr algn="l"/>
@@ -6981,7 +6981,7 @@
               <a:tr h="438912">
                 <a:tc>
                   <a:txBody>
-                    <a:bodyPr wrap="square"/>
+                    <a:bodyPr/>
                     <a:lstStyle/>
                     <a:p>
                       <a:pPr algn="l"/>
@@ -7004,7 +7004,7 @@
                 </a:tc>
                 <a:tc>
                   <a:txBody>
-                    <a:bodyPr wrap="square"/>
+                    <a:bodyPr/>
                     <a:lstStyle/>
                     <a:p>
                       <a:pPr algn="l"/>
@@ -7027,7 +7027,7 @@
                 </a:tc>
                 <a:tc>
                   <a:txBody>
-                    <a:bodyPr wrap="square"/>
+                    <a:bodyPr/>
                     <a:lstStyle/>
                     <a:p>
                       <a:pPr algn="l"/>
@@ -7050,7 +7050,7 @@
                 </a:tc>
                 <a:tc>
                   <a:txBody>
-                    <a:bodyPr wrap="square"/>
+                    <a:bodyPr/>
                     <a:lstStyle/>
                     <a:p>
                       <a:pPr algn="l"/>
@@ -7073,7 +7073,7 @@
                 </a:tc>
                 <a:tc>
                   <a:txBody>
-                    <a:bodyPr wrap="square"/>
+                    <a:bodyPr/>
                     <a:lstStyle/>
                     <a:p>
                       <a:pPr algn="l"/>
@@ -7096,7 +7096,7 @@
                 </a:tc>
                 <a:tc>
                   <a:txBody>
-                    <a:bodyPr wrap="square"/>
+                    <a:bodyPr/>
                     <a:lstStyle/>
                     <a:p>
                       <a:pPr algn="l"/>
@@ -7121,7 +7121,7 @@
               <a:tr h="438912">
                 <a:tc>
                   <a:txBody>
-                    <a:bodyPr wrap="square"/>
+                    <a:bodyPr/>
                     <a:lstStyle/>
                     <a:p>
                       <a:pPr algn="l"/>
@@ -7144,7 +7144,7 @@
                 </a:tc>
                 <a:tc>
                   <a:txBody>
-                    <a:bodyPr wrap="square"/>
+                    <a:bodyPr/>
                     <a:lstStyle/>
                     <a:p>
                       <a:pPr algn="l"/>
@@ -7167,7 +7167,7 @@
                 </a:tc>
                 <a:tc>
                   <a:txBody>
-                    <a:bodyPr wrap="square"/>
+                    <a:bodyPr/>
                     <a:lstStyle/>
                     <a:p>
                       <a:pPr algn="l"/>
@@ -7190,7 +7190,7 @@
                 </a:tc>
                 <a:tc>
                   <a:txBody>
-                    <a:bodyPr wrap="square"/>
+                    <a:bodyPr/>
                     <a:lstStyle/>
                     <a:p>
                       <a:pPr algn="l"/>
@@ -7213,7 +7213,7 @@
                 </a:tc>
                 <a:tc>
                   <a:txBody>
-                    <a:bodyPr wrap="square"/>
+                    <a:bodyPr/>
                     <a:lstStyle/>
                     <a:p>
                       <a:pPr algn="l"/>
@@ -7236,7 +7236,7 @@
                 </a:tc>
                 <a:tc>
                   <a:txBody>
-                    <a:bodyPr wrap="square"/>
+                    <a:bodyPr/>
                     <a:lstStyle/>
                     <a:p>
                       <a:pPr algn="l"/>
@@ -7420,7 +7420,7 @@
               <a:tr h="292608">
                 <a:tc>
                   <a:txBody>
-                    <a:bodyPr wrap="square"/>
+                    <a:bodyPr/>
                     <a:lstStyle/>
                     <a:p>
                       <a:pPr algn="ctr"/>
@@ -7443,7 +7443,7 @@
                 </a:tc>
                 <a:tc>
                   <a:txBody>
-                    <a:bodyPr wrap="square"/>
+                    <a:bodyPr/>
                     <a:lstStyle/>
                     <a:p>
                       <a:pPr algn="ctr"/>
@@ -7466,7 +7466,7 @@
                 </a:tc>
                 <a:tc>
                   <a:txBody>
-                    <a:bodyPr wrap="square"/>
+                    <a:bodyPr/>
                     <a:lstStyle/>
                     <a:p>
                       <a:pPr algn="ctr"/>
@@ -7489,7 +7489,7 @@
                 </a:tc>
                 <a:tc>
                   <a:txBody>
-                    <a:bodyPr wrap="square"/>
+                    <a:bodyPr/>
                     <a:lstStyle/>
                     <a:p>
                       <a:pPr algn="ctr"/>
@@ -7512,7 +7512,7 @@
                 </a:tc>
                 <a:tc>
                   <a:txBody>
-                    <a:bodyPr wrap="square"/>
+                    <a:bodyPr/>
                     <a:lstStyle/>
                     <a:p>
                       <a:pPr algn="ctr"/>
@@ -7535,7 +7535,7 @@
                 </a:tc>
                 <a:tc>
                   <a:txBody>
-                    <a:bodyPr wrap="square"/>
+                    <a:bodyPr/>
                     <a:lstStyle/>
                     <a:p>
                       <a:pPr algn="ctr"/>
@@ -7558,7 +7558,7 @@
                 </a:tc>
                 <a:tc>
                   <a:txBody>
-                    <a:bodyPr wrap="square"/>
+                    <a:bodyPr/>
                     <a:lstStyle/>
                     <a:p>
                       <a:pPr algn="ctr"/>
@@ -7583,7 +7583,7 @@
               <a:tr h="292608">
                 <a:tc>
                   <a:txBody>
-                    <a:bodyPr wrap="square"/>
+                    <a:bodyPr/>
                     <a:lstStyle/>
                     <a:p>
                       <a:pPr algn="l"/>
@@ -7606,7 +7606,7 @@
                 </a:tc>
                 <a:tc>
                   <a:txBody>
-                    <a:bodyPr wrap="square"/>
+                    <a:bodyPr/>
                     <a:lstStyle/>
                     <a:p>
                       <a:pPr algn="l"/>
@@ -7629,7 +7629,7 @@
                 </a:tc>
                 <a:tc>
                   <a:txBody>
-                    <a:bodyPr wrap="square"/>
+                    <a:bodyPr/>
                     <a:lstStyle/>
                     <a:p>
                       <a:pPr algn="l"/>
@@ -7652,7 +7652,7 @@
                 </a:tc>
                 <a:tc>
                   <a:txBody>
-                    <a:bodyPr wrap="square"/>
+                    <a:bodyPr/>
                     <a:lstStyle/>
                     <a:p>
                       <a:pPr algn="l"/>
@@ -7675,7 +7675,7 @@
                 </a:tc>
                 <a:tc>
                   <a:txBody>
-                    <a:bodyPr wrap="square"/>
+                    <a:bodyPr/>
                     <a:lstStyle/>
                     <a:p>
                       <a:pPr algn="l"/>
@@ -7698,7 +7698,7 @@
                 </a:tc>
                 <a:tc>
                   <a:txBody>
-                    <a:bodyPr wrap="square"/>
+                    <a:bodyPr/>
                     <a:lstStyle/>
                     <a:p>
                       <a:pPr algn="l"/>
@@ -7721,7 +7721,7 @@
                 </a:tc>
                 <a:tc>
                   <a:txBody>
-                    <a:bodyPr wrap="square"/>
+                    <a:bodyPr/>
                     <a:lstStyle/>
                     <a:p>
                       <a:pPr algn="l"/>
@@ -7746,7 +7746,7 @@
               <a:tr h="292608">
                 <a:tc>
                   <a:txBody>
-                    <a:bodyPr wrap="square"/>
+                    <a:bodyPr/>
                     <a:lstStyle/>
                     <a:p>
                       <a:pPr algn="l"/>
@@ -7769,7 +7769,7 @@
                 </a:tc>
                 <a:tc>
                   <a:txBody>
-                    <a:bodyPr wrap="square"/>
+                    <a:bodyPr/>
                     <a:lstStyle/>
                     <a:p>
                       <a:pPr algn="l"/>
@@ -7792,7 +7792,7 @@
                 </a:tc>
                 <a:tc>
                   <a:txBody>
-                    <a:bodyPr wrap="square"/>
+                    <a:bodyPr/>
                     <a:lstStyle/>
                     <a:p>
                       <a:pPr algn="l"/>
@@ -7815,7 +7815,7 @@
                 </a:tc>
                 <a:tc>
                   <a:txBody>
-                    <a:bodyPr wrap="square"/>
+                    <a:bodyPr/>
                     <a:lstStyle/>
                     <a:p>
                       <a:pPr algn="l"/>
@@ -7838,7 +7838,7 @@
                 </a:tc>
                 <a:tc>
                   <a:txBody>
-                    <a:bodyPr wrap="square"/>
+                    <a:bodyPr/>
                     <a:lstStyle/>
                     <a:p>
                       <a:pPr algn="l"/>
@@ -7861,7 +7861,7 @@
                 </a:tc>
                 <a:tc>
                   <a:txBody>
-                    <a:bodyPr wrap="square"/>
+                    <a:bodyPr/>
                     <a:lstStyle/>
                     <a:p>
                       <a:pPr algn="l"/>
@@ -7884,7 +7884,7 @@
                 </a:tc>
                 <a:tc>
                   <a:txBody>
-                    <a:bodyPr wrap="square"/>
+                    <a:bodyPr/>
                     <a:lstStyle/>
                     <a:p>
                       <a:pPr algn="l"/>
@@ -7909,7 +7909,7 @@
               <a:tr h="292608">
                 <a:tc>
                   <a:txBody>
-                    <a:bodyPr wrap="square"/>
+                    <a:bodyPr/>
                     <a:lstStyle/>
                     <a:p>
                       <a:pPr algn="l"/>
@@ -7932,7 +7932,7 @@
                 </a:tc>
                 <a:tc>
                   <a:txBody>
-                    <a:bodyPr wrap="square"/>
+                    <a:bodyPr/>
                     <a:lstStyle/>
                     <a:p>
                       <a:pPr algn="l"/>
@@ -7955,7 +7955,7 @@
                 </a:tc>
                 <a:tc>
                   <a:txBody>
-                    <a:bodyPr wrap="square"/>
+                    <a:bodyPr/>
                     <a:lstStyle/>
                     <a:p>
                       <a:pPr algn="l"/>
@@ -7978,7 +7978,7 @@
                 </a:tc>
                 <a:tc>
                   <a:txBody>
-                    <a:bodyPr wrap="square"/>
+                    <a:bodyPr/>
                     <a:lstStyle/>
                     <a:p>
                       <a:pPr algn="l"/>
@@ -8001,7 +8001,7 @@
                 </a:tc>
                 <a:tc>
                   <a:txBody>
-                    <a:bodyPr wrap="square"/>
+                    <a:bodyPr/>
                     <a:lstStyle/>
                     <a:p>
                       <a:pPr algn="l"/>
@@ -8024,7 +8024,7 @@
                 </a:tc>
                 <a:tc>
                   <a:txBody>
-                    <a:bodyPr wrap="square"/>
+                    <a:bodyPr/>
                     <a:lstStyle/>
                     <a:p>
                       <a:pPr algn="l"/>
@@ -8047,7 +8047,7 @@
                 </a:tc>
                 <a:tc>
                   <a:txBody>
-                    <a:bodyPr wrap="square"/>
+                    <a:bodyPr/>
                     <a:lstStyle/>
                     <a:p>
                       <a:pPr algn="l"/>
@@ -8072,7 +8072,7 @@
               <a:tr h="292608">
                 <a:tc>
                   <a:txBody>
-                    <a:bodyPr wrap="square"/>
+                    <a:bodyPr/>
                     <a:lstStyle/>
                     <a:p>
                       <a:pPr algn="l"/>
@@ -8095,7 +8095,7 @@
                 </a:tc>
                 <a:tc>
                   <a:txBody>
-                    <a:bodyPr wrap="square"/>
+                    <a:bodyPr/>
                     <a:lstStyle/>
                     <a:p>
                       <a:pPr algn="l"/>
@@ -8118,7 +8118,7 @@
                 </a:tc>
                 <a:tc>
                   <a:txBody>
-                    <a:bodyPr wrap="square"/>
+                    <a:bodyPr/>
                     <a:lstStyle/>
                     <a:p>
                       <a:pPr algn="l"/>
@@ -8141,7 +8141,7 @@
                 </a:tc>
                 <a:tc>
                   <a:txBody>
-                    <a:bodyPr wrap="square"/>
+                    <a:bodyPr/>
                     <a:lstStyle/>
                     <a:p>
                       <a:pPr algn="l"/>
@@ -8164,7 +8164,7 @@
                 </a:tc>
                 <a:tc>
                   <a:txBody>
-                    <a:bodyPr wrap="square"/>
+                    <a:bodyPr/>
                     <a:lstStyle/>
                     <a:p>
                       <a:pPr algn="l"/>
@@ -8187,7 +8187,7 @@
                 </a:tc>
                 <a:tc>
                   <a:txBody>
-                    <a:bodyPr wrap="square"/>
+                    <a:bodyPr/>
                     <a:lstStyle/>
                     <a:p>
                       <a:pPr algn="l"/>
@@ -8210,7 +8210,7 @@
                 </a:tc>
                 <a:tc>
                   <a:txBody>
-                    <a:bodyPr wrap="square"/>
+                    <a:bodyPr/>
                     <a:lstStyle/>
                     <a:p>
                       <a:pPr algn="l"/>
@@ -8235,7 +8235,7 @@
               <a:tr h="292608">
                 <a:tc>
                   <a:txBody>
-                    <a:bodyPr wrap="square"/>
+                    <a:bodyPr/>
                     <a:lstStyle/>
                     <a:p>
                       <a:pPr algn="l"/>
@@ -8258,7 +8258,7 @@
                 </a:tc>
                 <a:tc>
                   <a:txBody>
-                    <a:bodyPr wrap="square"/>
+                    <a:bodyPr/>
                     <a:lstStyle/>
                     <a:p>
                       <a:pPr algn="l"/>
@@ -8281,7 +8281,7 @@
                 </a:tc>
                 <a:tc>
                   <a:txBody>
-                    <a:bodyPr wrap="square"/>
+                    <a:bodyPr/>
                     <a:lstStyle/>
                     <a:p>
                       <a:pPr algn="l"/>
@@ -8304,7 +8304,7 @@
                 </a:tc>
                 <a:tc>
                   <a:txBody>
-                    <a:bodyPr wrap="square"/>
+                    <a:bodyPr/>
                     <a:lstStyle/>
                     <a:p>
                       <a:pPr algn="l"/>
@@ -8327,7 +8327,7 @@
                 </a:tc>
                 <a:tc>
                   <a:txBody>
-                    <a:bodyPr wrap="square"/>
+                    <a:bodyPr/>
                     <a:lstStyle/>
                     <a:p>
                       <a:pPr algn="l"/>
@@ -8350,7 +8350,7 @@
                 </a:tc>
                 <a:tc>
                   <a:txBody>
-                    <a:bodyPr wrap="square"/>
+                    <a:bodyPr/>
                     <a:lstStyle/>
                     <a:p>
                       <a:pPr algn="l"/>
@@ -8373,7 +8373,7 @@
                 </a:tc>
                 <a:tc>
                   <a:txBody>
-                    <a:bodyPr wrap="square"/>
+                    <a:bodyPr/>
                     <a:lstStyle/>
                     <a:p>
                       <a:pPr algn="l"/>
@@ -8398,7 +8398,7 @@
               <a:tr h="292608">
                 <a:tc>
                   <a:txBody>
-                    <a:bodyPr wrap="square"/>
+                    <a:bodyPr/>
                     <a:lstStyle/>
                     <a:p>
                       <a:pPr algn="l"/>
@@ -8421,7 +8421,7 @@
                 </a:tc>
                 <a:tc>
                   <a:txBody>
-                    <a:bodyPr wrap="square"/>
+                    <a:bodyPr/>
                     <a:lstStyle/>
                     <a:p>
                       <a:pPr algn="l"/>
@@ -8444,7 +8444,7 @@
                 </a:tc>
                 <a:tc>
                   <a:txBody>
-                    <a:bodyPr wrap="square"/>
+                    <a:bodyPr/>
                     <a:lstStyle/>
                     <a:p>
                       <a:pPr algn="l"/>
@@ -8467,7 +8467,7 @@
                 </a:tc>
                 <a:tc>
                   <a:txBody>
-                    <a:bodyPr wrap="square"/>
+                    <a:bodyPr/>
                     <a:lstStyle/>
                     <a:p>
                       <a:pPr algn="l"/>
@@ -8490,7 +8490,7 @@
                 </a:tc>
                 <a:tc>
                   <a:txBody>
-                    <a:bodyPr wrap="square"/>
+                    <a:bodyPr/>
                     <a:lstStyle/>
                     <a:p>
                       <a:pPr algn="l"/>
@@ -8513,7 +8513,7 @@
                 </a:tc>
                 <a:tc>
                   <a:txBody>
-                    <a:bodyPr wrap="square"/>
+                    <a:bodyPr/>
                     <a:lstStyle/>
                     <a:p>
                       <a:pPr algn="l"/>
@@ -8536,7 +8536,7 @@
                 </a:tc>
                 <a:tc>
                   <a:txBody>
-                    <a:bodyPr wrap="square"/>
+                    <a:bodyPr/>
                     <a:lstStyle/>
                     <a:p>
                       <a:pPr algn="l"/>
@@ -8561,7 +8561,7 @@
               <a:tr h="292608">
                 <a:tc>
                   <a:txBody>
-                    <a:bodyPr wrap="square"/>
+                    <a:bodyPr/>
                     <a:lstStyle/>
                     <a:p>
                       <a:pPr algn="l"/>
@@ -8584,7 +8584,7 @@
                 </a:tc>
                 <a:tc>
                   <a:txBody>
-                    <a:bodyPr wrap="square"/>
+                    <a:bodyPr/>
                     <a:lstStyle/>
                     <a:p>
                       <a:pPr algn="l"/>
@@ -8607,7 +8607,7 @@
                 </a:tc>
                 <a:tc>
                   <a:txBody>
-                    <a:bodyPr wrap="square"/>
+                    <a:bodyPr/>
                     <a:lstStyle/>
                     <a:p>
                       <a:pPr algn="l"/>
@@ -8630,7 +8630,7 @@
                 </a:tc>
                 <a:tc>
                   <a:txBody>
-                    <a:bodyPr wrap="square"/>
+                    <a:bodyPr/>
                     <a:lstStyle/>
                     <a:p>
                       <a:pPr algn="l"/>
@@ -8653,7 +8653,7 @@
                 </a:tc>
                 <a:tc>
                   <a:txBody>
-                    <a:bodyPr wrap="square"/>
+                    <a:bodyPr/>
                     <a:lstStyle/>
                     <a:p>
                       <a:pPr algn="l"/>
@@ -8676,7 +8676,7 @@
                 </a:tc>
                 <a:tc>
                   <a:txBody>
-                    <a:bodyPr wrap="square"/>
+                    <a:bodyPr/>
                     <a:lstStyle/>
                     <a:p>
                       <a:pPr algn="l"/>
@@ -8699,7 +8699,7 @@
                 </a:tc>
                 <a:tc>
                   <a:txBody>
-                    <a:bodyPr wrap="square"/>
+                    <a:bodyPr/>
                     <a:lstStyle/>
                     <a:p>
                       <a:pPr algn="l"/>
@@ -8724,7 +8724,7 @@
               <a:tr h="292608">
                 <a:tc>
                   <a:txBody>
-                    <a:bodyPr wrap="square"/>
+                    <a:bodyPr/>
                     <a:lstStyle/>
                     <a:p>
                       <a:pPr algn="l"/>
@@ -8747,7 +8747,7 @@
                 </a:tc>
                 <a:tc>
                   <a:txBody>
-                    <a:bodyPr wrap="square"/>
+                    <a:bodyPr/>
                     <a:lstStyle/>
                     <a:p>
                       <a:pPr algn="l"/>
@@ -8770,7 +8770,7 @@
                 </a:tc>
                 <a:tc>
                   <a:txBody>
-                    <a:bodyPr wrap="square"/>
+                    <a:bodyPr/>
                     <a:lstStyle/>
                     <a:p>
                       <a:pPr algn="l"/>
@@ -8793,7 +8793,7 @@
                 </a:tc>
                 <a:tc>
                   <a:txBody>
-                    <a:bodyPr wrap="square"/>
+                    <a:bodyPr/>
                     <a:lstStyle/>
                     <a:p>
                       <a:pPr algn="l"/>
@@ -8816,7 +8816,7 @@
                 </a:tc>
                 <a:tc>
                   <a:txBody>
-                    <a:bodyPr wrap="square"/>
+                    <a:bodyPr/>
                     <a:lstStyle/>
                     <a:p>
                       <a:pPr algn="l"/>
@@ -8839,7 +8839,7 @@
                 </a:tc>
                 <a:tc>
                   <a:txBody>
-                    <a:bodyPr wrap="square"/>
+                    <a:bodyPr/>
                     <a:lstStyle/>
                     <a:p>
                       <a:pPr algn="l"/>
@@ -8862,7 +8862,7 @@
                 </a:tc>
                 <a:tc>
                   <a:txBody>
-                    <a:bodyPr wrap="square"/>
+                    <a:bodyPr/>
                     <a:lstStyle/>
                     <a:p>
                       <a:pPr algn="l"/>
@@ -8887,7 +8887,7 @@
               <a:tr h="292608">
                 <a:tc>
                   <a:txBody>
-                    <a:bodyPr wrap="square"/>
+                    <a:bodyPr/>
                     <a:lstStyle/>
                     <a:p>
                       <a:pPr algn="l"/>
@@ -8910,7 +8910,7 @@
                 </a:tc>
                 <a:tc>
                   <a:txBody>
-                    <a:bodyPr wrap="square"/>
+                    <a:bodyPr/>
                     <a:lstStyle/>
                     <a:p>
                       <a:pPr algn="l"/>
@@ -8933,7 +8933,7 @@
                 </a:tc>
                 <a:tc>
                   <a:txBody>
-                    <a:bodyPr wrap="square"/>
+                    <a:bodyPr/>
                     <a:lstStyle/>
                     <a:p>
                       <a:pPr algn="l"/>
@@ -8956,7 +8956,7 @@
                 </a:tc>
                 <a:tc>
                   <a:txBody>
-                    <a:bodyPr wrap="square"/>
+                    <a:bodyPr/>
                     <a:lstStyle/>
                     <a:p>
                       <a:pPr algn="l"/>
@@ -8979,7 +8979,7 @@
                 </a:tc>
                 <a:tc>
                   <a:txBody>
-                    <a:bodyPr wrap="square"/>
+                    <a:bodyPr/>
                     <a:lstStyle/>
                     <a:p>
                       <a:pPr algn="l"/>
@@ -9002,7 +9002,7 @@
                 </a:tc>
                 <a:tc>
                   <a:txBody>
-                    <a:bodyPr wrap="square"/>
+                    <a:bodyPr/>
                     <a:lstStyle/>
                     <a:p>
                       <a:pPr algn="l"/>
@@ -9025,7 +9025,7 @@
                 </a:tc>
                 <a:tc>
                   <a:txBody>
-                    <a:bodyPr wrap="square"/>
+                    <a:bodyPr/>
                     <a:lstStyle/>
                     <a:p>
                       <a:pPr algn="l"/>
@@ -9050,7 +9050,7 @@
               <a:tr h="292608">
                 <a:tc>
                   <a:txBody>
-                    <a:bodyPr wrap="square"/>
+                    <a:bodyPr/>
                     <a:lstStyle/>
                     <a:p>
                       <a:pPr algn="l"/>
@@ -9073,7 +9073,7 @@
                 </a:tc>
                 <a:tc>
                   <a:txBody>
-                    <a:bodyPr wrap="square"/>
+                    <a:bodyPr/>
                     <a:lstStyle/>
                     <a:p>
                       <a:pPr algn="l"/>
@@ -9096,7 +9096,7 @@
                 </a:tc>
                 <a:tc>
                   <a:txBody>
-                    <a:bodyPr wrap="square"/>
+                    <a:bodyPr/>
                     <a:lstStyle/>
                     <a:p>
                       <a:pPr algn="l"/>
@@ -9119,7 +9119,7 @@
                 </a:tc>
                 <a:tc>
                   <a:txBody>
-                    <a:bodyPr wrap="square"/>
+                    <a:bodyPr/>
                     <a:lstStyle/>
                     <a:p>
                       <a:pPr algn="l"/>
@@ -9142,7 +9142,7 @@
                 </a:tc>
                 <a:tc>
                   <a:txBody>
-                    <a:bodyPr wrap="square"/>
+                    <a:bodyPr/>
                     <a:lstStyle/>
                     <a:p>
                       <a:pPr algn="l"/>
@@ -9165,7 +9165,7 @@
                 </a:tc>
                 <a:tc>
                   <a:txBody>
-                    <a:bodyPr wrap="square"/>
+                    <a:bodyPr/>
                     <a:lstStyle/>
                     <a:p>
                       <a:pPr algn="l"/>
@@ -9188,7 +9188,7 @@
                 </a:tc>
                 <a:tc>
                   <a:txBody>
-                    <a:bodyPr wrap="square"/>
+                    <a:bodyPr/>
                     <a:lstStyle/>
                     <a:p>
                       <a:pPr algn="l"/>
@@ -9213,7 +9213,7 @@
               <a:tr h="292608">
                 <a:tc>
                   <a:txBody>
-                    <a:bodyPr wrap="square"/>
+                    <a:bodyPr/>
                     <a:lstStyle/>
                     <a:p>
                       <a:pPr algn="l"/>
@@ -9236,7 +9236,7 @@
                 </a:tc>
                 <a:tc>
                   <a:txBody>
-                    <a:bodyPr wrap="square"/>
+                    <a:bodyPr/>
                     <a:lstStyle/>
                     <a:p>
                       <a:pPr algn="l"/>
@@ -9259,7 +9259,7 @@
                 </a:tc>
                 <a:tc>
                   <a:txBody>
-                    <a:bodyPr wrap="square"/>
+                    <a:bodyPr/>
                     <a:lstStyle/>
                     <a:p>
                       <a:pPr algn="l"/>
@@ -9282,7 +9282,7 @@
                 </a:tc>
                 <a:tc>
                   <a:txBody>
-                    <a:bodyPr wrap="square"/>
+                    <a:bodyPr/>
                     <a:lstStyle/>
                     <a:p>
                       <a:pPr algn="l"/>
@@ -9305,7 +9305,7 @@
                 </a:tc>
                 <a:tc>
                   <a:txBody>
-                    <a:bodyPr wrap="square"/>
+                    <a:bodyPr/>
                     <a:lstStyle/>
                     <a:p>
                       <a:pPr algn="l"/>
@@ -9328,7 +9328,7 @@
                 </a:tc>
                 <a:tc>
                   <a:txBody>
-                    <a:bodyPr wrap="square"/>
+                    <a:bodyPr/>
                     <a:lstStyle/>
                     <a:p>
                       <a:pPr algn="l"/>
@@ -9351,7 +9351,7 @@
                 </a:tc>
                 <a:tc>
                   <a:txBody>
-                    <a:bodyPr wrap="square"/>
+                    <a:bodyPr/>
                     <a:lstStyle/>
                     <a:p>
                       <a:pPr algn="l"/>
@@ -9376,7 +9376,7 @@
               <a:tr h="292608">
                 <a:tc>
                   <a:txBody>
-                    <a:bodyPr wrap="square"/>
+                    <a:bodyPr/>
                     <a:lstStyle/>
                     <a:p>
                       <a:pPr algn="l"/>
@@ -9399,7 +9399,7 @@
                 </a:tc>
                 <a:tc>
                   <a:txBody>
-                    <a:bodyPr wrap="square"/>
+                    <a:bodyPr/>
                     <a:lstStyle/>
                     <a:p>
                       <a:pPr algn="l"/>
@@ -9422,7 +9422,7 @@
                 </a:tc>
                 <a:tc>
                   <a:txBody>
-                    <a:bodyPr wrap="square"/>
+                    <a:bodyPr/>
                     <a:lstStyle/>
                     <a:p>
                       <a:pPr algn="l"/>
@@ -9445,7 +9445,7 @@
                 </a:tc>
                 <a:tc>
                   <a:txBody>
-                    <a:bodyPr wrap="square"/>
+                    <a:bodyPr/>
                     <a:lstStyle/>
                     <a:p>
                       <a:pPr algn="l"/>
@@ -9468,7 +9468,7 @@
                 </a:tc>
                 <a:tc>
                   <a:txBody>
-                    <a:bodyPr wrap="square"/>
+                    <a:bodyPr/>
                     <a:lstStyle/>
                     <a:p>
                       <a:pPr algn="l"/>
@@ -9491,7 +9491,7 @@
                 </a:tc>
                 <a:tc>
                   <a:txBody>
-                    <a:bodyPr wrap="square"/>
+                    <a:bodyPr/>
                     <a:lstStyle/>
                     <a:p>
                       <a:pPr algn="l"/>
@@ -9514,7 +9514,7 @@
                 </a:tc>
                 <a:tc>
                   <a:txBody>
-                    <a:bodyPr wrap="square"/>
+                    <a:bodyPr/>
                     <a:lstStyle/>
                     <a:p>
                       <a:pPr algn="l"/>
@@ -9539,7 +9539,7 @@
               <a:tr h="292608">
                 <a:tc>
                   <a:txBody>
-                    <a:bodyPr wrap="square"/>
+                    <a:bodyPr/>
                     <a:lstStyle/>
                     <a:p>
                       <a:pPr algn="l"/>
@@ -9562,7 +9562,7 @@
                 </a:tc>
                 <a:tc>
                   <a:txBody>
-                    <a:bodyPr wrap="square"/>
+                    <a:bodyPr/>
                     <a:lstStyle/>
                     <a:p>
                       <a:pPr algn="l"/>
@@ -9585,7 +9585,7 @@
                 </a:tc>
                 <a:tc>
                   <a:txBody>
-                    <a:bodyPr wrap="square"/>
+                    <a:bodyPr/>
                     <a:lstStyle/>
                     <a:p>
                       <a:pPr algn="l"/>
@@ -9608,7 +9608,7 @@
                 </a:tc>
                 <a:tc>
                   <a:txBody>
-                    <a:bodyPr wrap="square"/>
+                    <a:bodyPr/>
                     <a:lstStyle/>
                     <a:p>
                       <a:pPr algn="l"/>
@@ -9631,7 +9631,7 @@
                 </a:tc>
                 <a:tc>
                   <a:txBody>
-                    <a:bodyPr wrap="square"/>
+                    <a:bodyPr/>
                     <a:lstStyle/>
                     <a:p>
                       <a:pPr algn="l"/>
@@ -9654,7 +9654,7 @@
                 </a:tc>
                 <a:tc>
                   <a:txBody>
-                    <a:bodyPr wrap="square"/>
+                    <a:bodyPr/>
                     <a:lstStyle/>
                     <a:p>
                       <a:pPr algn="l"/>
@@ -9677,7 +9677,7 @@
                 </a:tc>
                 <a:tc>
                   <a:txBody>
-                    <a:bodyPr wrap="square"/>
+                    <a:bodyPr/>
                     <a:lstStyle/>
                     <a:p>
                       <a:pPr algn="l"/>
@@ -9702,7 +9702,7 @@
               <a:tr h="292608">
                 <a:tc>
                   <a:txBody>
-                    <a:bodyPr wrap="square"/>
+                    <a:bodyPr/>
                     <a:lstStyle/>
                     <a:p>
                       <a:pPr algn="l"/>
@@ -9725,7 +9725,7 @@
                 </a:tc>
                 <a:tc>
                   <a:txBody>
-                    <a:bodyPr wrap="square"/>
+                    <a:bodyPr/>
                     <a:lstStyle/>
                     <a:p>
                       <a:pPr algn="l"/>
@@ -9748,7 +9748,7 @@
                 </a:tc>
                 <a:tc>
                   <a:txBody>
-                    <a:bodyPr wrap="square"/>
+                    <a:bodyPr/>
                     <a:lstStyle/>
                     <a:p>
                       <a:pPr algn="l"/>
@@ -9771,7 +9771,7 @@
                 </a:tc>
                 <a:tc>
                   <a:txBody>
-                    <a:bodyPr wrap="square"/>
+                    <a:bodyPr/>
                     <a:lstStyle/>
                     <a:p>
                       <a:pPr algn="l"/>
@@ -9794,7 +9794,7 @@
                 </a:tc>
                 <a:tc>
                   <a:txBody>
-                    <a:bodyPr wrap="square"/>
+                    <a:bodyPr/>
                     <a:lstStyle/>
                     <a:p>
                       <a:pPr algn="l"/>
@@ -9817,7 +9817,7 @@
                 </a:tc>
                 <a:tc>
                   <a:txBody>
-                    <a:bodyPr wrap="square"/>
+                    <a:bodyPr/>
                     <a:lstStyle/>
                     <a:p>
                       <a:pPr algn="l"/>
@@ -9840,7 +9840,7 @@
                 </a:tc>
                 <a:tc>
                   <a:txBody>
-                    <a:bodyPr wrap="square"/>
+                    <a:bodyPr/>
                     <a:lstStyle/>
                     <a:p>
                       <a:pPr algn="l"/>

--- a/ACQUA_SOLAR_COMERCIO_DE_EQUIPA.pptx
+++ b/ACQUA_SOLAR_COMERCIO_DE_EQUIPA.pptx
@@ -147,10 +147,10 @@
               <c:strCache>
                 <c:ptCount val="2"/>
                 <c:pt idx="0">
-                  <c:v>Marco 2026</c:v>
+                  <c:v>Abril 2026</c:v>
                 </c:pt>
                 <c:pt idx="1">
-                  <c:v>Abril 2026</c:v>
+                  <c:v>Maio 2026</c:v>
                 </c:pt>
               </c:strCache>
             </c:strRef>
@@ -162,10 +162,10 @@
                 <c:formatCode>General</c:formatCode>
                 <c:ptCount val="2"/>
                 <c:pt idx="0">
-                  <c:v>0</c:v>
+                  <c:v>22</c:v>
                 </c:pt>
                 <c:pt idx="1">
-                  <c:v>22</c:v>
+                  <c:v>20</c:v>
                 </c:pt>
               </c:numCache>
             </c:numRef>
@@ -196,10 +196,10 @@
               <c:strCache>
                 <c:ptCount val="2"/>
                 <c:pt idx="0">
-                  <c:v>Marco 2026</c:v>
+                  <c:v>Abril 2026</c:v>
                 </c:pt>
                 <c:pt idx="1">
-                  <c:v>Abril 2026</c:v>
+                  <c:v>Maio 2026</c:v>
                 </c:pt>
               </c:strCache>
             </c:strRef>
@@ -211,10 +211,10 @@
                 <c:formatCode>General</c:formatCode>
                 <c:ptCount val="2"/>
                 <c:pt idx="0">
-                  <c:v>0</c:v>
+                  <c:v>2</c:v>
                 </c:pt>
                 <c:pt idx="1">
-                  <c:v>2</c:v>
+                  <c:v>6</c:v>
                 </c:pt>
               </c:numCache>
             </c:numRef>
@@ -3387,7 +3387,7 @@
                 </a:solidFill>
                 <a:latin typeface="Calibri"/>
               </a:rPr>
-              <a:t>INDICADORES ABRIL 2026</a:t>
+              <a:t>INDICADORES MAIO 2026</a:t>
             </a:r>
           </a:p>
         </p:txBody>
@@ -3709,7 +3709,7 @@
                 </a:solidFill>
                 <a:latin typeface="Calibri"/>
               </a:rPr>
-              <a:t>24</a:t>
+              <a:t>26</a:t>
             </a:r>
           </a:p>
         </p:txBody>
@@ -3824,7 +3824,7 @@
                 </a:solidFill>
                 <a:latin typeface="Calibri"/>
               </a:rPr>
-              <a:t>22</a:t>
+              <a:t>20</a:t>
             </a:r>
           </a:p>
         </p:txBody>
@@ -3939,7 +3939,7 @@
                 </a:solidFill>
                 <a:latin typeface="Calibri"/>
               </a:rPr>
-              <a:t>2</a:t>
+              <a:t>6</a:t>
             </a:r>
           </a:p>
         </p:txBody>
@@ -4050,11 +4050,11 @@
             <a:r>
               <a:rPr sz="2800" b="1">
                 <a:solidFill>
-                  <a:srgbClr val="F59E0B"/>
+                  <a:srgbClr val="EF4444"/>
                 </a:solidFill>
                 <a:latin typeface="Calibri"/>
               </a:rPr>
-              <a:t>91.7%</a:t>
+              <a:t>76.9%</a:t>
             </a:r>
           </a:p>
         </p:txBody>
@@ -4155,7 +4155,7 @@
                           </a:solidFill>
                           <a:latin typeface="Calibri"/>
                         </a:rPr>
-                        <a:t>Marco 2026</a:t>
+                        <a:t>Abril 2026</a:t>
                       </a:r>
                     </a:p>
                   </a:txBody>
@@ -4178,7 +4178,7 @@
                           </a:solidFill>
                           <a:latin typeface="Calibri"/>
                         </a:rPr>
-                        <a:t>Abril 2026</a:t>
+                        <a:t>Maio 2026</a:t>
                       </a:r>
                     </a:p>
                   </a:txBody>
@@ -4249,7 +4249,7 @@
                           </a:solidFill>
                           <a:latin typeface="Calibri"/>
                         </a:rPr>
-                        <a:t>0</a:t>
+                        <a:t>24</a:t>
                       </a:r>
                     </a:p>
                   </a:txBody>
@@ -4272,7 +4272,7 @@
                           </a:solidFill>
                           <a:latin typeface="Calibri"/>
                         </a:rPr>
-                        <a:t>24</a:t>
+                        <a:t>26</a:t>
                       </a:r>
                     </a:p>
                   </a:txBody>
@@ -4295,7 +4295,7 @@
                           </a:solidFill>
                           <a:latin typeface="Calibri"/>
                         </a:rPr>
-                        <a:t>+ 24</a:t>
+                        <a:t>+ 2</a:t>
                       </a:r>
                     </a:p>
                   </a:txBody>
@@ -4343,7 +4343,7 @@
                           </a:solidFill>
                           <a:latin typeface="Calibri"/>
                         </a:rPr>
-                        <a:t>0</a:t>
+                        <a:t>22</a:t>
                       </a:r>
                     </a:p>
                   </a:txBody>
@@ -4366,7 +4366,7 @@
                           </a:solidFill>
                           <a:latin typeface="Calibri"/>
                         </a:rPr>
-                        <a:t>22</a:t>
+                        <a:t>20</a:t>
                       </a:r>
                     </a:p>
                   </a:txBody>
@@ -4389,7 +4389,7 @@
                           </a:solidFill>
                           <a:latin typeface="Calibri"/>
                         </a:rPr>
-                        <a:t>+ 22</a:t>
+                        <a:t>- 2</a:t>
                       </a:r>
                     </a:p>
                   </a:txBody>
@@ -4437,7 +4437,7 @@
                           </a:solidFill>
                           <a:latin typeface="Calibri"/>
                         </a:rPr>
-                        <a:t>0</a:t>
+                        <a:t>2</a:t>
                       </a:r>
                     </a:p>
                   </a:txBody>
@@ -4460,7 +4460,7 @@
                           </a:solidFill>
                           <a:latin typeface="Calibri"/>
                         </a:rPr>
-                        <a:t>2</a:t>
+                        <a:t>6</a:t>
                       </a:r>
                     </a:p>
                   </a:txBody>
@@ -4483,7 +4483,7 @@
                           </a:solidFill>
                           <a:latin typeface="Calibri"/>
                         </a:rPr>
-                        <a:t>+ 2</a:t>
+                        <a:t>+ 4</a:t>
                       </a:r>
                     </a:p>
                   </a:txBody>
@@ -4554,7 +4554,7 @@
                           </a:solidFill>
                           <a:latin typeface="Calibri"/>
                         </a:rPr>
-                        <a:t>91.7%</a:t>
+                        <a:t>76.9%</a:t>
                       </a:r>
                     </a:p>
                   </a:txBody>
@@ -4577,7 +4577,7 @@
                           </a:solidFill>
                           <a:latin typeface="Calibri"/>
                         </a:rPr>
-                        <a:t>+ 0.0pp</a:t>
+                        <a:t>- 14.8pp</a:t>
                       </a:r>
                     </a:p>
                   </a:txBody>
@@ -4894,7 +4894,7 @@
                           </a:solidFill>
                           <a:latin typeface="Calibri"/>
                         </a:rPr>
-                        <a:t>Marco 2026</a:t>
+                        <a:t>Abril 2026</a:t>
                       </a:r>
                     </a:p>
                   </a:txBody>
@@ -4917,7 +4917,7 @@
                           </a:solidFill>
                           <a:latin typeface="Calibri"/>
                         </a:rPr>
-                        <a:t>0</a:t>
+                        <a:t>24</a:t>
                       </a:r>
                     </a:p>
                   </a:txBody>
@@ -4940,7 +4940,7 @@
                           </a:solidFill>
                           <a:latin typeface="Calibri"/>
                         </a:rPr>
-                        <a:t>0</a:t>
+                        <a:t>22</a:t>
                       </a:r>
                     </a:p>
                   </a:txBody>
@@ -4963,7 +4963,7 @@
                           </a:solidFill>
                           <a:latin typeface="Calibri"/>
                         </a:rPr>
-                        <a:t>0</a:t>
+                        <a:t>2</a:t>
                       </a:r>
                     </a:p>
                   </a:txBody>
@@ -5011,7 +5011,7 @@
                           </a:solidFill>
                           <a:latin typeface="Calibri"/>
                         </a:rPr>
-                        <a:t>Abril 2026</a:t>
+                        <a:t>Maio 2026</a:t>
                       </a:r>
                     </a:p>
                   </a:txBody>
@@ -5034,7 +5034,7 @@
                           </a:solidFill>
                           <a:latin typeface="Calibri"/>
                         </a:rPr>
-                        <a:t>24</a:t>
+                        <a:t>26</a:t>
                       </a:r>
                     </a:p>
                   </a:txBody>
@@ -5057,7 +5057,7 @@
                           </a:solidFill>
                           <a:latin typeface="Calibri"/>
                         </a:rPr>
-                        <a:t>22</a:t>
+                        <a:t>20</a:t>
                       </a:r>
                     </a:p>
                   </a:txBody>
@@ -5080,7 +5080,7 @@
                           </a:solidFill>
                           <a:latin typeface="Calibri"/>
                         </a:rPr>
-                        <a:t>2</a:t>
+                        <a:t>6</a:t>
                       </a:r>
                     </a:p>
                   </a:txBody>
@@ -5103,7 +5103,7 @@
                           </a:solidFill>
                           <a:latin typeface="Calibri"/>
                         </a:rPr>
-                        <a:t>91.7%</a:t>
+                        <a:t>76.9%</a:t>
                       </a:r>
                     </a:p>
                   </a:txBody>
@@ -5191,7 +5191,7 @@
                 </a:solidFill>
                 <a:latin typeface="Calibri"/>
               </a:rPr>
-              <a:t>PERFORMANCE: 91.7% - REGULAR</a:t>
+              <a:t>PERFORMANCE: 76.9% - ATENCAO</a:t>
             </a:r>
           </a:p>
         </p:txBody>
@@ -5276,7 +5276,7 @@
                 </a:solidFill>
                 <a:latin typeface="Calibri"/>
               </a:rPr>
-              <a:t>OCORRENCIAS FORA DO PRAZO (2)</a:t>
+              <a:t>OCORRENCIAS FORA DO PRAZO (6)</a:t>
             </a:r>
           </a:p>
         </p:txBody>
@@ -5334,7 +5334,7 @@
         </p:nvGraphicFramePr>
         <p:xfrm>
           <a:off x="457200" y="1828800"/>
-          <a:ext cx="11429999" cy="1152144"/>
+          <a:ext cx="11429999" cy="2688336"/>
         </p:xfrm>
         <a:graphic>
           <a:graphicData uri="http://schemas.openxmlformats.org/drawingml/2006/table">
@@ -5480,7 +5480,7 @@
                           </a:solidFill>
                           <a:latin typeface="Calibri"/>
                         </a:rPr>
-                        <a:t>278683</a:t>
+                        <a:t>281664</a:t>
                       </a:r>
                     </a:p>
                   </a:txBody>
@@ -5503,7 +5503,7 @@
                           </a:solidFill>
                           <a:latin typeface="Calibri"/>
                         </a:rPr>
-                        <a:t>TIAGO WYSOCZNSKI - GUARANIACU / PR</a:t>
+                        <a:t>FELIPE LEITHARDT FAG - PASSO FUNDO / RS</a:t>
                       </a:r>
                     </a:p>
                   </a:txBody>
@@ -5526,7 +5526,7 @@
                           </a:solidFill>
                           <a:latin typeface="Calibri"/>
                         </a:rPr>
-                        <a:t>GUARANIACU/PR</a:t>
+                        <a:t>PASSO FUNDO/RS</a:t>
                       </a:r>
                     </a:p>
                   </a:txBody>
@@ -5549,7 +5549,7 @@
                           </a:solidFill>
                           <a:latin typeface="Calibri"/>
                         </a:rPr>
-                        <a:t>20/04/2026</a:t>
+                        <a:t>11/05/2026</a:t>
                       </a:r>
                     </a:p>
                   </a:txBody>
@@ -5597,7 +5597,7 @@
                           </a:solidFill>
                           <a:latin typeface="Calibri"/>
                         </a:rPr>
-                        <a:t>278980</a:t>
+                        <a:t>281795</a:t>
                       </a:r>
                     </a:p>
                   </a:txBody>
@@ -5620,7 +5620,7 @@
                           </a:solidFill>
                           <a:latin typeface="Calibri"/>
                         </a:rPr>
-                        <a:t>JORGE ANDRE LOURENCO - CIANORTE / PR</a:t>
+                        <a:t>LUDIERO ADRIANO RAMI - SANTA ROSA / RS</a:t>
                       </a:r>
                     </a:p>
                   </a:txBody>
@@ -5643,7 +5643,7 @@
                           </a:solidFill>
                           <a:latin typeface="Calibri"/>
                         </a:rPr>
-                        <a:t>CIANORTE/PR</a:t>
+                        <a:t>SANTA ROSA/RS</a:t>
                       </a:r>
                     </a:p>
                   </a:txBody>
@@ -5666,7 +5666,7 @@
                           </a:solidFill>
                           <a:latin typeface="Calibri"/>
                         </a:rPr>
-                        <a:t>20/04/2026</a:t>
+                        <a:t>12/05/2026</a:t>
                       </a:r>
                     </a:p>
                   </a:txBody>
@@ -5690,6 +5690,474 @@
                           <a:latin typeface="Calibri"/>
                         </a:rPr>
                         <a:t>ENTREGUE FORA DO PRAZO</a:t>
+                      </a:r>
+                    </a:p>
+                  </a:txBody>
+                  <a:tcPr>
+                    <a:solidFill>
+                      <a:srgbClr val="F2F2F2"/>
+                    </a:solidFill>
+                  </a:tcPr>
+                </a:tc>
+              </a:tr>
+              <a:tr h="384048">
+                <a:tc>
+                  <a:txBody>
+                    <a:bodyPr/>
+                    <a:lstStyle/>
+                    <a:p>
+                      <a:pPr algn="l"/>
+                      <a:r>
+                        <a:rPr sz="1000" b="0">
+                          <a:solidFill>
+                            <a:srgbClr val="1D1B43"/>
+                          </a:solidFill>
+                          <a:latin typeface="Calibri"/>
+                        </a:rPr>
+                        <a:t>282512</a:t>
+                      </a:r>
+                    </a:p>
+                  </a:txBody>
+                  <a:tcPr>
+                    <a:solidFill>
+                      <a:srgbClr val="FFFFFF"/>
+                    </a:solidFill>
+                  </a:tcPr>
+                </a:tc>
+                <a:tc>
+                  <a:txBody>
+                    <a:bodyPr/>
+                    <a:lstStyle/>
+                    <a:p>
+                      <a:pPr algn="l"/>
+                      <a:r>
+                        <a:rPr sz="1000" b="0">
+                          <a:solidFill>
+                            <a:srgbClr val="1D1B43"/>
+                          </a:solidFill>
+                          <a:latin typeface="Calibri"/>
+                        </a:rPr>
+                        <a:t>MEIO CONGELADO LTDA - SAO PAULO / SP</a:t>
+                      </a:r>
+                    </a:p>
+                  </a:txBody>
+                  <a:tcPr>
+                    <a:solidFill>
+                      <a:srgbClr val="FFFFFF"/>
+                    </a:solidFill>
+                  </a:tcPr>
+                </a:tc>
+                <a:tc>
+                  <a:txBody>
+                    <a:bodyPr/>
+                    <a:lstStyle/>
+                    <a:p>
+                      <a:pPr algn="l"/>
+                      <a:r>
+                        <a:rPr sz="1000" b="0">
+                          <a:solidFill>
+                            <a:srgbClr val="1D1B43"/>
+                          </a:solidFill>
+                          <a:latin typeface="Calibri"/>
+                        </a:rPr>
+                        <a:t>SAO PAULO/SP</a:t>
+                      </a:r>
+                    </a:p>
+                  </a:txBody>
+                  <a:tcPr>
+                    <a:solidFill>
+                      <a:srgbClr val="FFFFFF"/>
+                    </a:solidFill>
+                  </a:tcPr>
+                </a:tc>
+                <a:tc>
+                  <a:txBody>
+                    <a:bodyPr/>
+                    <a:lstStyle/>
+                    <a:p>
+                      <a:pPr algn="l"/>
+                      <a:r>
+                        <a:rPr sz="1000" b="0">
+                          <a:solidFill>
+                            <a:srgbClr val="1D1B43"/>
+                          </a:solidFill>
+                          <a:latin typeface="Calibri"/>
+                        </a:rPr>
+                        <a:t>15/05/2026</a:t>
+                      </a:r>
+                    </a:p>
+                  </a:txBody>
+                  <a:tcPr>
+                    <a:solidFill>
+                      <a:srgbClr val="FFFFFF"/>
+                    </a:solidFill>
+                  </a:tcPr>
+                </a:tc>
+                <a:tc>
+                  <a:txBody>
+                    <a:bodyPr/>
+                    <a:lstStyle/>
+                    <a:p>
+                      <a:pPr algn="l"/>
+                      <a:r>
+                        <a:rPr sz="1000" b="0">
+                          <a:solidFill>
+                            <a:srgbClr val="1D1B43"/>
+                          </a:solidFill>
+                          <a:latin typeface="Calibri"/>
+                        </a:rPr>
+                        <a:t>ENTREGUE FORA DO PRAZO</a:t>
+                      </a:r>
+                    </a:p>
+                  </a:txBody>
+                  <a:tcPr>
+                    <a:solidFill>
+                      <a:srgbClr val="FFFFFF"/>
+                    </a:solidFill>
+                  </a:tcPr>
+                </a:tc>
+              </a:tr>
+              <a:tr h="384048">
+                <a:tc>
+                  <a:txBody>
+                    <a:bodyPr/>
+                    <a:lstStyle/>
+                    <a:p>
+                      <a:pPr algn="l"/>
+                      <a:r>
+                        <a:rPr sz="1000" b="0">
+                          <a:solidFill>
+                            <a:srgbClr val="1D1B43"/>
+                          </a:solidFill>
+                          <a:latin typeface="Calibri"/>
+                        </a:rPr>
+                        <a:t>282514</a:t>
+                      </a:r>
+                    </a:p>
+                  </a:txBody>
+                  <a:tcPr>
+                    <a:solidFill>
+                      <a:srgbClr val="F2F2F2"/>
+                    </a:solidFill>
+                  </a:tcPr>
+                </a:tc>
+                <a:tc>
+                  <a:txBody>
+                    <a:bodyPr/>
+                    <a:lstStyle/>
+                    <a:p>
+                      <a:pPr algn="l"/>
+                      <a:r>
+                        <a:rPr sz="1000" b="0">
+                          <a:solidFill>
+                            <a:srgbClr val="1D1B43"/>
+                          </a:solidFill>
+                          <a:latin typeface="Calibri"/>
+                        </a:rPr>
+                        <a:t>SAFEVOLT ENERGY LTDA - IRACEMINHA / SC</a:t>
+                      </a:r>
+                    </a:p>
+                  </a:txBody>
+                  <a:tcPr>
+                    <a:solidFill>
+                      <a:srgbClr val="F2F2F2"/>
+                    </a:solidFill>
+                  </a:tcPr>
+                </a:tc>
+                <a:tc>
+                  <a:txBody>
+                    <a:bodyPr/>
+                    <a:lstStyle/>
+                    <a:p>
+                      <a:pPr algn="l"/>
+                      <a:r>
+                        <a:rPr sz="1000" b="0">
+                          <a:solidFill>
+                            <a:srgbClr val="1D1B43"/>
+                          </a:solidFill>
+                          <a:latin typeface="Calibri"/>
+                        </a:rPr>
+                        <a:t>IRACEMINHA/SC</a:t>
+                      </a:r>
+                    </a:p>
+                  </a:txBody>
+                  <a:tcPr>
+                    <a:solidFill>
+                      <a:srgbClr val="F2F2F2"/>
+                    </a:solidFill>
+                  </a:tcPr>
+                </a:tc>
+                <a:tc>
+                  <a:txBody>
+                    <a:bodyPr/>
+                    <a:lstStyle/>
+                    <a:p>
+                      <a:pPr algn="l"/>
+                      <a:r>
+                        <a:rPr sz="1000" b="0">
+                          <a:solidFill>
+                            <a:srgbClr val="1D1B43"/>
+                          </a:solidFill>
+                          <a:latin typeface="Calibri"/>
+                        </a:rPr>
+                        <a:t>14/05/2026</a:t>
+                      </a:r>
+                    </a:p>
+                  </a:txBody>
+                  <a:tcPr>
+                    <a:solidFill>
+                      <a:srgbClr val="F2F2F2"/>
+                    </a:solidFill>
+                  </a:tcPr>
+                </a:tc>
+                <a:tc>
+                  <a:txBody>
+                    <a:bodyPr/>
+                    <a:lstStyle/>
+                    <a:p>
+                      <a:pPr algn="l"/>
+                      <a:r>
+                        <a:rPr sz="1000" b="0">
+                          <a:solidFill>
+                            <a:srgbClr val="1D1B43"/>
+                          </a:solidFill>
+                          <a:latin typeface="Calibri"/>
+                        </a:rPr>
+                        <a:t>ENTREGUE FORA DO PRAZO</a:t>
+                      </a:r>
+                    </a:p>
+                  </a:txBody>
+                  <a:tcPr>
+                    <a:solidFill>
+                      <a:srgbClr val="F2F2F2"/>
+                    </a:solidFill>
+                  </a:tcPr>
+                </a:tc>
+              </a:tr>
+              <a:tr h="384048">
+                <a:tc>
+                  <a:txBody>
+                    <a:bodyPr/>
+                    <a:lstStyle/>
+                    <a:p>
+                      <a:pPr algn="l"/>
+                      <a:r>
+                        <a:rPr sz="1000" b="0">
+                          <a:solidFill>
+                            <a:srgbClr val="1D1B43"/>
+                          </a:solidFill>
+                          <a:latin typeface="Calibri"/>
+                        </a:rPr>
+                        <a:t>282720</a:t>
+                      </a:r>
+                    </a:p>
+                  </a:txBody>
+                  <a:tcPr>
+                    <a:solidFill>
+                      <a:srgbClr val="FFFFFF"/>
+                    </a:solidFill>
+                  </a:tcPr>
+                </a:tc>
+                <a:tc>
+                  <a:txBody>
+                    <a:bodyPr/>
+                    <a:lstStyle/>
+                    <a:p>
+                      <a:pPr algn="l"/>
+                      <a:r>
+                        <a:rPr sz="1000" b="0">
+                          <a:solidFill>
+                            <a:srgbClr val="1D1B43"/>
+                          </a:solidFill>
+                          <a:latin typeface="Calibri"/>
+                        </a:rPr>
+                        <a:t>SIMOLDES ACOS BRASIL - SAO JOSE DOS PINHAIS / PR</a:t>
+                      </a:r>
+                    </a:p>
+                  </a:txBody>
+                  <a:tcPr>
+                    <a:solidFill>
+                      <a:srgbClr val="FFFFFF"/>
+                    </a:solidFill>
+                  </a:tcPr>
+                </a:tc>
+                <a:tc>
+                  <a:txBody>
+                    <a:bodyPr/>
+                    <a:lstStyle/>
+                    <a:p>
+                      <a:pPr algn="l"/>
+                      <a:r>
+                        <a:rPr sz="1000" b="0">
+                          <a:solidFill>
+                            <a:srgbClr val="1D1B43"/>
+                          </a:solidFill>
+                          <a:latin typeface="Calibri"/>
+                        </a:rPr>
+                        <a:t>SAO JOSE DOS PINHAIS/PR</a:t>
+                      </a:r>
+                    </a:p>
+                  </a:txBody>
+                  <a:tcPr>
+                    <a:solidFill>
+                      <a:srgbClr val="FFFFFF"/>
+                    </a:solidFill>
+                  </a:tcPr>
+                </a:tc>
+                <a:tc>
+                  <a:txBody>
+                    <a:bodyPr/>
+                    <a:lstStyle/>
+                    <a:p>
+                      <a:pPr algn="l"/>
+                      <a:r>
+                        <a:rPr sz="1000" b="0">
+                          <a:solidFill>
+                            <a:srgbClr val="1D1B43"/>
+                          </a:solidFill>
+                          <a:latin typeface="Calibri"/>
+                        </a:rPr>
+                        <a:t>14/05/2026</a:t>
+                      </a:r>
+                    </a:p>
+                  </a:txBody>
+                  <a:tcPr>
+                    <a:solidFill>
+                      <a:srgbClr val="FFFFFF"/>
+                    </a:solidFill>
+                  </a:tcPr>
+                </a:tc>
+                <a:tc>
+                  <a:txBody>
+                    <a:bodyPr/>
+                    <a:lstStyle/>
+                    <a:p>
+                      <a:pPr algn="l"/>
+                      <a:r>
+                        <a:rPr sz="1000" b="0">
+                          <a:solidFill>
+                            <a:srgbClr val="1D1B43"/>
+                          </a:solidFill>
+                          <a:latin typeface="Calibri"/>
+                        </a:rPr>
+                        <a:t>FORA DO PRAZO</a:t>
+                      </a:r>
+                    </a:p>
+                  </a:txBody>
+                  <a:tcPr>
+                    <a:solidFill>
+                      <a:srgbClr val="FFFFFF"/>
+                    </a:solidFill>
+                  </a:tcPr>
+                </a:tc>
+              </a:tr>
+              <a:tr h="384048">
+                <a:tc>
+                  <a:txBody>
+                    <a:bodyPr/>
+                    <a:lstStyle/>
+                    <a:p>
+                      <a:pPr algn="l"/>
+                      <a:r>
+                        <a:rPr sz="1000" b="0">
+                          <a:solidFill>
+                            <a:srgbClr val="1D1B43"/>
+                          </a:solidFill>
+                          <a:latin typeface="Calibri"/>
+                        </a:rPr>
+                        <a:t>282721</a:t>
+                      </a:r>
+                    </a:p>
+                  </a:txBody>
+                  <a:tcPr>
+                    <a:solidFill>
+                      <a:srgbClr val="F2F2F2"/>
+                    </a:solidFill>
+                  </a:tcPr>
+                </a:tc>
+                <a:tc>
+                  <a:txBody>
+                    <a:bodyPr/>
+                    <a:lstStyle/>
+                    <a:p>
+                      <a:pPr algn="l"/>
+                      <a:r>
+                        <a:rPr sz="1000" b="0">
+                          <a:solidFill>
+                            <a:srgbClr val="1D1B43"/>
+                          </a:solidFill>
+                          <a:latin typeface="Calibri"/>
+                        </a:rPr>
+                        <a:t>SIMOLDES ACOS BRASIL - SAO JOSE DOS PINHAIS / PR</a:t>
+                      </a:r>
+                    </a:p>
+                  </a:txBody>
+                  <a:tcPr>
+                    <a:solidFill>
+                      <a:srgbClr val="F2F2F2"/>
+                    </a:solidFill>
+                  </a:tcPr>
+                </a:tc>
+                <a:tc>
+                  <a:txBody>
+                    <a:bodyPr/>
+                    <a:lstStyle/>
+                    <a:p>
+                      <a:pPr algn="l"/>
+                      <a:r>
+                        <a:rPr sz="1000" b="0">
+                          <a:solidFill>
+                            <a:srgbClr val="1D1B43"/>
+                          </a:solidFill>
+                          <a:latin typeface="Calibri"/>
+                        </a:rPr>
+                        <a:t>SAO JOSE DOS PINHAIS/PR</a:t>
+                      </a:r>
+                    </a:p>
+                  </a:txBody>
+                  <a:tcPr>
+                    <a:solidFill>
+                      <a:srgbClr val="F2F2F2"/>
+                    </a:solidFill>
+                  </a:tcPr>
+                </a:tc>
+                <a:tc>
+                  <a:txBody>
+                    <a:bodyPr/>
+                    <a:lstStyle/>
+                    <a:p>
+                      <a:pPr algn="l"/>
+                      <a:r>
+                        <a:rPr sz="1000" b="0">
+                          <a:solidFill>
+                            <a:srgbClr val="1D1B43"/>
+                          </a:solidFill>
+                          <a:latin typeface="Calibri"/>
+                        </a:rPr>
+                        <a:t>14/05/2026</a:t>
+                      </a:r>
+                    </a:p>
+                  </a:txBody>
+                  <a:tcPr>
+                    <a:solidFill>
+                      <a:srgbClr val="F2F2F2"/>
+                    </a:solidFill>
+                  </a:tcPr>
+                </a:tc>
+                <a:tc>
+                  <a:txBody>
+                    <a:bodyPr/>
+                    <a:lstStyle/>
+                    <a:p>
+                      <a:pPr algn="l"/>
+                      <a:r>
+                        <a:rPr sz="1000" b="0">
+                          <a:solidFill>
+                            <a:srgbClr val="1D1B43"/>
+                          </a:solidFill>
+                          <a:latin typeface="Calibri"/>
+                        </a:rPr>
+                        <a:t>FORA DO PRAZO</a:t>
                       </a:r>
                     </a:p>
                   </a:txBody>
@@ -5842,7 +6310,7 @@
         </p:nvGraphicFramePr>
         <p:xfrm>
           <a:off x="731520" y="1920240"/>
-          <a:ext cx="10698480" cy="4389120"/>
+          <a:ext cx="10698480" cy="3200400"/>
         </p:xfrm>
         <a:graphic>
           <a:graphicData uri="http://schemas.openxmlformats.org/drawingml/2006/table">
@@ -5858,7 +6326,7 @@
                 <a:gridCol w="1554480"/>
                 <a:gridCol w="3108960"/>
               </a:tblGrid>
-              <a:tr h="438912">
+              <a:tr h="457200">
                 <a:tc>
                   <a:txBody>
                     <a:bodyPr/>
@@ -5998,7 +6466,7 @@
                   </a:tcPr>
                 </a:tc>
               </a:tr>
-              <a:tr h="438912">
+              <a:tr h="457200">
                 <a:tc>
                   <a:txBody>
                     <a:bodyPr/>
@@ -6035,6 +6503,29 @@
                           </a:solidFill>
                           <a:latin typeface="Calibri"/>
                         </a:rPr>
+                        <a:t>8</a:t>
+                      </a:r>
+                    </a:p>
+                  </a:txBody>
+                  <a:tcPr>
+                    <a:solidFill>
+                      <a:srgbClr val="FFFFFF"/>
+                    </a:solidFill>
+                  </a:tcPr>
+                </a:tc>
+                <a:tc>
+                  <a:txBody>
+                    <a:bodyPr/>
+                    <a:lstStyle/>
+                    <a:p>
+                      <a:pPr algn="l"/>
+                      <a:r>
+                        <a:rPr sz="1000" b="0">
+                          <a:solidFill>
+                            <a:srgbClr val="1D1B43"/>
+                          </a:solidFill>
+                          <a:latin typeface="Calibri"/>
+                        </a:rPr>
                         <a:t>7</a:t>
                       </a:r>
                     </a:p>
@@ -6058,7 +6549,7 @@
                           </a:solidFill>
                           <a:latin typeface="Calibri"/>
                         </a:rPr>
-                        <a:t>7</a:t>
+                        <a:t>1</a:t>
                       </a:r>
                     </a:p>
                   </a:txBody>
@@ -6081,12 +6572,480 @@
                           </a:solidFill>
                           <a:latin typeface="Calibri"/>
                         </a:rPr>
+                        <a:t>87.5%</a:t>
+                      </a:r>
+                    </a:p>
+                  </a:txBody>
+                  <a:tcPr>
+                    <a:solidFill>
+                      <a:srgbClr val="FFFFFF"/>
+                    </a:solidFill>
+                  </a:tcPr>
+                </a:tc>
+                <a:tc>
+                  <a:txBody>
+                    <a:bodyPr/>
+                    <a:lstStyle/>
+                    <a:p>
+                      <a:pPr algn="l"/>
+                      <a:r>
+                        <a:rPr sz="1000" b="0">
+                          <a:solidFill>
+                            <a:srgbClr val="1D1B43"/>
+                          </a:solidFill>
+                          <a:latin typeface="Calibri"/>
+                        </a:rPr>
+                        <a:t>Regular</a:t>
+                      </a:r>
+                    </a:p>
+                  </a:txBody>
+                  <a:tcPr>
+                    <a:solidFill>
+                      <a:srgbClr val="FFFFFF"/>
+                    </a:solidFill>
+                  </a:tcPr>
+                </a:tc>
+              </a:tr>
+              <a:tr h="457200">
+                <a:tc>
+                  <a:txBody>
+                    <a:bodyPr/>
+                    <a:lstStyle/>
+                    <a:p>
+                      <a:pPr algn="l"/>
+                      <a:r>
+                        <a:rPr sz="1000" b="0">
+                          <a:solidFill>
+                            <a:srgbClr val="1D1B43"/>
+                          </a:solidFill>
+                          <a:latin typeface="Calibri"/>
+                        </a:rPr>
+                        <a:t>PR</a:t>
+                      </a:r>
+                    </a:p>
+                  </a:txBody>
+                  <a:tcPr>
+                    <a:solidFill>
+                      <a:srgbClr val="F2F2F2"/>
+                    </a:solidFill>
+                  </a:tcPr>
+                </a:tc>
+                <a:tc>
+                  <a:txBody>
+                    <a:bodyPr/>
+                    <a:lstStyle/>
+                    <a:p>
+                      <a:pPr algn="l"/>
+                      <a:r>
+                        <a:rPr sz="1000" b="0">
+                          <a:solidFill>
+                            <a:srgbClr val="1D1B43"/>
+                          </a:solidFill>
+                          <a:latin typeface="Calibri"/>
+                        </a:rPr>
+                        <a:t>6</a:t>
+                      </a:r>
+                    </a:p>
+                  </a:txBody>
+                  <a:tcPr>
+                    <a:solidFill>
+                      <a:srgbClr val="F2F2F2"/>
+                    </a:solidFill>
+                  </a:tcPr>
+                </a:tc>
+                <a:tc>
+                  <a:txBody>
+                    <a:bodyPr/>
+                    <a:lstStyle/>
+                    <a:p>
+                      <a:pPr algn="l"/>
+                      <a:r>
+                        <a:rPr sz="1000" b="0">
+                          <a:solidFill>
+                            <a:srgbClr val="1D1B43"/>
+                          </a:solidFill>
+                          <a:latin typeface="Calibri"/>
+                        </a:rPr>
+                        <a:t>4</a:t>
+                      </a:r>
+                    </a:p>
+                  </a:txBody>
+                  <a:tcPr>
+                    <a:solidFill>
+                      <a:srgbClr val="F2F2F2"/>
+                    </a:solidFill>
+                  </a:tcPr>
+                </a:tc>
+                <a:tc>
+                  <a:txBody>
+                    <a:bodyPr/>
+                    <a:lstStyle/>
+                    <a:p>
+                      <a:pPr algn="l"/>
+                      <a:r>
+                        <a:rPr sz="1000" b="0">
+                          <a:solidFill>
+                            <a:srgbClr val="1D1B43"/>
+                          </a:solidFill>
+                          <a:latin typeface="Calibri"/>
+                        </a:rPr>
+                        <a:t>2</a:t>
+                      </a:r>
+                    </a:p>
+                  </a:txBody>
+                  <a:tcPr>
+                    <a:solidFill>
+                      <a:srgbClr val="F2F2F2"/>
+                    </a:solidFill>
+                  </a:tcPr>
+                </a:tc>
+                <a:tc>
+                  <a:txBody>
+                    <a:bodyPr/>
+                    <a:lstStyle/>
+                    <a:p>
+                      <a:pPr algn="l"/>
+                      <a:r>
+                        <a:rPr sz="1000" b="0">
+                          <a:solidFill>
+                            <a:srgbClr val="1D1B43"/>
+                          </a:solidFill>
+                          <a:latin typeface="Calibri"/>
+                        </a:rPr>
+                        <a:t>66.7%</a:t>
+                      </a:r>
+                    </a:p>
+                  </a:txBody>
+                  <a:tcPr>
+                    <a:solidFill>
+                      <a:srgbClr val="F2F2F2"/>
+                    </a:solidFill>
+                  </a:tcPr>
+                </a:tc>
+                <a:tc>
+                  <a:txBody>
+                    <a:bodyPr/>
+                    <a:lstStyle/>
+                    <a:p>
+                      <a:pPr algn="l"/>
+                      <a:r>
+                        <a:rPr sz="1000" b="0">
+                          <a:solidFill>
+                            <a:srgbClr val="1D1B43"/>
+                          </a:solidFill>
+                          <a:latin typeface="Calibri"/>
+                        </a:rPr>
+                        <a:t>Atencao</a:t>
+                      </a:r>
+                    </a:p>
+                  </a:txBody>
+                  <a:tcPr>
+                    <a:solidFill>
+                      <a:srgbClr val="F2F2F2"/>
+                    </a:solidFill>
+                  </a:tcPr>
+                </a:tc>
+              </a:tr>
+              <a:tr h="457200">
+                <a:tc>
+                  <a:txBody>
+                    <a:bodyPr/>
+                    <a:lstStyle/>
+                    <a:p>
+                      <a:pPr algn="l"/>
+                      <a:r>
+                        <a:rPr sz="1000" b="0">
+                          <a:solidFill>
+                            <a:srgbClr val="1D1B43"/>
+                          </a:solidFill>
+                          <a:latin typeface="Calibri"/>
+                        </a:rPr>
+                        <a:t>RS</a:t>
+                      </a:r>
+                    </a:p>
+                  </a:txBody>
+                  <a:tcPr>
+                    <a:solidFill>
+                      <a:srgbClr val="FFFFFF"/>
+                    </a:solidFill>
+                  </a:tcPr>
+                </a:tc>
+                <a:tc>
+                  <a:txBody>
+                    <a:bodyPr/>
+                    <a:lstStyle/>
+                    <a:p>
+                      <a:pPr algn="l"/>
+                      <a:r>
+                        <a:rPr sz="1000" b="0">
+                          <a:solidFill>
+                            <a:srgbClr val="1D1B43"/>
+                          </a:solidFill>
+                          <a:latin typeface="Calibri"/>
+                        </a:rPr>
+                        <a:t>4</a:t>
+                      </a:r>
+                    </a:p>
+                  </a:txBody>
+                  <a:tcPr>
+                    <a:solidFill>
+                      <a:srgbClr val="FFFFFF"/>
+                    </a:solidFill>
+                  </a:tcPr>
+                </a:tc>
+                <a:tc>
+                  <a:txBody>
+                    <a:bodyPr/>
+                    <a:lstStyle/>
+                    <a:p>
+                      <a:pPr algn="l"/>
+                      <a:r>
+                        <a:rPr sz="1000" b="0">
+                          <a:solidFill>
+                            <a:srgbClr val="1D1B43"/>
+                          </a:solidFill>
+                          <a:latin typeface="Calibri"/>
+                        </a:rPr>
+                        <a:t>2</a:t>
+                      </a:r>
+                    </a:p>
+                  </a:txBody>
+                  <a:tcPr>
+                    <a:solidFill>
+                      <a:srgbClr val="FFFFFF"/>
+                    </a:solidFill>
+                  </a:tcPr>
+                </a:tc>
+                <a:tc>
+                  <a:txBody>
+                    <a:bodyPr/>
+                    <a:lstStyle/>
+                    <a:p>
+                      <a:pPr algn="l"/>
+                      <a:r>
+                        <a:rPr sz="1000" b="0">
+                          <a:solidFill>
+                            <a:srgbClr val="1D1B43"/>
+                          </a:solidFill>
+                          <a:latin typeface="Calibri"/>
+                        </a:rPr>
+                        <a:t>2</a:t>
+                      </a:r>
+                    </a:p>
+                  </a:txBody>
+                  <a:tcPr>
+                    <a:solidFill>
+                      <a:srgbClr val="FFFFFF"/>
+                    </a:solidFill>
+                  </a:tcPr>
+                </a:tc>
+                <a:tc>
+                  <a:txBody>
+                    <a:bodyPr/>
+                    <a:lstStyle/>
+                    <a:p>
+                      <a:pPr algn="l"/>
+                      <a:r>
+                        <a:rPr sz="1000" b="0">
+                          <a:solidFill>
+                            <a:srgbClr val="1D1B43"/>
+                          </a:solidFill>
+                          <a:latin typeface="Calibri"/>
+                        </a:rPr>
+                        <a:t>50.0%</a:t>
+                      </a:r>
+                    </a:p>
+                  </a:txBody>
+                  <a:tcPr>
+                    <a:solidFill>
+                      <a:srgbClr val="FFFFFF"/>
+                    </a:solidFill>
+                  </a:tcPr>
+                </a:tc>
+                <a:tc>
+                  <a:txBody>
+                    <a:bodyPr/>
+                    <a:lstStyle/>
+                    <a:p>
+                      <a:pPr algn="l"/>
+                      <a:r>
+                        <a:rPr sz="1000" b="0">
+                          <a:solidFill>
+                            <a:srgbClr val="1D1B43"/>
+                          </a:solidFill>
+                          <a:latin typeface="Calibri"/>
+                        </a:rPr>
+                        <a:t>Atencao</a:t>
+                      </a:r>
+                    </a:p>
+                  </a:txBody>
+                  <a:tcPr>
+                    <a:solidFill>
+                      <a:srgbClr val="FFFFFF"/>
+                    </a:solidFill>
+                  </a:tcPr>
+                </a:tc>
+              </a:tr>
+              <a:tr h="457200">
+                <a:tc>
+                  <a:txBody>
+                    <a:bodyPr/>
+                    <a:lstStyle/>
+                    <a:p>
+                      <a:pPr algn="l"/>
+                      <a:r>
+                        <a:rPr sz="1000" b="0">
+                          <a:solidFill>
+                            <a:srgbClr val="1D1B43"/>
+                          </a:solidFill>
+                          <a:latin typeface="Calibri"/>
+                        </a:rPr>
+                        <a:t>RJ</a:t>
+                      </a:r>
+                    </a:p>
+                  </a:txBody>
+                  <a:tcPr>
+                    <a:solidFill>
+                      <a:srgbClr val="F2F2F2"/>
+                    </a:solidFill>
+                  </a:tcPr>
+                </a:tc>
+                <a:tc>
+                  <a:txBody>
+                    <a:bodyPr/>
+                    <a:lstStyle/>
+                    <a:p>
+                      <a:pPr algn="l"/>
+                      <a:r>
+                        <a:rPr sz="1000" b="0">
+                          <a:solidFill>
+                            <a:srgbClr val="1D1B43"/>
+                          </a:solidFill>
+                          <a:latin typeface="Calibri"/>
+                        </a:rPr>
+                        <a:t>4</a:t>
+                      </a:r>
+                    </a:p>
+                  </a:txBody>
+                  <a:tcPr>
+                    <a:solidFill>
+                      <a:srgbClr val="F2F2F2"/>
+                    </a:solidFill>
+                  </a:tcPr>
+                </a:tc>
+                <a:tc>
+                  <a:txBody>
+                    <a:bodyPr/>
+                    <a:lstStyle/>
+                    <a:p>
+                      <a:pPr algn="l"/>
+                      <a:r>
+                        <a:rPr sz="1000" b="0">
+                          <a:solidFill>
+                            <a:srgbClr val="1D1B43"/>
+                          </a:solidFill>
+                          <a:latin typeface="Calibri"/>
+                        </a:rPr>
+                        <a:t>4</a:t>
+                      </a:r>
+                    </a:p>
+                  </a:txBody>
+                  <a:tcPr>
+                    <a:solidFill>
+                      <a:srgbClr val="F2F2F2"/>
+                    </a:solidFill>
+                  </a:tcPr>
+                </a:tc>
+                <a:tc>
+                  <a:txBody>
+                    <a:bodyPr/>
+                    <a:lstStyle/>
+                    <a:p>
+                      <a:pPr algn="l"/>
+                      <a:r>
+                        <a:rPr sz="1000" b="0">
+                          <a:solidFill>
+                            <a:srgbClr val="1D1B43"/>
+                          </a:solidFill>
+                          <a:latin typeface="Calibri"/>
+                        </a:rPr>
                         <a:t>0</a:t>
                       </a:r>
                     </a:p>
                   </a:txBody>
                   <a:tcPr>
                     <a:solidFill>
+                      <a:srgbClr val="F2F2F2"/>
+                    </a:solidFill>
+                  </a:tcPr>
+                </a:tc>
+                <a:tc>
+                  <a:txBody>
+                    <a:bodyPr/>
+                    <a:lstStyle/>
+                    <a:p>
+                      <a:pPr algn="l"/>
+                      <a:r>
+                        <a:rPr sz="1000" b="0">
+                          <a:solidFill>
+                            <a:srgbClr val="1D1B43"/>
+                          </a:solidFill>
+                          <a:latin typeface="Calibri"/>
+                        </a:rPr>
+                        <a:t>100.0%</a:t>
+                      </a:r>
+                    </a:p>
+                  </a:txBody>
+                  <a:tcPr>
+                    <a:solidFill>
+                      <a:srgbClr val="F2F2F2"/>
+                    </a:solidFill>
+                  </a:tcPr>
+                </a:tc>
+                <a:tc>
+                  <a:txBody>
+                    <a:bodyPr/>
+                    <a:lstStyle/>
+                    <a:p>
+                      <a:pPr algn="l"/>
+                      <a:r>
+                        <a:rPr sz="1000" b="0">
+                          <a:solidFill>
+                            <a:srgbClr val="1D1B43"/>
+                          </a:solidFill>
+                          <a:latin typeface="Calibri"/>
+                        </a:rPr>
+                        <a:t>Excelente</a:t>
+                      </a:r>
+                    </a:p>
+                  </a:txBody>
+                  <a:tcPr>
+                    <a:solidFill>
+                      <a:srgbClr val="F2F2F2"/>
+                    </a:solidFill>
+                  </a:tcPr>
+                </a:tc>
+              </a:tr>
+              <a:tr h="457200">
+                <a:tc>
+                  <a:txBody>
+                    <a:bodyPr/>
+                    <a:lstStyle/>
+                    <a:p>
+                      <a:pPr algn="l"/>
+                      <a:r>
+                        <a:rPr sz="1000" b="0">
+                          <a:solidFill>
+                            <a:srgbClr val="1D1B43"/>
+                          </a:solidFill>
+                          <a:latin typeface="Calibri"/>
+                        </a:rPr>
+                        <a:t>SC</a:t>
+                      </a:r>
+                    </a:p>
+                  </a:txBody>
+                  <a:tcPr>
+                    <a:solidFill>
                       <a:srgbClr val="FFFFFF"/>
                     </a:solidFill>
                   </a:tcPr>
@@ -6104,13 +7063,222 @@
                           </a:solidFill>
                           <a:latin typeface="Calibri"/>
                         </a:rPr>
+                        <a:t>3</a:t>
+                      </a:r>
+                    </a:p>
+                  </a:txBody>
+                  <a:tcPr>
+                    <a:solidFill>
+                      <a:srgbClr val="FFFFFF"/>
+                    </a:solidFill>
+                  </a:tcPr>
+                </a:tc>
+                <a:tc>
+                  <a:txBody>
+                    <a:bodyPr/>
+                    <a:lstStyle/>
+                    <a:p>
+                      <a:pPr algn="l"/>
+                      <a:r>
+                        <a:rPr sz="1000" b="0">
+                          <a:solidFill>
+                            <a:srgbClr val="1D1B43"/>
+                          </a:solidFill>
+                          <a:latin typeface="Calibri"/>
+                        </a:rPr>
+                        <a:t>2</a:t>
+                      </a:r>
+                    </a:p>
+                  </a:txBody>
+                  <a:tcPr>
+                    <a:solidFill>
+                      <a:srgbClr val="FFFFFF"/>
+                    </a:solidFill>
+                  </a:tcPr>
+                </a:tc>
+                <a:tc>
+                  <a:txBody>
+                    <a:bodyPr/>
+                    <a:lstStyle/>
+                    <a:p>
+                      <a:pPr algn="l"/>
+                      <a:r>
+                        <a:rPr sz="1000" b="0">
+                          <a:solidFill>
+                            <a:srgbClr val="1D1B43"/>
+                          </a:solidFill>
+                          <a:latin typeface="Calibri"/>
+                        </a:rPr>
+                        <a:t>1</a:t>
+                      </a:r>
+                    </a:p>
+                  </a:txBody>
+                  <a:tcPr>
+                    <a:solidFill>
+                      <a:srgbClr val="FFFFFF"/>
+                    </a:solidFill>
+                  </a:tcPr>
+                </a:tc>
+                <a:tc>
+                  <a:txBody>
+                    <a:bodyPr/>
+                    <a:lstStyle/>
+                    <a:p>
+                      <a:pPr algn="l"/>
+                      <a:r>
+                        <a:rPr sz="1000" b="0">
+                          <a:solidFill>
+                            <a:srgbClr val="1D1B43"/>
+                          </a:solidFill>
+                          <a:latin typeface="Calibri"/>
+                        </a:rPr>
+                        <a:t>66.7%</a:t>
+                      </a:r>
+                    </a:p>
+                  </a:txBody>
+                  <a:tcPr>
+                    <a:solidFill>
+                      <a:srgbClr val="FFFFFF"/>
+                    </a:solidFill>
+                  </a:tcPr>
+                </a:tc>
+                <a:tc>
+                  <a:txBody>
+                    <a:bodyPr/>
+                    <a:lstStyle/>
+                    <a:p>
+                      <a:pPr algn="l"/>
+                      <a:r>
+                        <a:rPr sz="1000" b="0">
+                          <a:solidFill>
+                            <a:srgbClr val="1D1B43"/>
+                          </a:solidFill>
+                          <a:latin typeface="Calibri"/>
+                        </a:rPr>
+                        <a:t>Atencao</a:t>
+                      </a:r>
+                    </a:p>
+                  </a:txBody>
+                  <a:tcPr>
+                    <a:solidFill>
+                      <a:srgbClr val="FFFFFF"/>
+                    </a:solidFill>
+                  </a:tcPr>
+                </a:tc>
+              </a:tr>
+              <a:tr h="457200">
+                <a:tc>
+                  <a:txBody>
+                    <a:bodyPr/>
+                    <a:lstStyle/>
+                    <a:p>
+                      <a:pPr algn="l"/>
+                      <a:r>
+                        <a:rPr sz="1000" b="0">
+                          <a:solidFill>
+                            <a:srgbClr val="1D1B43"/>
+                          </a:solidFill>
+                          <a:latin typeface="Calibri"/>
+                        </a:rPr>
+                        <a:t>GO</a:t>
+                      </a:r>
+                    </a:p>
+                  </a:txBody>
+                  <a:tcPr>
+                    <a:solidFill>
+                      <a:srgbClr val="F2F2F2"/>
+                    </a:solidFill>
+                  </a:tcPr>
+                </a:tc>
+                <a:tc>
+                  <a:txBody>
+                    <a:bodyPr/>
+                    <a:lstStyle/>
+                    <a:p>
+                      <a:pPr algn="l"/>
+                      <a:r>
+                        <a:rPr sz="1000" b="0">
+                          <a:solidFill>
+                            <a:srgbClr val="1D1B43"/>
+                          </a:solidFill>
+                          <a:latin typeface="Calibri"/>
+                        </a:rPr>
+                        <a:t>1</a:t>
+                      </a:r>
+                    </a:p>
+                  </a:txBody>
+                  <a:tcPr>
+                    <a:solidFill>
+                      <a:srgbClr val="F2F2F2"/>
+                    </a:solidFill>
+                  </a:tcPr>
+                </a:tc>
+                <a:tc>
+                  <a:txBody>
+                    <a:bodyPr/>
+                    <a:lstStyle/>
+                    <a:p>
+                      <a:pPr algn="l"/>
+                      <a:r>
+                        <a:rPr sz="1000" b="0">
+                          <a:solidFill>
+                            <a:srgbClr val="1D1B43"/>
+                          </a:solidFill>
+                          <a:latin typeface="Calibri"/>
+                        </a:rPr>
+                        <a:t>1</a:t>
+                      </a:r>
+                    </a:p>
+                  </a:txBody>
+                  <a:tcPr>
+                    <a:solidFill>
+                      <a:srgbClr val="F2F2F2"/>
+                    </a:solidFill>
+                  </a:tcPr>
+                </a:tc>
+                <a:tc>
+                  <a:txBody>
+                    <a:bodyPr/>
+                    <a:lstStyle/>
+                    <a:p>
+                      <a:pPr algn="l"/>
+                      <a:r>
+                        <a:rPr sz="1000" b="0">
+                          <a:solidFill>
+                            <a:srgbClr val="1D1B43"/>
+                          </a:solidFill>
+                          <a:latin typeface="Calibri"/>
+                        </a:rPr>
+                        <a:t>0</a:t>
+                      </a:r>
+                    </a:p>
+                  </a:txBody>
+                  <a:tcPr>
+                    <a:solidFill>
+                      <a:srgbClr val="F2F2F2"/>
+                    </a:solidFill>
+                  </a:tcPr>
+                </a:tc>
+                <a:tc>
+                  <a:txBody>
+                    <a:bodyPr/>
+                    <a:lstStyle/>
+                    <a:p>
+                      <a:pPr algn="l"/>
+                      <a:r>
+                        <a:rPr sz="1000" b="0">
+                          <a:solidFill>
+                            <a:srgbClr val="1D1B43"/>
+                          </a:solidFill>
+                          <a:latin typeface="Calibri"/>
+                        </a:rPr>
                         <a:t>100.0%</a:t>
                       </a:r>
                     </a:p>
                   </a:txBody>
                   <a:tcPr>
                     <a:solidFill>
-                      <a:srgbClr val="FFFFFF"/>
+                      <a:srgbClr val="F2F2F2"/>
                     </a:solidFill>
                   </a:tcPr>
                 </a:tc>
@@ -6133,1127 +7301,7 @@
                   </a:txBody>
                   <a:tcPr>
                     <a:solidFill>
-                      <a:srgbClr val="FFFFFF"/>
-                    </a:solidFill>
-                  </a:tcPr>
-                </a:tc>
-              </a:tr>
-              <a:tr h="438912">
-                <a:tc>
-                  <a:txBody>
-                    <a:bodyPr/>
-                    <a:lstStyle/>
-                    <a:p>
-                      <a:pPr algn="l"/>
-                      <a:r>
-                        <a:rPr sz="1000" b="0">
-                          <a:solidFill>
-                            <a:srgbClr val="1D1B43"/>
-                          </a:solidFill>
-                          <a:latin typeface="Calibri"/>
-                        </a:rPr>
-                        <a:t>SC</a:t>
-                      </a:r>
-                    </a:p>
-                  </a:txBody>
-                  <a:tcPr>
-                    <a:solidFill>
                       <a:srgbClr val="F2F2F2"/>
-                    </a:solidFill>
-                  </a:tcPr>
-                </a:tc>
-                <a:tc>
-                  <a:txBody>
-                    <a:bodyPr/>
-                    <a:lstStyle/>
-                    <a:p>
-                      <a:pPr algn="l"/>
-                      <a:r>
-                        <a:rPr sz="1000" b="0">
-                          <a:solidFill>
-                            <a:srgbClr val="1D1B43"/>
-                          </a:solidFill>
-                          <a:latin typeface="Calibri"/>
-                        </a:rPr>
-                        <a:t>4</a:t>
-                      </a:r>
-                    </a:p>
-                  </a:txBody>
-                  <a:tcPr>
-                    <a:solidFill>
-                      <a:srgbClr val="F2F2F2"/>
-                    </a:solidFill>
-                  </a:tcPr>
-                </a:tc>
-                <a:tc>
-                  <a:txBody>
-                    <a:bodyPr/>
-                    <a:lstStyle/>
-                    <a:p>
-                      <a:pPr algn="l"/>
-                      <a:r>
-                        <a:rPr sz="1000" b="0">
-                          <a:solidFill>
-                            <a:srgbClr val="1D1B43"/>
-                          </a:solidFill>
-                          <a:latin typeface="Calibri"/>
-                        </a:rPr>
-                        <a:t>4</a:t>
-                      </a:r>
-                    </a:p>
-                  </a:txBody>
-                  <a:tcPr>
-                    <a:solidFill>
-                      <a:srgbClr val="F2F2F2"/>
-                    </a:solidFill>
-                  </a:tcPr>
-                </a:tc>
-                <a:tc>
-                  <a:txBody>
-                    <a:bodyPr/>
-                    <a:lstStyle/>
-                    <a:p>
-                      <a:pPr algn="l"/>
-                      <a:r>
-                        <a:rPr sz="1000" b="0">
-                          <a:solidFill>
-                            <a:srgbClr val="1D1B43"/>
-                          </a:solidFill>
-                          <a:latin typeface="Calibri"/>
-                        </a:rPr>
-                        <a:t>0</a:t>
-                      </a:r>
-                    </a:p>
-                  </a:txBody>
-                  <a:tcPr>
-                    <a:solidFill>
-                      <a:srgbClr val="F2F2F2"/>
-                    </a:solidFill>
-                  </a:tcPr>
-                </a:tc>
-                <a:tc>
-                  <a:txBody>
-                    <a:bodyPr/>
-                    <a:lstStyle/>
-                    <a:p>
-                      <a:pPr algn="l"/>
-                      <a:r>
-                        <a:rPr sz="1000" b="0">
-                          <a:solidFill>
-                            <a:srgbClr val="1D1B43"/>
-                          </a:solidFill>
-                          <a:latin typeface="Calibri"/>
-                        </a:rPr>
-                        <a:t>100.0%</a:t>
-                      </a:r>
-                    </a:p>
-                  </a:txBody>
-                  <a:tcPr>
-                    <a:solidFill>
-                      <a:srgbClr val="F2F2F2"/>
-                    </a:solidFill>
-                  </a:tcPr>
-                </a:tc>
-                <a:tc>
-                  <a:txBody>
-                    <a:bodyPr/>
-                    <a:lstStyle/>
-                    <a:p>
-                      <a:pPr algn="l"/>
-                      <a:r>
-                        <a:rPr sz="1000" b="0">
-                          <a:solidFill>
-                            <a:srgbClr val="1D1B43"/>
-                          </a:solidFill>
-                          <a:latin typeface="Calibri"/>
-                        </a:rPr>
-                        <a:t>Excelente</a:t>
-                      </a:r>
-                    </a:p>
-                  </a:txBody>
-                  <a:tcPr>
-                    <a:solidFill>
-                      <a:srgbClr val="F2F2F2"/>
-                    </a:solidFill>
-                  </a:tcPr>
-                </a:tc>
-              </a:tr>
-              <a:tr h="438912">
-                <a:tc>
-                  <a:txBody>
-                    <a:bodyPr/>
-                    <a:lstStyle/>
-                    <a:p>
-                      <a:pPr algn="l"/>
-                      <a:r>
-                        <a:rPr sz="1000" b="0">
-                          <a:solidFill>
-                            <a:srgbClr val="1D1B43"/>
-                          </a:solidFill>
-                          <a:latin typeface="Calibri"/>
-                        </a:rPr>
-                        <a:t>PR</a:t>
-                      </a:r>
-                    </a:p>
-                  </a:txBody>
-                  <a:tcPr>
-                    <a:solidFill>
-                      <a:srgbClr val="FFFFFF"/>
-                    </a:solidFill>
-                  </a:tcPr>
-                </a:tc>
-                <a:tc>
-                  <a:txBody>
-                    <a:bodyPr/>
-                    <a:lstStyle/>
-                    <a:p>
-                      <a:pPr algn="l"/>
-                      <a:r>
-                        <a:rPr sz="1000" b="0">
-                          <a:solidFill>
-                            <a:srgbClr val="1D1B43"/>
-                          </a:solidFill>
-                          <a:latin typeface="Calibri"/>
-                        </a:rPr>
-                        <a:t>3</a:t>
-                      </a:r>
-                    </a:p>
-                  </a:txBody>
-                  <a:tcPr>
-                    <a:solidFill>
-                      <a:srgbClr val="FFFFFF"/>
-                    </a:solidFill>
-                  </a:tcPr>
-                </a:tc>
-                <a:tc>
-                  <a:txBody>
-                    <a:bodyPr/>
-                    <a:lstStyle/>
-                    <a:p>
-                      <a:pPr algn="l"/>
-                      <a:r>
-                        <a:rPr sz="1000" b="0">
-                          <a:solidFill>
-                            <a:srgbClr val="1D1B43"/>
-                          </a:solidFill>
-                          <a:latin typeface="Calibri"/>
-                        </a:rPr>
-                        <a:t>1</a:t>
-                      </a:r>
-                    </a:p>
-                  </a:txBody>
-                  <a:tcPr>
-                    <a:solidFill>
-                      <a:srgbClr val="FFFFFF"/>
-                    </a:solidFill>
-                  </a:tcPr>
-                </a:tc>
-                <a:tc>
-                  <a:txBody>
-                    <a:bodyPr/>
-                    <a:lstStyle/>
-                    <a:p>
-                      <a:pPr algn="l"/>
-                      <a:r>
-                        <a:rPr sz="1000" b="0">
-                          <a:solidFill>
-                            <a:srgbClr val="1D1B43"/>
-                          </a:solidFill>
-                          <a:latin typeface="Calibri"/>
-                        </a:rPr>
-                        <a:t>2</a:t>
-                      </a:r>
-                    </a:p>
-                  </a:txBody>
-                  <a:tcPr>
-                    <a:solidFill>
-                      <a:srgbClr val="FFFFFF"/>
-                    </a:solidFill>
-                  </a:tcPr>
-                </a:tc>
-                <a:tc>
-                  <a:txBody>
-                    <a:bodyPr/>
-                    <a:lstStyle/>
-                    <a:p>
-                      <a:pPr algn="l"/>
-                      <a:r>
-                        <a:rPr sz="1000" b="0">
-                          <a:solidFill>
-                            <a:srgbClr val="1D1B43"/>
-                          </a:solidFill>
-                          <a:latin typeface="Calibri"/>
-                        </a:rPr>
-                        <a:t>33.3%</a:t>
-                      </a:r>
-                    </a:p>
-                  </a:txBody>
-                  <a:tcPr>
-                    <a:solidFill>
-                      <a:srgbClr val="FFFFFF"/>
-                    </a:solidFill>
-                  </a:tcPr>
-                </a:tc>
-                <a:tc>
-                  <a:txBody>
-                    <a:bodyPr/>
-                    <a:lstStyle/>
-                    <a:p>
-                      <a:pPr algn="l"/>
-                      <a:r>
-                        <a:rPr sz="1000" b="0">
-                          <a:solidFill>
-                            <a:srgbClr val="1D1B43"/>
-                          </a:solidFill>
-                          <a:latin typeface="Calibri"/>
-                        </a:rPr>
-                        <a:t>Atencao</a:t>
-                      </a:r>
-                    </a:p>
-                  </a:txBody>
-                  <a:tcPr>
-                    <a:solidFill>
-                      <a:srgbClr val="FFFFFF"/>
-                    </a:solidFill>
-                  </a:tcPr>
-                </a:tc>
-              </a:tr>
-              <a:tr h="438912">
-                <a:tc>
-                  <a:txBody>
-                    <a:bodyPr/>
-                    <a:lstStyle/>
-                    <a:p>
-                      <a:pPr algn="l"/>
-                      <a:r>
-                        <a:rPr sz="1000" b="0">
-                          <a:solidFill>
-                            <a:srgbClr val="1D1B43"/>
-                          </a:solidFill>
-                          <a:latin typeface="Calibri"/>
-                        </a:rPr>
-                        <a:t>DF</a:t>
-                      </a:r>
-                    </a:p>
-                  </a:txBody>
-                  <a:tcPr>
-                    <a:solidFill>
-                      <a:srgbClr val="F2F2F2"/>
-                    </a:solidFill>
-                  </a:tcPr>
-                </a:tc>
-                <a:tc>
-                  <a:txBody>
-                    <a:bodyPr/>
-                    <a:lstStyle/>
-                    <a:p>
-                      <a:pPr algn="l"/>
-                      <a:r>
-                        <a:rPr sz="1000" b="0">
-                          <a:solidFill>
-                            <a:srgbClr val="1D1B43"/>
-                          </a:solidFill>
-                          <a:latin typeface="Calibri"/>
-                        </a:rPr>
-                        <a:t>2</a:t>
-                      </a:r>
-                    </a:p>
-                  </a:txBody>
-                  <a:tcPr>
-                    <a:solidFill>
-                      <a:srgbClr val="F2F2F2"/>
-                    </a:solidFill>
-                  </a:tcPr>
-                </a:tc>
-                <a:tc>
-                  <a:txBody>
-                    <a:bodyPr/>
-                    <a:lstStyle/>
-                    <a:p>
-                      <a:pPr algn="l"/>
-                      <a:r>
-                        <a:rPr sz="1000" b="0">
-                          <a:solidFill>
-                            <a:srgbClr val="1D1B43"/>
-                          </a:solidFill>
-                          <a:latin typeface="Calibri"/>
-                        </a:rPr>
-                        <a:t>2</a:t>
-                      </a:r>
-                    </a:p>
-                  </a:txBody>
-                  <a:tcPr>
-                    <a:solidFill>
-                      <a:srgbClr val="F2F2F2"/>
-                    </a:solidFill>
-                  </a:tcPr>
-                </a:tc>
-                <a:tc>
-                  <a:txBody>
-                    <a:bodyPr/>
-                    <a:lstStyle/>
-                    <a:p>
-                      <a:pPr algn="l"/>
-                      <a:r>
-                        <a:rPr sz="1000" b="0">
-                          <a:solidFill>
-                            <a:srgbClr val="1D1B43"/>
-                          </a:solidFill>
-                          <a:latin typeface="Calibri"/>
-                        </a:rPr>
-                        <a:t>0</a:t>
-                      </a:r>
-                    </a:p>
-                  </a:txBody>
-                  <a:tcPr>
-                    <a:solidFill>
-                      <a:srgbClr val="F2F2F2"/>
-                    </a:solidFill>
-                  </a:tcPr>
-                </a:tc>
-                <a:tc>
-                  <a:txBody>
-                    <a:bodyPr/>
-                    <a:lstStyle/>
-                    <a:p>
-                      <a:pPr algn="l"/>
-                      <a:r>
-                        <a:rPr sz="1000" b="0">
-                          <a:solidFill>
-                            <a:srgbClr val="1D1B43"/>
-                          </a:solidFill>
-                          <a:latin typeface="Calibri"/>
-                        </a:rPr>
-                        <a:t>100.0%</a:t>
-                      </a:r>
-                    </a:p>
-                  </a:txBody>
-                  <a:tcPr>
-                    <a:solidFill>
-                      <a:srgbClr val="F2F2F2"/>
-                    </a:solidFill>
-                  </a:tcPr>
-                </a:tc>
-                <a:tc>
-                  <a:txBody>
-                    <a:bodyPr/>
-                    <a:lstStyle/>
-                    <a:p>
-                      <a:pPr algn="l"/>
-                      <a:r>
-                        <a:rPr sz="1000" b="0">
-                          <a:solidFill>
-                            <a:srgbClr val="1D1B43"/>
-                          </a:solidFill>
-                          <a:latin typeface="Calibri"/>
-                        </a:rPr>
-                        <a:t>Excelente</a:t>
-                      </a:r>
-                    </a:p>
-                  </a:txBody>
-                  <a:tcPr>
-                    <a:solidFill>
-                      <a:srgbClr val="F2F2F2"/>
-                    </a:solidFill>
-                  </a:tcPr>
-                </a:tc>
-              </a:tr>
-              <a:tr h="438912">
-                <a:tc>
-                  <a:txBody>
-                    <a:bodyPr/>
-                    <a:lstStyle/>
-                    <a:p>
-                      <a:pPr algn="l"/>
-                      <a:r>
-                        <a:rPr sz="1000" b="0">
-                          <a:solidFill>
-                            <a:srgbClr val="1D1B43"/>
-                          </a:solidFill>
-                          <a:latin typeface="Calibri"/>
-                        </a:rPr>
-                        <a:t>MG</a:t>
-                      </a:r>
-                    </a:p>
-                  </a:txBody>
-                  <a:tcPr>
-                    <a:solidFill>
-                      <a:srgbClr val="FFFFFF"/>
-                    </a:solidFill>
-                  </a:tcPr>
-                </a:tc>
-                <a:tc>
-                  <a:txBody>
-                    <a:bodyPr/>
-                    <a:lstStyle/>
-                    <a:p>
-                      <a:pPr algn="l"/>
-                      <a:r>
-                        <a:rPr sz="1000" b="0">
-                          <a:solidFill>
-                            <a:srgbClr val="1D1B43"/>
-                          </a:solidFill>
-                          <a:latin typeface="Calibri"/>
-                        </a:rPr>
-                        <a:t>2</a:t>
-                      </a:r>
-                    </a:p>
-                  </a:txBody>
-                  <a:tcPr>
-                    <a:solidFill>
-                      <a:srgbClr val="FFFFFF"/>
-                    </a:solidFill>
-                  </a:tcPr>
-                </a:tc>
-                <a:tc>
-                  <a:txBody>
-                    <a:bodyPr/>
-                    <a:lstStyle/>
-                    <a:p>
-                      <a:pPr algn="l"/>
-                      <a:r>
-                        <a:rPr sz="1000" b="0">
-                          <a:solidFill>
-                            <a:srgbClr val="1D1B43"/>
-                          </a:solidFill>
-                          <a:latin typeface="Calibri"/>
-                        </a:rPr>
-                        <a:t>2</a:t>
-                      </a:r>
-                    </a:p>
-                  </a:txBody>
-                  <a:tcPr>
-                    <a:solidFill>
-                      <a:srgbClr val="FFFFFF"/>
-                    </a:solidFill>
-                  </a:tcPr>
-                </a:tc>
-                <a:tc>
-                  <a:txBody>
-                    <a:bodyPr/>
-                    <a:lstStyle/>
-                    <a:p>
-                      <a:pPr algn="l"/>
-                      <a:r>
-                        <a:rPr sz="1000" b="0">
-                          <a:solidFill>
-                            <a:srgbClr val="1D1B43"/>
-                          </a:solidFill>
-                          <a:latin typeface="Calibri"/>
-                        </a:rPr>
-                        <a:t>0</a:t>
-                      </a:r>
-                    </a:p>
-                  </a:txBody>
-                  <a:tcPr>
-                    <a:solidFill>
-                      <a:srgbClr val="FFFFFF"/>
-                    </a:solidFill>
-                  </a:tcPr>
-                </a:tc>
-                <a:tc>
-                  <a:txBody>
-                    <a:bodyPr/>
-                    <a:lstStyle/>
-                    <a:p>
-                      <a:pPr algn="l"/>
-                      <a:r>
-                        <a:rPr sz="1000" b="0">
-                          <a:solidFill>
-                            <a:srgbClr val="1D1B43"/>
-                          </a:solidFill>
-                          <a:latin typeface="Calibri"/>
-                        </a:rPr>
-                        <a:t>100.0%</a:t>
-                      </a:r>
-                    </a:p>
-                  </a:txBody>
-                  <a:tcPr>
-                    <a:solidFill>
-                      <a:srgbClr val="FFFFFF"/>
-                    </a:solidFill>
-                  </a:tcPr>
-                </a:tc>
-                <a:tc>
-                  <a:txBody>
-                    <a:bodyPr/>
-                    <a:lstStyle/>
-                    <a:p>
-                      <a:pPr algn="l"/>
-                      <a:r>
-                        <a:rPr sz="1000" b="0">
-                          <a:solidFill>
-                            <a:srgbClr val="1D1B43"/>
-                          </a:solidFill>
-                          <a:latin typeface="Calibri"/>
-                        </a:rPr>
-                        <a:t>Excelente</a:t>
-                      </a:r>
-                    </a:p>
-                  </a:txBody>
-                  <a:tcPr>
-                    <a:solidFill>
-                      <a:srgbClr val="FFFFFF"/>
-                    </a:solidFill>
-                  </a:tcPr>
-                </a:tc>
-              </a:tr>
-              <a:tr h="438912">
-                <a:tc>
-                  <a:txBody>
-                    <a:bodyPr/>
-                    <a:lstStyle/>
-                    <a:p>
-                      <a:pPr algn="l"/>
-                      <a:r>
-                        <a:rPr sz="1000" b="0">
-                          <a:solidFill>
-                            <a:srgbClr val="1D1B43"/>
-                          </a:solidFill>
-                          <a:latin typeface="Calibri"/>
-                        </a:rPr>
-                        <a:t>RS</a:t>
-                      </a:r>
-                    </a:p>
-                  </a:txBody>
-                  <a:tcPr>
-                    <a:solidFill>
-                      <a:srgbClr val="F2F2F2"/>
-                    </a:solidFill>
-                  </a:tcPr>
-                </a:tc>
-                <a:tc>
-                  <a:txBody>
-                    <a:bodyPr/>
-                    <a:lstStyle/>
-                    <a:p>
-                      <a:pPr algn="l"/>
-                      <a:r>
-                        <a:rPr sz="1000" b="0">
-                          <a:solidFill>
-                            <a:srgbClr val="1D1B43"/>
-                          </a:solidFill>
-                          <a:latin typeface="Calibri"/>
-                        </a:rPr>
-                        <a:t>2</a:t>
-                      </a:r>
-                    </a:p>
-                  </a:txBody>
-                  <a:tcPr>
-                    <a:solidFill>
-                      <a:srgbClr val="F2F2F2"/>
-                    </a:solidFill>
-                  </a:tcPr>
-                </a:tc>
-                <a:tc>
-                  <a:txBody>
-                    <a:bodyPr/>
-                    <a:lstStyle/>
-                    <a:p>
-                      <a:pPr algn="l"/>
-                      <a:r>
-                        <a:rPr sz="1000" b="0">
-                          <a:solidFill>
-                            <a:srgbClr val="1D1B43"/>
-                          </a:solidFill>
-                          <a:latin typeface="Calibri"/>
-                        </a:rPr>
-                        <a:t>2</a:t>
-                      </a:r>
-                    </a:p>
-                  </a:txBody>
-                  <a:tcPr>
-                    <a:solidFill>
-                      <a:srgbClr val="F2F2F2"/>
-                    </a:solidFill>
-                  </a:tcPr>
-                </a:tc>
-                <a:tc>
-                  <a:txBody>
-                    <a:bodyPr/>
-                    <a:lstStyle/>
-                    <a:p>
-                      <a:pPr algn="l"/>
-                      <a:r>
-                        <a:rPr sz="1000" b="0">
-                          <a:solidFill>
-                            <a:srgbClr val="1D1B43"/>
-                          </a:solidFill>
-                          <a:latin typeface="Calibri"/>
-                        </a:rPr>
-                        <a:t>0</a:t>
-                      </a:r>
-                    </a:p>
-                  </a:txBody>
-                  <a:tcPr>
-                    <a:solidFill>
-                      <a:srgbClr val="F2F2F2"/>
-                    </a:solidFill>
-                  </a:tcPr>
-                </a:tc>
-                <a:tc>
-                  <a:txBody>
-                    <a:bodyPr/>
-                    <a:lstStyle/>
-                    <a:p>
-                      <a:pPr algn="l"/>
-                      <a:r>
-                        <a:rPr sz="1000" b="0">
-                          <a:solidFill>
-                            <a:srgbClr val="1D1B43"/>
-                          </a:solidFill>
-                          <a:latin typeface="Calibri"/>
-                        </a:rPr>
-                        <a:t>100.0%</a:t>
-                      </a:r>
-                    </a:p>
-                  </a:txBody>
-                  <a:tcPr>
-                    <a:solidFill>
-                      <a:srgbClr val="F2F2F2"/>
-                    </a:solidFill>
-                  </a:tcPr>
-                </a:tc>
-                <a:tc>
-                  <a:txBody>
-                    <a:bodyPr/>
-                    <a:lstStyle/>
-                    <a:p>
-                      <a:pPr algn="l"/>
-                      <a:r>
-                        <a:rPr sz="1000" b="0">
-                          <a:solidFill>
-                            <a:srgbClr val="1D1B43"/>
-                          </a:solidFill>
-                          <a:latin typeface="Calibri"/>
-                        </a:rPr>
-                        <a:t>Excelente</a:t>
-                      </a:r>
-                    </a:p>
-                  </a:txBody>
-                  <a:tcPr>
-                    <a:solidFill>
-                      <a:srgbClr val="F2F2F2"/>
-                    </a:solidFill>
-                  </a:tcPr>
-                </a:tc>
-              </a:tr>
-              <a:tr h="438912">
-                <a:tc>
-                  <a:txBody>
-                    <a:bodyPr/>
-                    <a:lstStyle/>
-                    <a:p>
-                      <a:pPr algn="l"/>
-                      <a:r>
-                        <a:rPr sz="1000" b="0">
-                          <a:solidFill>
-                            <a:srgbClr val="1D1B43"/>
-                          </a:solidFill>
-                          <a:latin typeface="Calibri"/>
-                        </a:rPr>
-                        <a:t>RJ</a:t>
-                      </a:r>
-                    </a:p>
-                  </a:txBody>
-                  <a:tcPr>
-                    <a:solidFill>
-                      <a:srgbClr val="FFFFFF"/>
-                    </a:solidFill>
-                  </a:tcPr>
-                </a:tc>
-                <a:tc>
-                  <a:txBody>
-                    <a:bodyPr/>
-                    <a:lstStyle/>
-                    <a:p>
-                      <a:pPr algn="l"/>
-                      <a:r>
-                        <a:rPr sz="1000" b="0">
-                          <a:solidFill>
-                            <a:srgbClr val="1D1B43"/>
-                          </a:solidFill>
-                          <a:latin typeface="Calibri"/>
-                        </a:rPr>
-                        <a:t>2</a:t>
-                      </a:r>
-                    </a:p>
-                  </a:txBody>
-                  <a:tcPr>
-                    <a:solidFill>
-                      <a:srgbClr val="FFFFFF"/>
-                    </a:solidFill>
-                  </a:tcPr>
-                </a:tc>
-                <a:tc>
-                  <a:txBody>
-                    <a:bodyPr/>
-                    <a:lstStyle/>
-                    <a:p>
-                      <a:pPr algn="l"/>
-                      <a:r>
-                        <a:rPr sz="1000" b="0">
-                          <a:solidFill>
-                            <a:srgbClr val="1D1B43"/>
-                          </a:solidFill>
-                          <a:latin typeface="Calibri"/>
-                        </a:rPr>
-                        <a:t>2</a:t>
-                      </a:r>
-                    </a:p>
-                  </a:txBody>
-                  <a:tcPr>
-                    <a:solidFill>
-                      <a:srgbClr val="FFFFFF"/>
-                    </a:solidFill>
-                  </a:tcPr>
-                </a:tc>
-                <a:tc>
-                  <a:txBody>
-                    <a:bodyPr/>
-                    <a:lstStyle/>
-                    <a:p>
-                      <a:pPr algn="l"/>
-                      <a:r>
-                        <a:rPr sz="1000" b="0">
-                          <a:solidFill>
-                            <a:srgbClr val="1D1B43"/>
-                          </a:solidFill>
-                          <a:latin typeface="Calibri"/>
-                        </a:rPr>
-                        <a:t>0</a:t>
-                      </a:r>
-                    </a:p>
-                  </a:txBody>
-                  <a:tcPr>
-                    <a:solidFill>
-                      <a:srgbClr val="FFFFFF"/>
-                    </a:solidFill>
-                  </a:tcPr>
-                </a:tc>
-                <a:tc>
-                  <a:txBody>
-                    <a:bodyPr/>
-                    <a:lstStyle/>
-                    <a:p>
-                      <a:pPr algn="l"/>
-                      <a:r>
-                        <a:rPr sz="1000" b="0">
-                          <a:solidFill>
-                            <a:srgbClr val="1D1B43"/>
-                          </a:solidFill>
-                          <a:latin typeface="Calibri"/>
-                        </a:rPr>
-                        <a:t>100.0%</a:t>
-                      </a:r>
-                    </a:p>
-                  </a:txBody>
-                  <a:tcPr>
-                    <a:solidFill>
-                      <a:srgbClr val="FFFFFF"/>
-                    </a:solidFill>
-                  </a:tcPr>
-                </a:tc>
-                <a:tc>
-                  <a:txBody>
-                    <a:bodyPr/>
-                    <a:lstStyle/>
-                    <a:p>
-                      <a:pPr algn="l"/>
-                      <a:r>
-                        <a:rPr sz="1000" b="0">
-                          <a:solidFill>
-                            <a:srgbClr val="1D1B43"/>
-                          </a:solidFill>
-                          <a:latin typeface="Calibri"/>
-                        </a:rPr>
-                        <a:t>Excelente</a:t>
-                      </a:r>
-                    </a:p>
-                  </a:txBody>
-                  <a:tcPr>
-                    <a:solidFill>
-                      <a:srgbClr val="FFFFFF"/>
-                    </a:solidFill>
-                  </a:tcPr>
-                </a:tc>
-              </a:tr>
-              <a:tr h="438912">
-                <a:tc>
-                  <a:txBody>
-                    <a:bodyPr/>
-                    <a:lstStyle/>
-                    <a:p>
-                      <a:pPr algn="l"/>
-                      <a:r>
-                        <a:rPr sz="1000" b="0">
-                          <a:solidFill>
-                            <a:srgbClr val="1D1B43"/>
-                          </a:solidFill>
-                          <a:latin typeface="Calibri"/>
-                        </a:rPr>
-                        <a:t>MS</a:t>
-                      </a:r>
-                    </a:p>
-                  </a:txBody>
-                  <a:tcPr>
-                    <a:solidFill>
-                      <a:srgbClr val="F2F2F2"/>
-                    </a:solidFill>
-                  </a:tcPr>
-                </a:tc>
-                <a:tc>
-                  <a:txBody>
-                    <a:bodyPr/>
-                    <a:lstStyle/>
-                    <a:p>
-                      <a:pPr algn="l"/>
-                      <a:r>
-                        <a:rPr sz="1000" b="0">
-                          <a:solidFill>
-                            <a:srgbClr val="1D1B43"/>
-                          </a:solidFill>
-                          <a:latin typeface="Calibri"/>
-                        </a:rPr>
-                        <a:t>1</a:t>
-                      </a:r>
-                    </a:p>
-                  </a:txBody>
-                  <a:tcPr>
-                    <a:solidFill>
-                      <a:srgbClr val="F2F2F2"/>
-                    </a:solidFill>
-                  </a:tcPr>
-                </a:tc>
-                <a:tc>
-                  <a:txBody>
-                    <a:bodyPr/>
-                    <a:lstStyle/>
-                    <a:p>
-                      <a:pPr algn="l"/>
-                      <a:r>
-                        <a:rPr sz="1000" b="0">
-                          <a:solidFill>
-                            <a:srgbClr val="1D1B43"/>
-                          </a:solidFill>
-                          <a:latin typeface="Calibri"/>
-                        </a:rPr>
-                        <a:t>1</a:t>
-                      </a:r>
-                    </a:p>
-                  </a:txBody>
-                  <a:tcPr>
-                    <a:solidFill>
-                      <a:srgbClr val="F2F2F2"/>
-                    </a:solidFill>
-                  </a:tcPr>
-                </a:tc>
-                <a:tc>
-                  <a:txBody>
-                    <a:bodyPr/>
-                    <a:lstStyle/>
-                    <a:p>
-                      <a:pPr algn="l"/>
-                      <a:r>
-                        <a:rPr sz="1000" b="0">
-                          <a:solidFill>
-                            <a:srgbClr val="1D1B43"/>
-                          </a:solidFill>
-                          <a:latin typeface="Calibri"/>
-                        </a:rPr>
-                        <a:t>0</a:t>
-                      </a:r>
-                    </a:p>
-                  </a:txBody>
-                  <a:tcPr>
-                    <a:solidFill>
-                      <a:srgbClr val="F2F2F2"/>
-                    </a:solidFill>
-                  </a:tcPr>
-                </a:tc>
-                <a:tc>
-                  <a:txBody>
-                    <a:bodyPr/>
-                    <a:lstStyle/>
-                    <a:p>
-                      <a:pPr algn="l"/>
-                      <a:r>
-                        <a:rPr sz="1000" b="0">
-                          <a:solidFill>
-                            <a:srgbClr val="1D1B43"/>
-                          </a:solidFill>
-                          <a:latin typeface="Calibri"/>
-                        </a:rPr>
-                        <a:t>100.0%</a:t>
-                      </a:r>
-                    </a:p>
-                  </a:txBody>
-                  <a:tcPr>
-                    <a:solidFill>
-                      <a:srgbClr val="F2F2F2"/>
-                    </a:solidFill>
-                  </a:tcPr>
-                </a:tc>
-                <a:tc>
-                  <a:txBody>
-                    <a:bodyPr/>
-                    <a:lstStyle/>
-                    <a:p>
-                      <a:pPr algn="l"/>
-                      <a:r>
-                        <a:rPr sz="1000" b="0">
-                          <a:solidFill>
-                            <a:srgbClr val="1D1B43"/>
-                          </a:solidFill>
-                          <a:latin typeface="Calibri"/>
-                        </a:rPr>
-                        <a:t>Excelente</a:t>
-                      </a:r>
-                    </a:p>
-                  </a:txBody>
-                  <a:tcPr>
-                    <a:solidFill>
-                      <a:srgbClr val="F2F2F2"/>
-                    </a:solidFill>
-                  </a:tcPr>
-                </a:tc>
-              </a:tr>
-              <a:tr h="438912">
-                <a:tc>
-                  <a:txBody>
-                    <a:bodyPr/>
-                    <a:lstStyle/>
-                    <a:p>
-                      <a:pPr algn="l"/>
-                      <a:r>
-                        <a:rPr sz="1000" b="0">
-                          <a:solidFill>
-                            <a:srgbClr val="1D1B43"/>
-                          </a:solidFill>
-                          <a:latin typeface="Calibri"/>
-                        </a:rPr>
-                        <a:t>GO</a:t>
-                      </a:r>
-                    </a:p>
-                  </a:txBody>
-                  <a:tcPr>
-                    <a:solidFill>
-                      <a:srgbClr val="FFFFFF"/>
-                    </a:solidFill>
-                  </a:tcPr>
-                </a:tc>
-                <a:tc>
-                  <a:txBody>
-                    <a:bodyPr/>
-                    <a:lstStyle/>
-                    <a:p>
-                      <a:pPr algn="l"/>
-                      <a:r>
-                        <a:rPr sz="1000" b="0">
-                          <a:solidFill>
-                            <a:srgbClr val="1D1B43"/>
-                          </a:solidFill>
-                          <a:latin typeface="Calibri"/>
-                        </a:rPr>
-                        <a:t>1</a:t>
-                      </a:r>
-                    </a:p>
-                  </a:txBody>
-                  <a:tcPr>
-                    <a:solidFill>
-                      <a:srgbClr val="FFFFFF"/>
-                    </a:solidFill>
-                  </a:tcPr>
-                </a:tc>
-                <a:tc>
-                  <a:txBody>
-                    <a:bodyPr/>
-                    <a:lstStyle/>
-                    <a:p>
-                      <a:pPr algn="l"/>
-                      <a:r>
-                        <a:rPr sz="1000" b="0">
-                          <a:solidFill>
-                            <a:srgbClr val="1D1B43"/>
-                          </a:solidFill>
-                          <a:latin typeface="Calibri"/>
-                        </a:rPr>
-                        <a:t>1</a:t>
-                      </a:r>
-                    </a:p>
-                  </a:txBody>
-                  <a:tcPr>
-                    <a:solidFill>
-                      <a:srgbClr val="FFFFFF"/>
-                    </a:solidFill>
-                  </a:tcPr>
-                </a:tc>
-                <a:tc>
-                  <a:txBody>
-                    <a:bodyPr/>
-                    <a:lstStyle/>
-                    <a:p>
-                      <a:pPr algn="l"/>
-                      <a:r>
-                        <a:rPr sz="1000" b="0">
-                          <a:solidFill>
-                            <a:srgbClr val="1D1B43"/>
-                          </a:solidFill>
-                          <a:latin typeface="Calibri"/>
-                        </a:rPr>
-                        <a:t>0</a:t>
-                      </a:r>
-                    </a:p>
-                  </a:txBody>
-                  <a:tcPr>
-                    <a:solidFill>
-                      <a:srgbClr val="FFFFFF"/>
-                    </a:solidFill>
-                  </a:tcPr>
-                </a:tc>
-                <a:tc>
-                  <a:txBody>
-                    <a:bodyPr/>
-                    <a:lstStyle/>
-                    <a:p>
-                      <a:pPr algn="l"/>
-                      <a:r>
-                        <a:rPr sz="1000" b="0">
-                          <a:solidFill>
-                            <a:srgbClr val="1D1B43"/>
-                          </a:solidFill>
-                          <a:latin typeface="Calibri"/>
-                        </a:rPr>
-                        <a:t>100.0%</a:t>
-                      </a:r>
-                    </a:p>
-                  </a:txBody>
-                  <a:tcPr>
-                    <a:solidFill>
-                      <a:srgbClr val="FFFFFF"/>
-                    </a:solidFill>
-                  </a:tcPr>
-                </a:tc>
-                <a:tc>
-                  <a:txBody>
-                    <a:bodyPr/>
-                    <a:lstStyle/>
-                    <a:p>
-                      <a:pPr algn="l"/>
-                      <a:r>
-                        <a:rPr sz="1000" b="0">
-                          <a:solidFill>
-                            <a:srgbClr val="1D1B43"/>
-                          </a:solidFill>
-                          <a:latin typeface="Calibri"/>
-                        </a:rPr>
-                        <a:t>Excelente</a:t>
-                      </a:r>
-                    </a:p>
-                  </a:txBody>
-                  <a:tcPr>
-                    <a:solidFill>
-                      <a:srgbClr val="FFFFFF"/>
                     </a:solidFill>
                   </a:tcPr>
                 </a:tc>
@@ -7342,7 +7390,7 @@
                 </a:solidFill>
                 <a:latin typeface="Calibri"/>
               </a:rPr>
-              <a:t>TOP DESTINATARIOS (24 pontos)</a:t>
+              <a:t>TOP DESTINATARIOS (25 pontos)</a:t>
             </a:r>
           </a:p>
         </p:txBody>
@@ -7617,7 +7665,7 @@
                           </a:solidFill>
                           <a:latin typeface="Calibri"/>
                         </a:rPr>
-                        <a:t>ACQUA SOLAR COMERCIO - NAVEGANTES / SC</a:t>
+                        <a:t>SIMOLDES ACOS BRASIL - SAO JOSE DOS PINHAIS / PR</a:t>
                       </a:r>
                     </a:p>
                   </a:txBody>
@@ -7640,7 +7688,7 @@
                           </a:solidFill>
                           <a:latin typeface="Calibri"/>
                         </a:rPr>
-                        <a:t>1</a:t>
+                        <a:t>2</a:t>
                       </a:r>
                     </a:p>
                   </a:txBody>
@@ -7663,7 +7711,7 @@
                           </a:solidFill>
                           <a:latin typeface="Calibri"/>
                         </a:rPr>
-                        <a:t>1</a:t>
+                        <a:t>0</a:t>
                       </a:r>
                     </a:p>
                   </a:txBody>
@@ -7686,7 +7734,7 @@
                           </a:solidFill>
                           <a:latin typeface="Calibri"/>
                         </a:rPr>
-                        <a:t>0</a:t>
+                        <a:t>2</a:t>
                       </a:r>
                     </a:p>
                   </a:txBody>
@@ -7709,7 +7757,7 @@
                           </a:solidFill>
                           <a:latin typeface="Calibri"/>
                         </a:rPr>
-                        <a:t>100.0%</a:t>
+                        <a:t>0.0%</a:t>
                       </a:r>
                     </a:p>
                   </a:txBody>
@@ -7732,7 +7780,7 @@
                           </a:solidFill>
                           <a:latin typeface="Calibri"/>
                         </a:rPr>
-                        <a:t>Excelente</a:t>
+                        <a:t>Atencao</a:t>
                       </a:r>
                     </a:p>
                   </a:txBody>
@@ -7780,7 +7828,7 @@
                           </a:solidFill>
                           <a:latin typeface="Calibri"/>
                         </a:rPr>
-                        <a:t>ANTONIO ALVES DA SIL - UBERLANDIA / MG</a:t>
+                        <a:t>BRASIL SUL DISTRIBUI - CASCAVEL / PR</a:t>
                       </a:r>
                     </a:p>
                   </a:txBody>
@@ -7943,7 +7991,7 @@
                           </a:solidFill>
                           <a:latin typeface="Calibri"/>
                         </a:rPr>
-                        <a:t>CENERGY SOLAR TECNOL - SAO PAULO / SP</a:t>
+                        <a:t>CAETANO PILOTTO DIEH - ERECHIM / RS</a:t>
                       </a:r>
                     </a:p>
                   </a:txBody>
@@ -8106,7 +8154,7 @@
                           </a:solidFill>
                           <a:latin typeface="Calibri"/>
                         </a:rPr>
-                        <a:t>CHRIS MICHAEL PETRON - FLORIANOPOLIS / SC</a:t>
+                        <a:t>CORSOLAR CORDEIRO CA - SAO PAULO / SP</a:t>
                       </a:r>
                     </a:p>
                   </a:txBody>
@@ -8269,7 +8317,7 @@
                           </a:solidFill>
                           <a:latin typeface="Calibri"/>
                         </a:rPr>
-                        <a:t>CORSOLAR CORDEIRO CA - SAO PAULO / SP</a:t>
+                        <a:t>CRISTA MARIA PROCHNO - CAMPINAS / SP</a:t>
                       </a:r>
                     </a:p>
                   </a:txBody>
@@ -8432,7 +8480,7 @@
                           </a:solidFill>
                           <a:latin typeface="Calibri"/>
                         </a:rPr>
-                        <a:t>CUESTA SOLAR ENERGIA - BOTUCATU / SP</a:t>
+                        <a:t>DARLAN SCHLICKMANN - FLORIANOPOLIS / SC</a:t>
                       </a:r>
                     </a:p>
                   </a:txBody>
@@ -8595,7 +8643,7 @@
                           </a:solidFill>
                           <a:latin typeface="Calibri"/>
                         </a:rPr>
-                        <a:t>ERICLEIA APARECIDA D - SANTA FE DO SUL / SP</a:t>
+                        <a:t>DEUSDELIO GONCALVES - CORDEIRO / RJ</a:t>
                       </a:r>
                     </a:p>
                   </a:txBody>
@@ -8758,7 +8806,7 @@
                           </a:solidFill>
                           <a:latin typeface="Calibri"/>
                         </a:rPr>
-                        <a:t>FABIANO OTONE BOCCHI - ERECHIM / RS</a:t>
+                        <a:t>EDER TEIXEIRA - PEROLA / PR</a:t>
                       </a:r>
                     </a:p>
                   </a:txBody>
@@ -8921,7 +8969,7 @@
                           </a:solidFill>
                           <a:latin typeface="Calibri"/>
                         </a:rPr>
-                        <a:t>FABIO MATIAS DOS SAN - BADY BASSITT / SP</a:t>
+                        <a:t>ANTONIO CARLOS LEAL - PORTO FERREIRA / SP</a:t>
                       </a:r>
                     </a:p>
                   </a:txBody>
@@ -9084,7 +9132,7 @@
                           </a:solidFill>
                           <a:latin typeface="Calibri"/>
                         </a:rPr>
-                        <a:t>GUILHERME GRIMALDI - JUNDIAI / SP</a:t>
+                        <a:t>EVERALDO SANTANA - SAPIRANGA / RS</a:t>
                       </a:r>
                     </a:p>
                   </a:txBody>
@@ -9247,7 +9295,7 @@
                           </a:solidFill>
                           <a:latin typeface="Calibri"/>
                         </a:rPr>
-                        <a:t>JORGE ANDRE LOURENCO - CIANORTE / PR</a:t>
+                        <a:t>FELIPE LEITHARDT FAG - PASSO FUNDO / RS</a:t>
                       </a:r>
                     </a:p>
                   </a:txBody>
@@ -9410,7 +9458,7 @@
                           </a:solidFill>
                           <a:latin typeface="Calibri"/>
                         </a:rPr>
-                        <a:t>LUANA FERREIRA VAZ - MUNDO NOVO / GO</a:t>
+                        <a:t>GUILHERME MAIONI PAN - GUARULHOS / SP</a:t>
                       </a:r>
                     </a:p>
                   </a:txBody>
@@ -9573,7 +9621,7 @@
                           </a:solidFill>
                           <a:latin typeface="Calibri"/>
                         </a:rPr>
-                        <a:t>MACDOVEL PASSOS DA S - DUQUE DE CAXIAS / RJ</a:t>
+                        <a:t>GREENCITY ADMINISTRA - MARINGA / PR</a:t>
                       </a:r>
                     </a:p>
                   </a:txBody>
@@ -9736,7 +9784,7 @@
                           </a:solidFill>
                           <a:latin typeface="Calibri"/>
                         </a:rPr>
-                        <a:t>MATHEUS DA SILVA VEL - NAVIRAI / MS</a:t>
+                        <a:t>JOAO MARQUES RODRIGU - GUAIRA / SP</a:t>
                       </a:r>
                     </a:p>
                   </a:txBody>

--- a/ACQUA_SOLAR_COMERCIO_DE_EQUIPA.pptx
+++ b/ACQUA_SOLAR_COMERCIO_DE_EQUIPA.pptx
@@ -143,29 +143,23 @@
           </c:spPr>
           <c:cat>
             <c:strRef>
-              <c:f>Sheet1!$A$2:$A$3</c:f>
+              <c:f>Sheet1!$A$2:$A$2</c:f>
               <c:strCache>
-                <c:ptCount val="2"/>
+                <c:ptCount val="1"/>
                 <c:pt idx="0">
                   <c:v>Abril 2026</c:v>
-                </c:pt>
-                <c:pt idx="1">
-                  <c:v>Maio 2026</c:v>
                 </c:pt>
               </c:strCache>
             </c:strRef>
           </c:cat>
           <c:val>
             <c:numRef>
-              <c:f>Sheet1!$B$2:$B$3</c:f>
+              <c:f>Sheet1!$B$2:$B$2</c:f>
               <c:numCache>
                 <c:formatCode>General</c:formatCode>
-                <c:ptCount val="2"/>
+                <c:ptCount val="1"/>
                 <c:pt idx="0">
                   <c:v>22</c:v>
-                </c:pt>
-                <c:pt idx="1">
-                  <c:v>20</c:v>
                 </c:pt>
               </c:numCache>
             </c:numRef>
@@ -192,29 +186,23 @@
           </c:spPr>
           <c:cat>
             <c:strRef>
-              <c:f>Sheet1!$A$2:$A$3</c:f>
+              <c:f>Sheet1!$A$2:$A$2</c:f>
               <c:strCache>
-                <c:ptCount val="2"/>
+                <c:ptCount val="1"/>
                 <c:pt idx="0">
                   <c:v>Abril 2026</c:v>
-                </c:pt>
-                <c:pt idx="1">
-                  <c:v>Maio 2026</c:v>
                 </c:pt>
               </c:strCache>
             </c:strRef>
           </c:cat>
           <c:val>
             <c:numRef>
-              <c:f>Sheet1!$C$2:$C$3</c:f>
+              <c:f>Sheet1!$C$2:$C$2</c:f>
               <c:numCache>
                 <c:formatCode>General</c:formatCode>
-                <c:ptCount val="2"/>
+                <c:ptCount val="1"/>
                 <c:pt idx="0">
                   <c:v>2</c:v>
-                </c:pt>
-                <c:pt idx="1">
-                  <c:v>6</c:v>
                 </c:pt>
               </c:numCache>
             </c:numRef>
@@ -3387,7 +3375,7 @@
                 </a:solidFill>
                 <a:latin typeface="Calibri"/>
               </a:rPr>
-              <a:t>INDICADORES MAIO 2026</a:t>
+              <a:t>INDICADORES ABRIL 2026</a:t>
             </a:r>
           </a:p>
         </p:txBody>
@@ -3494,14 +3482,13 @@
           <a:p>
             <a:pPr algn="ctr"/>
             <a:r>
-              <a:rPr sz="1600" b="1">
+              <a:rPr sz="1400" b="1">
                 <a:solidFill>
                   <a:srgbClr val="FFFFFF"/>
                 </a:solidFill>
                 <a:latin typeface="Calibri"/>
               </a:rPr>
-              <a:t>Nossa rota e ir alem das
-entregas!</a:t>
+              <a:t>Nossa rota e ir alem das entregas!</a:t>
             </a:r>
           </a:p>
         </p:txBody>
@@ -3709,7 +3696,7 @@
                 </a:solidFill>
                 <a:latin typeface="Calibri"/>
               </a:rPr>
-              <a:t>26</a:t>
+              <a:t>24</a:t>
             </a:r>
           </a:p>
         </p:txBody>
@@ -3824,7 +3811,7 @@
                 </a:solidFill>
                 <a:latin typeface="Calibri"/>
               </a:rPr>
-              <a:t>20</a:t>
+              <a:t>22</a:t>
             </a:r>
           </a:p>
         </p:txBody>
@@ -3939,7 +3926,7 @@
                 </a:solidFill>
                 <a:latin typeface="Calibri"/>
               </a:rPr>
-              <a:t>6</a:t>
+              <a:t>2</a:t>
             </a:r>
           </a:p>
         </p:txBody>
@@ -4050,11 +4037,11 @@
             <a:r>
               <a:rPr sz="2800" b="1">
                 <a:solidFill>
-                  <a:srgbClr val="EF4444"/>
+                  <a:srgbClr val="F59E0B"/>
                 </a:solidFill>
                 <a:latin typeface="Calibri"/>
               </a:rPr>
-              <a:t>76.9%</a:t>
+              <a:t>91.7%</a:t>
             </a:r>
           </a:p>
         </p:txBody>
@@ -4155,30 +4142,30 @@
                           </a:solidFill>
                           <a:latin typeface="Calibri"/>
                         </a:rPr>
+                        <a:t>Marco 2026</a:t>
+                      </a:r>
+                    </a:p>
+                  </a:txBody>
+                  <a:tcPr>
+                    <a:solidFill>
+                      <a:srgbClr val="1D1B43"/>
+                    </a:solidFill>
+                  </a:tcPr>
+                </a:tc>
+                <a:tc>
+                  <a:txBody>
+                    <a:bodyPr/>
+                    <a:lstStyle/>
+                    <a:p>
+                      <a:pPr algn="ctr"/>
+                      <a:r>
+                        <a:rPr sz="1100" b="1">
+                          <a:solidFill>
+                            <a:srgbClr val="FFFFFF"/>
+                          </a:solidFill>
+                          <a:latin typeface="Calibri"/>
+                        </a:rPr>
                         <a:t>Abril 2026</a:t>
-                      </a:r>
-                    </a:p>
-                  </a:txBody>
-                  <a:tcPr>
-                    <a:solidFill>
-                      <a:srgbClr val="1D1B43"/>
-                    </a:solidFill>
-                  </a:tcPr>
-                </a:tc>
-                <a:tc>
-                  <a:txBody>
-                    <a:bodyPr/>
-                    <a:lstStyle/>
-                    <a:p>
-                      <a:pPr algn="ctr"/>
-                      <a:r>
-                        <a:rPr sz="1100" b="1">
-                          <a:solidFill>
-                            <a:srgbClr val="FFFFFF"/>
-                          </a:solidFill>
-                          <a:latin typeface="Calibri"/>
-                        </a:rPr>
-                        <a:t>Maio 2026</a:t>
                       </a:r>
                     </a:p>
                   </a:txBody>
@@ -4249,6 +4236,29 @@
                           </a:solidFill>
                           <a:latin typeface="Calibri"/>
                         </a:rPr>
+                        <a:t>-</a:t>
+                      </a:r>
+                    </a:p>
+                  </a:txBody>
+                  <a:tcPr>
+                    <a:solidFill>
+                      <a:srgbClr val="FFFFFF"/>
+                    </a:solidFill>
+                  </a:tcPr>
+                </a:tc>
+                <a:tc>
+                  <a:txBody>
+                    <a:bodyPr/>
+                    <a:lstStyle/>
+                    <a:p>
+                      <a:pPr algn="l"/>
+                      <a:r>
+                        <a:rPr sz="1000" b="0">
+                          <a:solidFill>
+                            <a:srgbClr val="1D1B43"/>
+                          </a:solidFill>
+                          <a:latin typeface="Calibri"/>
+                        </a:rPr>
                         <a:t>24</a:t>
                       </a:r>
                     </a:p>
@@ -4272,30 +4282,7 @@
                           </a:solidFill>
                           <a:latin typeface="Calibri"/>
                         </a:rPr>
-                        <a:t>26</a:t>
-                      </a:r>
-                    </a:p>
-                  </a:txBody>
-                  <a:tcPr>
-                    <a:solidFill>
-                      <a:srgbClr val="FFFFFF"/>
-                    </a:solidFill>
-                  </a:tcPr>
-                </a:tc>
-                <a:tc>
-                  <a:txBody>
-                    <a:bodyPr/>
-                    <a:lstStyle/>
-                    <a:p>
-                      <a:pPr algn="l"/>
-                      <a:r>
-                        <a:rPr sz="1000" b="0">
-                          <a:solidFill>
-                            <a:srgbClr val="1D1B43"/>
-                          </a:solidFill>
-                          <a:latin typeface="Calibri"/>
-                        </a:rPr>
-                        <a:t>+ 2</a:t>
+                        <a:t>-</a:t>
                       </a:r>
                     </a:p>
                   </a:txBody>
@@ -4343,6 +4330,29 @@
                           </a:solidFill>
                           <a:latin typeface="Calibri"/>
                         </a:rPr>
+                        <a:t>-</a:t>
+                      </a:r>
+                    </a:p>
+                  </a:txBody>
+                  <a:tcPr>
+                    <a:solidFill>
+                      <a:srgbClr val="F2F2F2"/>
+                    </a:solidFill>
+                  </a:tcPr>
+                </a:tc>
+                <a:tc>
+                  <a:txBody>
+                    <a:bodyPr/>
+                    <a:lstStyle/>
+                    <a:p>
+                      <a:pPr algn="l"/>
+                      <a:r>
+                        <a:rPr sz="1000" b="0">
+                          <a:solidFill>
+                            <a:srgbClr val="1D1B43"/>
+                          </a:solidFill>
+                          <a:latin typeface="Calibri"/>
+                        </a:rPr>
                         <a:t>22</a:t>
                       </a:r>
                     </a:p>
@@ -4366,30 +4376,7 @@
                           </a:solidFill>
                           <a:latin typeface="Calibri"/>
                         </a:rPr>
-                        <a:t>20</a:t>
-                      </a:r>
-                    </a:p>
-                  </a:txBody>
-                  <a:tcPr>
-                    <a:solidFill>
-                      <a:srgbClr val="F2F2F2"/>
-                    </a:solidFill>
-                  </a:tcPr>
-                </a:tc>
-                <a:tc>
-                  <a:txBody>
-                    <a:bodyPr/>
-                    <a:lstStyle/>
-                    <a:p>
-                      <a:pPr algn="l"/>
-                      <a:r>
-                        <a:rPr sz="1000" b="0">
-                          <a:solidFill>
-                            <a:srgbClr val="1D1B43"/>
-                          </a:solidFill>
-                          <a:latin typeface="Calibri"/>
-                        </a:rPr>
-                        <a:t>- 2</a:t>
+                        <a:t>-</a:t>
                       </a:r>
                     </a:p>
                   </a:txBody>
@@ -4437,6 +4424,29 @@
                           </a:solidFill>
                           <a:latin typeface="Calibri"/>
                         </a:rPr>
+                        <a:t>-</a:t>
+                      </a:r>
+                    </a:p>
+                  </a:txBody>
+                  <a:tcPr>
+                    <a:solidFill>
+                      <a:srgbClr val="FFFFFF"/>
+                    </a:solidFill>
+                  </a:tcPr>
+                </a:tc>
+                <a:tc>
+                  <a:txBody>
+                    <a:bodyPr/>
+                    <a:lstStyle/>
+                    <a:p>
+                      <a:pPr algn="l"/>
+                      <a:r>
+                        <a:rPr sz="1000" b="0">
+                          <a:solidFill>
+                            <a:srgbClr val="1D1B43"/>
+                          </a:solidFill>
+                          <a:latin typeface="Calibri"/>
+                        </a:rPr>
                         <a:t>2</a:t>
                       </a:r>
                     </a:p>
@@ -4460,30 +4470,7 @@
                           </a:solidFill>
                           <a:latin typeface="Calibri"/>
                         </a:rPr>
-                        <a:t>6</a:t>
-                      </a:r>
-                    </a:p>
-                  </a:txBody>
-                  <a:tcPr>
-                    <a:solidFill>
-                      <a:srgbClr val="FFFFFF"/>
-                    </a:solidFill>
-                  </a:tcPr>
-                </a:tc>
-                <a:tc>
-                  <a:txBody>
-                    <a:bodyPr/>
-                    <a:lstStyle/>
-                    <a:p>
-                      <a:pPr algn="l"/>
-                      <a:r>
-                        <a:rPr sz="1000" b="0">
-                          <a:solidFill>
-                            <a:srgbClr val="1D1B43"/>
-                          </a:solidFill>
-                          <a:latin typeface="Calibri"/>
-                        </a:rPr>
-                        <a:t>+ 4</a:t>
+                        <a:t>-</a:t>
                       </a:r>
                     </a:p>
                   </a:txBody>
@@ -4531,6 +4518,29 @@
                           </a:solidFill>
                           <a:latin typeface="Calibri"/>
                         </a:rPr>
+                        <a:t>-</a:t>
+                      </a:r>
+                    </a:p>
+                  </a:txBody>
+                  <a:tcPr>
+                    <a:solidFill>
+                      <a:srgbClr val="F2F2F2"/>
+                    </a:solidFill>
+                  </a:tcPr>
+                </a:tc>
+                <a:tc>
+                  <a:txBody>
+                    <a:bodyPr/>
+                    <a:lstStyle/>
+                    <a:p>
+                      <a:pPr algn="l"/>
+                      <a:r>
+                        <a:rPr sz="1000" b="0">
+                          <a:solidFill>
+                            <a:srgbClr val="1D1B43"/>
+                          </a:solidFill>
+                          <a:latin typeface="Calibri"/>
+                        </a:rPr>
                         <a:t>91.7%</a:t>
                       </a:r>
                     </a:p>
@@ -4554,30 +4564,7 @@
                           </a:solidFill>
                           <a:latin typeface="Calibri"/>
                         </a:rPr>
-                        <a:t>76.9%</a:t>
-                      </a:r>
-                    </a:p>
-                  </a:txBody>
-                  <a:tcPr>
-                    <a:solidFill>
-                      <a:srgbClr val="F2F2F2"/>
-                    </a:solidFill>
-                  </a:tcPr>
-                </a:tc>
-                <a:tc>
-                  <a:txBody>
-                    <a:bodyPr/>
-                    <a:lstStyle/>
-                    <a:p>
-                      <a:pPr algn="l"/>
-                      <a:r>
-                        <a:rPr sz="1000" b="0">
-                          <a:solidFill>
-                            <a:srgbClr val="1D1B43"/>
-                          </a:solidFill>
-                          <a:latin typeface="Calibri"/>
-                        </a:rPr>
-                        <a:t>- 14.8pp</a:t>
+                        <a:t>-</a:t>
                       </a:r>
                     </a:p>
                   </a:txBody>
@@ -4748,7 +4735,7 @@
         </p:nvGraphicFramePr>
         <p:xfrm>
           <a:off x="7955279" y="2286000"/>
-          <a:ext cx="4480560" cy="1316736"/>
+          <a:ext cx="4480560" cy="877824"/>
         </p:xfrm>
         <a:graphic>
           <a:graphicData uri="http://schemas.openxmlformats.org/drawingml/2006/table">
@@ -4993,123 +4980,6 @@
                   <a:tcPr>
                     <a:solidFill>
                       <a:srgbClr val="FFFFFF"/>
-                    </a:solidFill>
-                  </a:tcPr>
-                </a:tc>
-              </a:tr>
-              <a:tr h="438912">
-                <a:tc>
-                  <a:txBody>
-                    <a:bodyPr/>
-                    <a:lstStyle/>
-                    <a:p>
-                      <a:pPr algn="l"/>
-                      <a:r>
-                        <a:rPr sz="1000" b="0">
-                          <a:solidFill>
-                            <a:srgbClr val="1D1B43"/>
-                          </a:solidFill>
-                          <a:latin typeface="Calibri"/>
-                        </a:rPr>
-                        <a:t>Maio 2026</a:t>
-                      </a:r>
-                    </a:p>
-                  </a:txBody>
-                  <a:tcPr>
-                    <a:solidFill>
-                      <a:srgbClr val="F2F2F2"/>
-                    </a:solidFill>
-                  </a:tcPr>
-                </a:tc>
-                <a:tc>
-                  <a:txBody>
-                    <a:bodyPr/>
-                    <a:lstStyle/>
-                    <a:p>
-                      <a:pPr algn="l"/>
-                      <a:r>
-                        <a:rPr sz="1000" b="0">
-                          <a:solidFill>
-                            <a:srgbClr val="1D1B43"/>
-                          </a:solidFill>
-                          <a:latin typeface="Calibri"/>
-                        </a:rPr>
-                        <a:t>26</a:t>
-                      </a:r>
-                    </a:p>
-                  </a:txBody>
-                  <a:tcPr>
-                    <a:solidFill>
-                      <a:srgbClr val="F2F2F2"/>
-                    </a:solidFill>
-                  </a:tcPr>
-                </a:tc>
-                <a:tc>
-                  <a:txBody>
-                    <a:bodyPr/>
-                    <a:lstStyle/>
-                    <a:p>
-                      <a:pPr algn="l"/>
-                      <a:r>
-                        <a:rPr sz="1000" b="0">
-                          <a:solidFill>
-                            <a:srgbClr val="1D1B43"/>
-                          </a:solidFill>
-                          <a:latin typeface="Calibri"/>
-                        </a:rPr>
-                        <a:t>20</a:t>
-                      </a:r>
-                    </a:p>
-                  </a:txBody>
-                  <a:tcPr>
-                    <a:solidFill>
-                      <a:srgbClr val="F2F2F2"/>
-                    </a:solidFill>
-                  </a:tcPr>
-                </a:tc>
-                <a:tc>
-                  <a:txBody>
-                    <a:bodyPr/>
-                    <a:lstStyle/>
-                    <a:p>
-                      <a:pPr algn="l"/>
-                      <a:r>
-                        <a:rPr sz="1000" b="0">
-                          <a:solidFill>
-                            <a:srgbClr val="1D1B43"/>
-                          </a:solidFill>
-                          <a:latin typeface="Calibri"/>
-                        </a:rPr>
-                        <a:t>6</a:t>
-                      </a:r>
-                    </a:p>
-                  </a:txBody>
-                  <a:tcPr>
-                    <a:solidFill>
-                      <a:srgbClr val="F2F2F2"/>
-                    </a:solidFill>
-                  </a:tcPr>
-                </a:tc>
-                <a:tc>
-                  <a:txBody>
-                    <a:bodyPr/>
-                    <a:lstStyle/>
-                    <a:p>
-                      <a:pPr algn="l"/>
-                      <a:r>
-                        <a:rPr sz="1000" b="0">
-                          <a:solidFill>
-                            <a:srgbClr val="1D1B43"/>
-                          </a:solidFill>
-                          <a:latin typeface="Calibri"/>
-                        </a:rPr>
-                        <a:t>76.9%</a:t>
-                      </a:r>
-                    </a:p>
-                  </a:txBody>
-                  <a:tcPr>
-                    <a:solidFill>
-                      <a:srgbClr val="F2F2F2"/>
                     </a:solidFill>
                   </a:tcPr>
                 </a:tc>
@@ -5191,7 +5061,7 @@
                 </a:solidFill>
                 <a:latin typeface="Calibri"/>
               </a:rPr>
-              <a:t>PERFORMANCE: 76.9% - ATENCAO</a:t>
+              <a:t>PERFORMANCE: 91.7% - REGULAR</a:t>
             </a:r>
           </a:p>
         </p:txBody>
@@ -5276,7 +5146,7 @@
                 </a:solidFill>
                 <a:latin typeface="Calibri"/>
               </a:rPr>
-              <a:t>OCORRENCIAS FORA DO PRAZO (6)</a:t>
+              <a:t>OCORRENCIAS FORA DO PRAZO (2)</a:t>
             </a:r>
           </a:p>
         </p:txBody>
@@ -5334,7 +5204,7 @@
         </p:nvGraphicFramePr>
         <p:xfrm>
           <a:off x="457200" y="1828800"/>
-          <a:ext cx="11429999" cy="2688336"/>
+          <a:ext cx="11429999" cy="1152144"/>
         </p:xfrm>
         <a:graphic>
           <a:graphicData uri="http://schemas.openxmlformats.org/drawingml/2006/table">
@@ -5480,7 +5350,7 @@
                           </a:solidFill>
                           <a:latin typeface="Calibri"/>
                         </a:rPr>
-                        <a:t>281664</a:t>
+                        <a:t>278683</a:t>
                       </a:r>
                     </a:p>
                   </a:txBody>
@@ -5503,7 +5373,7 @@
                           </a:solidFill>
                           <a:latin typeface="Calibri"/>
                         </a:rPr>
-                        <a:t>FELIPE LEITHARDT FAG - PASSO FUNDO / RS</a:t>
+                        <a:t>TIAGO WYSOCZNSKI - GUARANIACU / PR</a:t>
                       </a:r>
                     </a:p>
                   </a:txBody>
@@ -5526,7 +5396,7 @@
                           </a:solidFill>
                           <a:latin typeface="Calibri"/>
                         </a:rPr>
-                        <a:t>PASSO FUNDO/RS</a:t>
+                        <a:t>GUARANIACU/PR</a:t>
                       </a:r>
                     </a:p>
                   </a:txBody>
@@ -5549,7 +5419,7 @@
                           </a:solidFill>
                           <a:latin typeface="Calibri"/>
                         </a:rPr>
-                        <a:t>11/05/2026</a:t>
+                        <a:t>20/04/2026</a:t>
                       </a:r>
                     </a:p>
                   </a:txBody>
@@ -5597,7 +5467,7 @@
                           </a:solidFill>
                           <a:latin typeface="Calibri"/>
                         </a:rPr>
-                        <a:t>281795</a:t>
+                        <a:t>278980</a:t>
                       </a:r>
                     </a:p>
                   </a:txBody>
@@ -5620,7 +5490,7 @@
                           </a:solidFill>
                           <a:latin typeface="Calibri"/>
                         </a:rPr>
-                        <a:t>LUDIERO ADRIANO RAMI - SANTA ROSA / RS</a:t>
+                        <a:t>JORGE ANDRE LOURENCO - CIANORTE / PR</a:t>
                       </a:r>
                     </a:p>
                   </a:txBody>
@@ -5643,7 +5513,7 @@
                           </a:solidFill>
                           <a:latin typeface="Calibri"/>
                         </a:rPr>
-                        <a:t>SANTA ROSA/RS</a:t>
+                        <a:t>CIANORTE/PR</a:t>
                       </a:r>
                     </a:p>
                   </a:txBody>
@@ -5666,7 +5536,7 @@
                           </a:solidFill>
                           <a:latin typeface="Calibri"/>
                         </a:rPr>
-                        <a:t>12/05/2026</a:t>
+                        <a:t>20/04/2026</a:t>
                       </a:r>
                     </a:p>
                   </a:txBody>
@@ -5690,474 +5560,6 @@
                           <a:latin typeface="Calibri"/>
                         </a:rPr>
                         <a:t>ENTREGUE FORA DO PRAZO</a:t>
-                      </a:r>
-                    </a:p>
-                  </a:txBody>
-                  <a:tcPr>
-                    <a:solidFill>
-                      <a:srgbClr val="F2F2F2"/>
-                    </a:solidFill>
-                  </a:tcPr>
-                </a:tc>
-              </a:tr>
-              <a:tr h="384048">
-                <a:tc>
-                  <a:txBody>
-                    <a:bodyPr/>
-                    <a:lstStyle/>
-                    <a:p>
-                      <a:pPr algn="l"/>
-                      <a:r>
-                        <a:rPr sz="1000" b="0">
-                          <a:solidFill>
-                            <a:srgbClr val="1D1B43"/>
-                          </a:solidFill>
-                          <a:latin typeface="Calibri"/>
-                        </a:rPr>
-                        <a:t>282512</a:t>
-                      </a:r>
-                    </a:p>
-                  </a:txBody>
-                  <a:tcPr>
-                    <a:solidFill>
-                      <a:srgbClr val="FFFFFF"/>
-                    </a:solidFill>
-                  </a:tcPr>
-                </a:tc>
-                <a:tc>
-                  <a:txBody>
-                    <a:bodyPr/>
-                    <a:lstStyle/>
-                    <a:p>
-                      <a:pPr algn="l"/>
-                      <a:r>
-                        <a:rPr sz="1000" b="0">
-                          <a:solidFill>
-                            <a:srgbClr val="1D1B43"/>
-                          </a:solidFill>
-                          <a:latin typeface="Calibri"/>
-                        </a:rPr>
-                        <a:t>MEIO CONGELADO LTDA - SAO PAULO / SP</a:t>
-                      </a:r>
-                    </a:p>
-                  </a:txBody>
-                  <a:tcPr>
-                    <a:solidFill>
-                      <a:srgbClr val="FFFFFF"/>
-                    </a:solidFill>
-                  </a:tcPr>
-                </a:tc>
-                <a:tc>
-                  <a:txBody>
-                    <a:bodyPr/>
-                    <a:lstStyle/>
-                    <a:p>
-                      <a:pPr algn="l"/>
-                      <a:r>
-                        <a:rPr sz="1000" b="0">
-                          <a:solidFill>
-                            <a:srgbClr val="1D1B43"/>
-                          </a:solidFill>
-                          <a:latin typeface="Calibri"/>
-                        </a:rPr>
-                        <a:t>SAO PAULO/SP</a:t>
-                      </a:r>
-                    </a:p>
-                  </a:txBody>
-                  <a:tcPr>
-                    <a:solidFill>
-                      <a:srgbClr val="FFFFFF"/>
-                    </a:solidFill>
-                  </a:tcPr>
-                </a:tc>
-                <a:tc>
-                  <a:txBody>
-                    <a:bodyPr/>
-                    <a:lstStyle/>
-                    <a:p>
-                      <a:pPr algn="l"/>
-                      <a:r>
-                        <a:rPr sz="1000" b="0">
-                          <a:solidFill>
-                            <a:srgbClr val="1D1B43"/>
-                          </a:solidFill>
-                          <a:latin typeface="Calibri"/>
-                        </a:rPr>
-                        <a:t>15/05/2026</a:t>
-                      </a:r>
-                    </a:p>
-                  </a:txBody>
-                  <a:tcPr>
-                    <a:solidFill>
-                      <a:srgbClr val="FFFFFF"/>
-                    </a:solidFill>
-                  </a:tcPr>
-                </a:tc>
-                <a:tc>
-                  <a:txBody>
-                    <a:bodyPr/>
-                    <a:lstStyle/>
-                    <a:p>
-                      <a:pPr algn="l"/>
-                      <a:r>
-                        <a:rPr sz="1000" b="0">
-                          <a:solidFill>
-                            <a:srgbClr val="1D1B43"/>
-                          </a:solidFill>
-                          <a:latin typeface="Calibri"/>
-                        </a:rPr>
-                        <a:t>ENTREGUE FORA DO PRAZO</a:t>
-                      </a:r>
-                    </a:p>
-                  </a:txBody>
-                  <a:tcPr>
-                    <a:solidFill>
-                      <a:srgbClr val="FFFFFF"/>
-                    </a:solidFill>
-                  </a:tcPr>
-                </a:tc>
-              </a:tr>
-              <a:tr h="384048">
-                <a:tc>
-                  <a:txBody>
-                    <a:bodyPr/>
-                    <a:lstStyle/>
-                    <a:p>
-                      <a:pPr algn="l"/>
-                      <a:r>
-                        <a:rPr sz="1000" b="0">
-                          <a:solidFill>
-                            <a:srgbClr val="1D1B43"/>
-                          </a:solidFill>
-                          <a:latin typeface="Calibri"/>
-                        </a:rPr>
-                        <a:t>282514</a:t>
-                      </a:r>
-                    </a:p>
-                  </a:txBody>
-                  <a:tcPr>
-                    <a:solidFill>
-                      <a:srgbClr val="F2F2F2"/>
-                    </a:solidFill>
-                  </a:tcPr>
-                </a:tc>
-                <a:tc>
-                  <a:txBody>
-                    <a:bodyPr/>
-                    <a:lstStyle/>
-                    <a:p>
-                      <a:pPr algn="l"/>
-                      <a:r>
-                        <a:rPr sz="1000" b="0">
-                          <a:solidFill>
-                            <a:srgbClr val="1D1B43"/>
-                          </a:solidFill>
-                          <a:latin typeface="Calibri"/>
-                        </a:rPr>
-                        <a:t>SAFEVOLT ENERGY LTDA - IRACEMINHA / SC</a:t>
-                      </a:r>
-                    </a:p>
-                  </a:txBody>
-                  <a:tcPr>
-                    <a:solidFill>
-                      <a:srgbClr val="F2F2F2"/>
-                    </a:solidFill>
-                  </a:tcPr>
-                </a:tc>
-                <a:tc>
-                  <a:txBody>
-                    <a:bodyPr/>
-                    <a:lstStyle/>
-                    <a:p>
-                      <a:pPr algn="l"/>
-                      <a:r>
-                        <a:rPr sz="1000" b="0">
-                          <a:solidFill>
-                            <a:srgbClr val="1D1B43"/>
-                          </a:solidFill>
-                          <a:latin typeface="Calibri"/>
-                        </a:rPr>
-                        <a:t>IRACEMINHA/SC</a:t>
-                      </a:r>
-                    </a:p>
-                  </a:txBody>
-                  <a:tcPr>
-                    <a:solidFill>
-                      <a:srgbClr val="F2F2F2"/>
-                    </a:solidFill>
-                  </a:tcPr>
-                </a:tc>
-                <a:tc>
-                  <a:txBody>
-                    <a:bodyPr/>
-                    <a:lstStyle/>
-                    <a:p>
-                      <a:pPr algn="l"/>
-                      <a:r>
-                        <a:rPr sz="1000" b="0">
-                          <a:solidFill>
-                            <a:srgbClr val="1D1B43"/>
-                          </a:solidFill>
-                          <a:latin typeface="Calibri"/>
-                        </a:rPr>
-                        <a:t>14/05/2026</a:t>
-                      </a:r>
-                    </a:p>
-                  </a:txBody>
-                  <a:tcPr>
-                    <a:solidFill>
-                      <a:srgbClr val="F2F2F2"/>
-                    </a:solidFill>
-                  </a:tcPr>
-                </a:tc>
-                <a:tc>
-                  <a:txBody>
-                    <a:bodyPr/>
-                    <a:lstStyle/>
-                    <a:p>
-                      <a:pPr algn="l"/>
-                      <a:r>
-                        <a:rPr sz="1000" b="0">
-                          <a:solidFill>
-                            <a:srgbClr val="1D1B43"/>
-                          </a:solidFill>
-                          <a:latin typeface="Calibri"/>
-                        </a:rPr>
-                        <a:t>ENTREGUE FORA DO PRAZO</a:t>
-                      </a:r>
-                    </a:p>
-                  </a:txBody>
-                  <a:tcPr>
-                    <a:solidFill>
-                      <a:srgbClr val="F2F2F2"/>
-                    </a:solidFill>
-                  </a:tcPr>
-                </a:tc>
-              </a:tr>
-              <a:tr h="384048">
-                <a:tc>
-                  <a:txBody>
-                    <a:bodyPr/>
-                    <a:lstStyle/>
-                    <a:p>
-                      <a:pPr algn="l"/>
-                      <a:r>
-                        <a:rPr sz="1000" b="0">
-                          <a:solidFill>
-                            <a:srgbClr val="1D1B43"/>
-                          </a:solidFill>
-                          <a:latin typeface="Calibri"/>
-                        </a:rPr>
-                        <a:t>282720</a:t>
-                      </a:r>
-                    </a:p>
-                  </a:txBody>
-                  <a:tcPr>
-                    <a:solidFill>
-                      <a:srgbClr val="FFFFFF"/>
-                    </a:solidFill>
-                  </a:tcPr>
-                </a:tc>
-                <a:tc>
-                  <a:txBody>
-                    <a:bodyPr/>
-                    <a:lstStyle/>
-                    <a:p>
-                      <a:pPr algn="l"/>
-                      <a:r>
-                        <a:rPr sz="1000" b="0">
-                          <a:solidFill>
-                            <a:srgbClr val="1D1B43"/>
-                          </a:solidFill>
-                          <a:latin typeface="Calibri"/>
-                        </a:rPr>
-                        <a:t>SIMOLDES ACOS BRASIL - SAO JOSE DOS PINHAIS / PR</a:t>
-                      </a:r>
-                    </a:p>
-                  </a:txBody>
-                  <a:tcPr>
-                    <a:solidFill>
-                      <a:srgbClr val="FFFFFF"/>
-                    </a:solidFill>
-                  </a:tcPr>
-                </a:tc>
-                <a:tc>
-                  <a:txBody>
-                    <a:bodyPr/>
-                    <a:lstStyle/>
-                    <a:p>
-                      <a:pPr algn="l"/>
-                      <a:r>
-                        <a:rPr sz="1000" b="0">
-                          <a:solidFill>
-                            <a:srgbClr val="1D1B43"/>
-                          </a:solidFill>
-                          <a:latin typeface="Calibri"/>
-                        </a:rPr>
-                        <a:t>SAO JOSE DOS PINHAIS/PR</a:t>
-                      </a:r>
-                    </a:p>
-                  </a:txBody>
-                  <a:tcPr>
-                    <a:solidFill>
-                      <a:srgbClr val="FFFFFF"/>
-                    </a:solidFill>
-                  </a:tcPr>
-                </a:tc>
-                <a:tc>
-                  <a:txBody>
-                    <a:bodyPr/>
-                    <a:lstStyle/>
-                    <a:p>
-                      <a:pPr algn="l"/>
-                      <a:r>
-                        <a:rPr sz="1000" b="0">
-                          <a:solidFill>
-                            <a:srgbClr val="1D1B43"/>
-                          </a:solidFill>
-                          <a:latin typeface="Calibri"/>
-                        </a:rPr>
-                        <a:t>14/05/2026</a:t>
-                      </a:r>
-                    </a:p>
-                  </a:txBody>
-                  <a:tcPr>
-                    <a:solidFill>
-                      <a:srgbClr val="FFFFFF"/>
-                    </a:solidFill>
-                  </a:tcPr>
-                </a:tc>
-                <a:tc>
-                  <a:txBody>
-                    <a:bodyPr/>
-                    <a:lstStyle/>
-                    <a:p>
-                      <a:pPr algn="l"/>
-                      <a:r>
-                        <a:rPr sz="1000" b="0">
-                          <a:solidFill>
-                            <a:srgbClr val="1D1B43"/>
-                          </a:solidFill>
-                          <a:latin typeface="Calibri"/>
-                        </a:rPr>
-                        <a:t>FORA DO PRAZO</a:t>
-                      </a:r>
-                    </a:p>
-                  </a:txBody>
-                  <a:tcPr>
-                    <a:solidFill>
-                      <a:srgbClr val="FFFFFF"/>
-                    </a:solidFill>
-                  </a:tcPr>
-                </a:tc>
-              </a:tr>
-              <a:tr h="384048">
-                <a:tc>
-                  <a:txBody>
-                    <a:bodyPr/>
-                    <a:lstStyle/>
-                    <a:p>
-                      <a:pPr algn="l"/>
-                      <a:r>
-                        <a:rPr sz="1000" b="0">
-                          <a:solidFill>
-                            <a:srgbClr val="1D1B43"/>
-                          </a:solidFill>
-                          <a:latin typeface="Calibri"/>
-                        </a:rPr>
-                        <a:t>282721</a:t>
-                      </a:r>
-                    </a:p>
-                  </a:txBody>
-                  <a:tcPr>
-                    <a:solidFill>
-                      <a:srgbClr val="F2F2F2"/>
-                    </a:solidFill>
-                  </a:tcPr>
-                </a:tc>
-                <a:tc>
-                  <a:txBody>
-                    <a:bodyPr/>
-                    <a:lstStyle/>
-                    <a:p>
-                      <a:pPr algn="l"/>
-                      <a:r>
-                        <a:rPr sz="1000" b="0">
-                          <a:solidFill>
-                            <a:srgbClr val="1D1B43"/>
-                          </a:solidFill>
-                          <a:latin typeface="Calibri"/>
-                        </a:rPr>
-                        <a:t>SIMOLDES ACOS BRASIL - SAO JOSE DOS PINHAIS / PR</a:t>
-                      </a:r>
-                    </a:p>
-                  </a:txBody>
-                  <a:tcPr>
-                    <a:solidFill>
-                      <a:srgbClr val="F2F2F2"/>
-                    </a:solidFill>
-                  </a:tcPr>
-                </a:tc>
-                <a:tc>
-                  <a:txBody>
-                    <a:bodyPr/>
-                    <a:lstStyle/>
-                    <a:p>
-                      <a:pPr algn="l"/>
-                      <a:r>
-                        <a:rPr sz="1000" b="0">
-                          <a:solidFill>
-                            <a:srgbClr val="1D1B43"/>
-                          </a:solidFill>
-                          <a:latin typeface="Calibri"/>
-                        </a:rPr>
-                        <a:t>SAO JOSE DOS PINHAIS/PR</a:t>
-                      </a:r>
-                    </a:p>
-                  </a:txBody>
-                  <a:tcPr>
-                    <a:solidFill>
-                      <a:srgbClr val="F2F2F2"/>
-                    </a:solidFill>
-                  </a:tcPr>
-                </a:tc>
-                <a:tc>
-                  <a:txBody>
-                    <a:bodyPr/>
-                    <a:lstStyle/>
-                    <a:p>
-                      <a:pPr algn="l"/>
-                      <a:r>
-                        <a:rPr sz="1000" b="0">
-                          <a:solidFill>
-                            <a:srgbClr val="1D1B43"/>
-                          </a:solidFill>
-                          <a:latin typeface="Calibri"/>
-                        </a:rPr>
-                        <a:t>14/05/2026</a:t>
-                      </a:r>
-                    </a:p>
-                  </a:txBody>
-                  <a:tcPr>
-                    <a:solidFill>
-                      <a:srgbClr val="F2F2F2"/>
-                    </a:solidFill>
-                  </a:tcPr>
-                </a:tc>
-                <a:tc>
-                  <a:txBody>
-                    <a:bodyPr/>
-                    <a:lstStyle/>
-                    <a:p>
-                      <a:pPr algn="l"/>
-                      <a:r>
-                        <a:rPr sz="1000" b="0">
-                          <a:solidFill>
-                            <a:srgbClr val="1D1B43"/>
-                          </a:solidFill>
-                          <a:latin typeface="Calibri"/>
-                        </a:rPr>
-                        <a:t>FORA DO PRAZO</a:t>
                       </a:r>
                     </a:p>
                   </a:txBody>
@@ -6310,7 +5712,7 @@
         </p:nvGraphicFramePr>
         <p:xfrm>
           <a:off x="731520" y="1920240"/>
-          <a:ext cx="10698480" cy="3200400"/>
+          <a:ext cx="10698480" cy="4389120"/>
         </p:xfrm>
         <a:graphic>
           <a:graphicData uri="http://schemas.openxmlformats.org/drawingml/2006/table">
@@ -6326,7 +5728,7 @@
                 <a:gridCol w="1554480"/>
                 <a:gridCol w="3108960"/>
               </a:tblGrid>
-              <a:tr h="457200">
+              <a:tr h="438912">
                 <a:tc>
                   <a:txBody>
                     <a:bodyPr/>
@@ -6466,7 +5868,7 @@
                   </a:tcPr>
                 </a:tc>
               </a:tr>
-              <a:tr h="457200">
+              <a:tr h="438912">
                 <a:tc>
                   <a:txBody>
                     <a:bodyPr/>
@@ -6503,7 +5905,7 @@
                           </a:solidFill>
                           <a:latin typeface="Calibri"/>
                         </a:rPr>
-                        <a:t>8</a:t>
+                        <a:t>7</a:t>
                       </a:r>
                     </a:p>
                   </a:txBody>
@@ -6549,6 +5951,263 @@
                           </a:solidFill>
                           <a:latin typeface="Calibri"/>
                         </a:rPr>
+                        <a:t>0</a:t>
+                      </a:r>
+                    </a:p>
+                  </a:txBody>
+                  <a:tcPr>
+                    <a:solidFill>
+                      <a:srgbClr val="FFFFFF"/>
+                    </a:solidFill>
+                  </a:tcPr>
+                </a:tc>
+                <a:tc>
+                  <a:txBody>
+                    <a:bodyPr/>
+                    <a:lstStyle/>
+                    <a:p>
+                      <a:pPr algn="l"/>
+                      <a:r>
+                        <a:rPr sz="1000" b="0">
+                          <a:solidFill>
+                            <a:srgbClr val="1D1B43"/>
+                          </a:solidFill>
+                          <a:latin typeface="Calibri"/>
+                        </a:rPr>
+                        <a:t>100.0%</a:t>
+                      </a:r>
+                    </a:p>
+                  </a:txBody>
+                  <a:tcPr>
+                    <a:solidFill>
+                      <a:srgbClr val="FFFFFF"/>
+                    </a:solidFill>
+                  </a:tcPr>
+                </a:tc>
+                <a:tc>
+                  <a:txBody>
+                    <a:bodyPr/>
+                    <a:lstStyle/>
+                    <a:p>
+                      <a:pPr algn="l"/>
+                      <a:r>
+                        <a:rPr sz="1000" b="0">
+                          <a:solidFill>
+                            <a:srgbClr val="1D1B43"/>
+                          </a:solidFill>
+                          <a:latin typeface="Calibri"/>
+                        </a:rPr>
+                        <a:t>Excelente</a:t>
+                      </a:r>
+                    </a:p>
+                  </a:txBody>
+                  <a:tcPr>
+                    <a:solidFill>
+                      <a:srgbClr val="FFFFFF"/>
+                    </a:solidFill>
+                  </a:tcPr>
+                </a:tc>
+              </a:tr>
+              <a:tr h="438912">
+                <a:tc>
+                  <a:txBody>
+                    <a:bodyPr/>
+                    <a:lstStyle/>
+                    <a:p>
+                      <a:pPr algn="l"/>
+                      <a:r>
+                        <a:rPr sz="1000" b="0">
+                          <a:solidFill>
+                            <a:srgbClr val="1D1B43"/>
+                          </a:solidFill>
+                          <a:latin typeface="Calibri"/>
+                        </a:rPr>
+                        <a:t>SC</a:t>
+                      </a:r>
+                    </a:p>
+                  </a:txBody>
+                  <a:tcPr>
+                    <a:solidFill>
+                      <a:srgbClr val="F2F2F2"/>
+                    </a:solidFill>
+                  </a:tcPr>
+                </a:tc>
+                <a:tc>
+                  <a:txBody>
+                    <a:bodyPr/>
+                    <a:lstStyle/>
+                    <a:p>
+                      <a:pPr algn="l"/>
+                      <a:r>
+                        <a:rPr sz="1000" b="0">
+                          <a:solidFill>
+                            <a:srgbClr val="1D1B43"/>
+                          </a:solidFill>
+                          <a:latin typeface="Calibri"/>
+                        </a:rPr>
+                        <a:t>4</a:t>
+                      </a:r>
+                    </a:p>
+                  </a:txBody>
+                  <a:tcPr>
+                    <a:solidFill>
+                      <a:srgbClr val="F2F2F2"/>
+                    </a:solidFill>
+                  </a:tcPr>
+                </a:tc>
+                <a:tc>
+                  <a:txBody>
+                    <a:bodyPr/>
+                    <a:lstStyle/>
+                    <a:p>
+                      <a:pPr algn="l"/>
+                      <a:r>
+                        <a:rPr sz="1000" b="0">
+                          <a:solidFill>
+                            <a:srgbClr val="1D1B43"/>
+                          </a:solidFill>
+                          <a:latin typeface="Calibri"/>
+                        </a:rPr>
+                        <a:t>4</a:t>
+                      </a:r>
+                    </a:p>
+                  </a:txBody>
+                  <a:tcPr>
+                    <a:solidFill>
+                      <a:srgbClr val="F2F2F2"/>
+                    </a:solidFill>
+                  </a:tcPr>
+                </a:tc>
+                <a:tc>
+                  <a:txBody>
+                    <a:bodyPr/>
+                    <a:lstStyle/>
+                    <a:p>
+                      <a:pPr algn="l"/>
+                      <a:r>
+                        <a:rPr sz="1000" b="0">
+                          <a:solidFill>
+                            <a:srgbClr val="1D1B43"/>
+                          </a:solidFill>
+                          <a:latin typeface="Calibri"/>
+                        </a:rPr>
+                        <a:t>0</a:t>
+                      </a:r>
+                    </a:p>
+                  </a:txBody>
+                  <a:tcPr>
+                    <a:solidFill>
+                      <a:srgbClr val="F2F2F2"/>
+                    </a:solidFill>
+                  </a:tcPr>
+                </a:tc>
+                <a:tc>
+                  <a:txBody>
+                    <a:bodyPr/>
+                    <a:lstStyle/>
+                    <a:p>
+                      <a:pPr algn="l"/>
+                      <a:r>
+                        <a:rPr sz="1000" b="0">
+                          <a:solidFill>
+                            <a:srgbClr val="1D1B43"/>
+                          </a:solidFill>
+                          <a:latin typeface="Calibri"/>
+                        </a:rPr>
+                        <a:t>100.0%</a:t>
+                      </a:r>
+                    </a:p>
+                  </a:txBody>
+                  <a:tcPr>
+                    <a:solidFill>
+                      <a:srgbClr val="F2F2F2"/>
+                    </a:solidFill>
+                  </a:tcPr>
+                </a:tc>
+                <a:tc>
+                  <a:txBody>
+                    <a:bodyPr/>
+                    <a:lstStyle/>
+                    <a:p>
+                      <a:pPr algn="l"/>
+                      <a:r>
+                        <a:rPr sz="1000" b="0">
+                          <a:solidFill>
+                            <a:srgbClr val="1D1B43"/>
+                          </a:solidFill>
+                          <a:latin typeface="Calibri"/>
+                        </a:rPr>
+                        <a:t>Excelente</a:t>
+                      </a:r>
+                    </a:p>
+                  </a:txBody>
+                  <a:tcPr>
+                    <a:solidFill>
+                      <a:srgbClr val="F2F2F2"/>
+                    </a:solidFill>
+                  </a:tcPr>
+                </a:tc>
+              </a:tr>
+              <a:tr h="438912">
+                <a:tc>
+                  <a:txBody>
+                    <a:bodyPr/>
+                    <a:lstStyle/>
+                    <a:p>
+                      <a:pPr algn="l"/>
+                      <a:r>
+                        <a:rPr sz="1000" b="0">
+                          <a:solidFill>
+                            <a:srgbClr val="1D1B43"/>
+                          </a:solidFill>
+                          <a:latin typeface="Calibri"/>
+                        </a:rPr>
+                        <a:t>PR</a:t>
+                      </a:r>
+                    </a:p>
+                  </a:txBody>
+                  <a:tcPr>
+                    <a:solidFill>
+                      <a:srgbClr val="FFFFFF"/>
+                    </a:solidFill>
+                  </a:tcPr>
+                </a:tc>
+                <a:tc>
+                  <a:txBody>
+                    <a:bodyPr/>
+                    <a:lstStyle/>
+                    <a:p>
+                      <a:pPr algn="l"/>
+                      <a:r>
+                        <a:rPr sz="1000" b="0">
+                          <a:solidFill>
+                            <a:srgbClr val="1D1B43"/>
+                          </a:solidFill>
+                          <a:latin typeface="Calibri"/>
+                        </a:rPr>
+                        <a:t>3</a:t>
+                      </a:r>
+                    </a:p>
+                  </a:txBody>
+                  <a:tcPr>
+                    <a:solidFill>
+                      <a:srgbClr val="FFFFFF"/>
+                    </a:solidFill>
+                  </a:tcPr>
+                </a:tc>
+                <a:tc>
+                  <a:txBody>
+                    <a:bodyPr/>
+                    <a:lstStyle/>
+                    <a:p>
+                      <a:pPr algn="l"/>
+                      <a:r>
+                        <a:rPr sz="1000" b="0">
+                          <a:solidFill>
+                            <a:srgbClr val="1D1B43"/>
+                          </a:solidFill>
+                          <a:latin typeface="Calibri"/>
+                        </a:rPr>
                         <a:t>1</a:t>
                       </a:r>
                     </a:p>
@@ -6572,7 +6231,7 @@
                           </a:solidFill>
                           <a:latin typeface="Calibri"/>
                         </a:rPr>
-                        <a:t>87.5%</a:t>
+                        <a:t>2</a:t>
                       </a:r>
                     </a:p>
                   </a:txBody>
@@ -6595,7 +6254,7 @@
                           </a:solidFill>
                           <a:latin typeface="Calibri"/>
                         </a:rPr>
-                        <a:t>Regular</a:t>
+                        <a:t>33.3%</a:t>
                       </a:r>
                     </a:p>
                   </a:txBody>
@@ -6605,22 +6264,45 @@
                     </a:solidFill>
                   </a:tcPr>
                 </a:tc>
+                <a:tc>
+                  <a:txBody>
+                    <a:bodyPr/>
+                    <a:lstStyle/>
+                    <a:p>
+                      <a:pPr algn="l"/>
+                      <a:r>
+                        <a:rPr sz="1000" b="0">
+                          <a:solidFill>
+                            <a:srgbClr val="1D1B43"/>
+                          </a:solidFill>
+                          <a:latin typeface="Calibri"/>
+                        </a:rPr>
+                        <a:t>Atencao</a:t>
+                      </a:r>
+                    </a:p>
+                  </a:txBody>
+                  <a:tcPr>
+                    <a:solidFill>
+                      <a:srgbClr val="FFFFFF"/>
+                    </a:solidFill>
+                  </a:tcPr>
+                </a:tc>
               </a:tr>
-              <a:tr h="457200">
-                <a:tc>
-                  <a:txBody>
-                    <a:bodyPr/>
-                    <a:lstStyle/>
-                    <a:p>
-                      <a:pPr algn="l"/>
-                      <a:r>
-                        <a:rPr sz="1000" b="0">
-                          <a:solidFill>
-                            <a:srgbClr val="1D1B43"/>
-                          </a:solidFill>
-                          <a:latin typeface="Calibri"/>
-                        </a:rPr>
-                        <a:t>PR</a:t>
+              <a:tr h="438912">
+                <a:tc>
+                  <a:txBody>
+                    <a:bodyPr/>
+                    <a:lstStyle/>
+                    <a:p>
+                      <a:pPr algn="l"/>
+                      <a:r>
+                        <a:rPr sz="1000" b="0">
+                          <a:solidFill>
+                            <a:srgbClr val="1D1B43"/>
+                          </a:solidFill>
+                          <a:latin typeface="Calibri"/>
+                        </a:rPr>
+                        <a:t>DF</a:t>
                       </a:r>
                     </a:p>
                   </a:txBody>
@@ -6643,7 +6325,7 @@
                           </a:solidFill>
                           <a:latin typeface="Calibri"/>
                         </a:rPr>
-                        <a:t>6</a:t>
+                        <a:t>2</a:t>
                       </a:r>
                     </a:p>
                   </a:txBody>
@@ -6666,7 +6348,7 @@
                           </a:solidFill>
                           <a:latin typeface="Calibri"/>
                         </a:rPr>
-                        <a:t>4</a:t>
+                        <a:t>2</a:t>
                       </a:r>
                     </a:p>
                   </a:txBody>
@@ -6689,12 +6371,223 @@
                           </a:solidFill>
                           <a:latin typeface="Calibri"/>
                         </a:rPr>
+                        <a:t>0</a:t>
+                      </a:r>
+                    </a:p>
+                  </a:txBody>
+                  <a:tcPr>
+                    <a:solidFill>
+                      <a:srgbClr val="F2F2F2"/>
+                    </a:solidFill>
+                  </a:tcPr>
+                </a:tc>
+                <a:tc>
+                  <a:txBody>
+                    <a:bodyPr/>
+                    <a:lstStyle/>
+                    <a:p>
+                      <a:pPr algn="l"/>
+                      <a:r>
+                        <a:rPr sz="1000" b="0">
+                          <a:solidFill>
+                            <a:srgbClr val="1D1B43"/>
+                          </a:solidFill>
+                          <a:latin typeface="Calibri"/>
+                        </a:rPr>
+                        <a:t>100.0%</a:t>
+                      </a:r>
+                    </a:p>
+                  </a:txBody>
+                  <a:tcPr>
+                    <a:solidFill>
+                      <a:srgbClr val="F2F2F2"/>
+                    </a:solidFill>
+                  </a:tcPr>
+                </a:tc>
+                <a:tc>
+                  <a:txBody>
+                    <a:bodyPr/>
+                    <a:lstStyle/>
+                    <a:p>
+                      <a:pPr algn="l"/>
+                      <a:r>
+                        <a:rPr sz="1000" b="0">
+                          <a:solidFill>
+                            <a:srgbClr val="1D1B43"/>
+                          </a:solidFill>
+                          <a:latin typeface="Calibri"/>
+                        </a:rPr>
+                        <a:t>Excelente</a:t>
+                      </a:r>
+                    </a:p>
+                  </a:txBody>
+                  <a:tcPr>
+                    <a:solidFill>
+                      <a:srgbClr val="F2F2F2"/>
+                    </a:solidFill>
+                  </a:tcPr>
+                </a:tc>
+              </a:tr>
+              <a:tr h="438912">
+                <a:tc>
+                  <a:txBody>
+                    <a:bodyPr/>
+                    <a:lstStyle/>
+                    <a:p>
+                      <a:pPr algn="l"/>
+                      <a:r>
+                        <a:rPr sz="1000" b="0">
+                          <a:solidFill>
+                            <a:srgbClr val="1D1B43"/>
+                          </a:solidFill>
+                          <a:latin typeface="Calibri"/>
+                        </a:rPr>
+                        <a:t>MG</a:t>
+                      </a:r>
+                    </a:p>
+                  </a:txBody>
+                  <a:tcPr>
+                    <a:solidFill>
+                      <a:srgbClr val="FFFFFF"/>
+                    </a:solidFill>
+                  </a:tcPr>
+                </a:tc>
+                <a:tc>
+                  <a:txBody>
+                    <a:bodyPr/>
+                    <a:lstStyle/>
+                    <a:p>
+                      <a:pPr algn="l"/>
+                      <a:r>
+                        <a:rPr sz="1000" b="0">
+                          <a:solidFill>
+                            <a:srgbClr val="1D1B43"/>
+                          </a:solidFill>
+                          <a:latin typeface="Calibri"/>
+                        </a:rPr>
                         <a:t>2</a:t>
                       </a:r>
                     </a:p>
                   </a:txBody>
                   <a:tcPr>
                     <a:solidFill>
+                      <a:srgbClr val="FFFFFF"/>
+                    </a:solidFill>
+                  </a:tcPr>
+                </a:tc>
+                <a:tc>
+                  <a:txBody>
+                    <a:bodyPr/>
+                    <a:lstStyle/>
+                    <a:p>
+                      <a:pPr algn="l"/>
+                      <a:r>
+                        <a:rPr sz="1000" b="0">
+                          <a:solidFill>
+                            <a:srgbClr val="1D1B43"/>
+                          </a:solidFill>
+                          <a:latin typeface="Calibri"/>
+                        </a:rPr>
+                        <a:t>2</a:t>
+                      </a:r>
+                    </a:p>
+                  </a:txBody>
+                  <a:tcPr>
+                    <a:solidFill>
+                      <a:srgbClr val="FFFFFF"/>
+                    </a:solidFill>
+                  </a:tcPr>
+                </a:tc>
+                <a:tc>
+                  <a:txBody>
+                    <a:bodyPr/>
+                    <a:lstStyle/>
+                    <a:p>
+                      <a:pPr algn="l"/>
+                      <a:r>
+                        <a:rPr sz="1000" b="0">
+                          <a:solidFill>
+                            <a:srgbClr val="1D1B43"/>
+                          </a:solidFill>
+                          <a:latin typeface="Calibri"/>
+                        </a:rPr>
+                        <a:t>0</a:t>
+                      </a:r>
+                    </a:p>
+                  </a:txBody>
+                  <a:tcPr>
+                    <a:solidFill>
+                      <a:srgbClr val="FFFFFF"/>
+                    </a:solidFill>
+                  </a:tcPr>
+                </a:tc>
+                <a:tc>
+                  <a:txBody>
+                    <a:bodyPr/>
+                    <a:lstStyle/>
+                    <a:p>
+                      <a:pPr algn="l"/>
+                      <a:r>
+                        <a:rPr sz="1000" b="0">
+                          <a:solidFill>
+                            <a:srgbClr val="1D1B43"/>
+                          </a:solidFill>
+                          <a:latin typeface="Calibri"/>
+                        </a:rPr>
+                        <a:t>100.0%</a:t>
+                      </a:r>
+                    </a:p>
+                  </a:txBody>
+                  <a:tcPr>
+                    <a:solidFill>
+                      <a:srgbClr val="FFFFFF"/>
+                    </a:solidFill>
+                  </a:tcPr>
+                </a:tc>
+                <a:tc>
+                  <a:txBody>
+                    <a:bodyPr/>
+                    <a:lstStyle/>
+                    <a:p>
+                      <a:pPr algn="l"/>
+                      <a:r>
+                        <a:rPr sz="1000" b="0">
+                          <a:solidFill>
+                            <a:srgbClr val="1D1B43"/>
+                          </a:solidFill>
+                          <a:latin typeface="Calibri"/>
+                        </a:rPr>
+                        <a:t>Excelente</a:t>
+                      </a:r>
+                    </a:p>
+                  </a:txBody>
+                  <a:tcPr>
+                    <a:solidFill>
+                      <a:srgbClr val="FFFFFF"/>
+                    </a:solidFill>
+                  </a:tcPr>
+                </a:tc>
+              </a:tr>
+              <a:tr h="438912">
+                <a:tc>
+                  <a:txBody>
+                    <a:bodyPr/>
+                    <a:lstStyle/>
+                    <a:p>
+                      <a:pPr algn="l"/>
+                      <a:r>
+                        <a:rPr sz="1000" b="0">
+                          <a:solidFill>
+                            <a:srgbClr val="1D1B43"/>
+                          </a:solidFill>
+                          <a:latin typeface="Calibri"/>
+                        </a:rPr>
+                        <a:t>RS</a:t>
+                      </a:r>
+                    </a:p>
+                  </a:txBody>
+                  <a:tcPr>
+                    <a:solidFill>
                       <a:srgbClr val="F2F2F2"/>
                     </a:solidFill>
                   </a:tcPr>
@@ -6712,7 +6605,7 @@
                           </a:solidFill>
                           <a:latin typeface="Calibri"/>
                         </a:rPr>
-                        <a:t>66.7%</a:t>
+                        <a:t>2</a:t>
                       </a:r>
                     </a:p>
                   </a:txBody>
@@ -6735,7 +6628,7 @@
                           </a:solidFill>
                           <a:latin typeface="Calibri"/>
                         </a:rPr>
-                        <a:t>Atencao</a:t>
+                        <a:t>2</a:t>
                       </a:r>
                     </a:p>
                   </a:txBody>
@@ -6745,22 +6638,91 @@
                     </a:solidFill>
                   </a:tcPr>
                 </a:tc>
+                <a:tc>
+                  <a:txBody>
+                    <a:bodyPr/>
+                    <a:lstStyle/>
+                    <a:p>
+                      <a:pPr algn="l"/>
+                      <a:r>
+                        <a:rPr sz="1000" b="0">
+                          <a:solidFill>
+                            <a:srgbClr val="1D1B43"/>
+                          </a:solidFill>
+                          <a:latin typeface="Calibri"/>
+                        </a:rPr>
+                        <a:t>0</a:t>
+                      </a:r>
+                    </a:p>
+                  </a:txBody>
+                  <a:tcPr>
+                    <a:solidFill>
+                      <a:srgbClr val="F2F2F2"/>
+                    </a:solidFill>
+                  </a:tcPr>
+                </a:tc>
+                <a:tc>
+                  <a:txBody>
+                    <a:bodyPr/>
+                    <a:lstStyle/>
+                    <a:p>
+                      <a:pPr algn="l"/>
+                      <a:r>
+                        <a:rPr sz="1000" b="0">
+                          <a:solidFill>
+                            <a:srgbClr val="1D1B43"/>
+                          </a:solidFill>
+                          <a:latin typeface="Calibri"/>
+                        </a:rPr>
+                        <a:t>100.0%</a:t>
+                      </a:r>
+                    </a:p>
+                  </a:txBody>
+                  <a:tcPr>
+                    <a:solidFill>
+                      <a:srgbClr val="F2F2F2"/>
+                    </a:solidFill>
+                  </a:tcPr>
+                </a:tc>
+                <a:tc>
+                  <a:txBody>
+                    <a:bodyPr/>
+                    <a:lstStyle/>
+                    <a:p>
+                      <a:pPr algn="l"/>
+                      <a:r>
+                        <a:rPr sz="1000" b="0">
+                          <a:solidFill>
+                            <a:srgbClr val="1D1B43"/>
+                          </a:solidFill>
+                          <a:latin typeface="Calibri"/>
+                        </a:rPr>
+                        <a:t>Excelente</a:t>
+                      </a:r>
+                    </a:p>
+                  </a:txBody>
+                  <a:tcPr>
+                    <a:solidFill>
+                      <a:srgbClr val="F2F2F2"/>
+                    </a:solidFill>
+                  </a:tcPr>
+                </a:tc>
               </a:tr>
-              <a:tr h="457200">
-                <a:tc>
-                  <a:txBody>
-                    <a:bodyPr/>
-                    <a:lstStyle/>
-                    <a:p>
-                      <a:pPr algn="l"/>
-                      <a:r>
-                        <a:rPr sz="1000" b="0">
-                          <a:solidFill>
-                            <a:srgbClr val="1D1B43"/>
-                          </a:solidFill>
-                          <a:latin typeface="Calibri"/>
-                        </a:rPr>
-                        <a:t>RS</a:t>
+              <a:tr h="438912">
+                <a:tc>
+                  <a:txBody>
+                    <a:bodyPr/>
+                    <a:lstStyle/>
+                    <a:p>
+                      <a:pPr algn="l"/>
+                      <a:r>
+                        <a:rPr sz="1000" b="0">
+                          <a:solidFill>
+                            <a:srgbClr val="1D1B43"/>
+                          </a:solidFill>
+                          <a:latin typeface="Calibri"/>
+                        </a:rPr>
+                        <a:t>RJ</a:t>
                       </a:r>
                     </a:p>
                   </a:txBody>
@@ -6783,7 +6745,7 @@
                           </a:solidFill>
                           <a:latin typeface="Calibri"/>
                         </a:rPr>
-                        <a:t>4</a:t>
+                        <a:t>2</a:t>
                       </a:r>
                     </a:p>
                   </a:txBody>
@@ -6829,7 +6791,7 @@
                           </a:solidFill>
                           <a:latin typeface="Calibri"/>
                         </a:rPr>
-                        <a:t>2</a:t>
+                        <a:t>0</a:t>
                       </a:r>
                     </a:p>
                   </a:txBody>
@@ -6852,7 +6814,7 @@
                           </a:solidFill>
                           <a:latin typeface="Calibri"/>
                         </a:rPr>
-                        <a:t>50.0%</a:t>
+                        <a:t>100.0%</a:t>
                       </a:r>
                     </a:p>
                   </a:txBody>
@@ -6875,7 +6837,7 @@
                           </a:solidFill>
                           <a:latin typeface="Calibri"/>
                         </a:rPr>
-                        <a:t>Atencao</a:t>
+                        <a:t>Excelente</a:t>
                       </a:r>
                     </a:p>
                   </a:txBody>
@@ -6886,21 +6848,21 @@
                   </a:tcPr>
                 </a:tc>
               </a:tr>
-              <a:tr h="457200">
-                <a:tc>
-                  <a:txBody>
-                    <a:bodyPr/>
-                    <a:lstStyle/>
-                    <a:p>
-                      <a:pPr algn="l"/>
-                      <a:r>
-                        <a:rPr sz="1000" b="0">
-                          <a:solidFill>
-                            <a:srgbClr val="1D1B43"/>
-                          </a:solidFill>
-                          <a:latin typeface="Calibri"/>
-                        </a:rPr>
-                        <a:t>RJ</a:t>
+              <a:tr h="438912">
+                <a:tc>
+                  <a:txBody>
+                    <a:bodyPr/>
+                    <a:lstStyle/>
+                    <a:p>
+                      <a:pPr algn="l"/>
+                      <a:r>
+                        <a:rPr sz="1000" b="0">
+                          <a:solidFill>
+                            <a:srgbClr val="1D1B43"/>
+                          </a:solidFill>
+                          <a:latin typeface="Calibri"/>
+                        </a:rPr>
+                        <a:t>MS</a:t>
                       </a:r>
                     </a:p>
                   </a:txBody>
@@ -6923,7 +6885,7 @@
                           </a:solidFill>
                           <a:latin typeface="Calibri"/>
                         </a:rPr>
-                        <a:t>4</a:t>
+                        <a:t>1</a:t>
                       </a:r>
                     </a:p>
                   </a:txBody>
@@ -6946,7 +6908,7 @@
                           </a:solidFill>
                           <a:latin typeface="Calibri"/>
                         </a:rPr>
-                        <a:t>4</a:t>
+                        <a:t>1</a:t>
                       </a:r>
                     </a:p>
                   </a:txBody>
@@ -7026,21 +6988,21 @@
                   </a:tcPr>
                 </a:tc>
               </a:tr>
-              <a:tr h="457200">
-                <a:tc>
-                  <a:txBody>
-                    <a:bodyPr/>
-                    <a:lstStyle/>
-                    <a:p>
-                      <a:pPr algn="l"/>
-                      <a:r>
-                        <a:rPr sz="1000" b="0">
-                          <a:solidFill>
-                            <a:srgbClr val="1D1B43"/>
-                          </a:solidFill>
-                          <a:latin typeface="Calibri"/>
-                        </a:rPr>
-                        <a:t>SC</a:t>
+              <a:tr h="438912">
+                <a:tc>
+                  <a:txBody>
+                    <a:bodyPr/>
+                    <a:lstStyle/>
+                    <a:p>
+                      <a:pPr algn="l"/>
+                      <a:r>
+                        <a:rPr sz="1000" b="0">
+                          <a:solidFill>
+                            <a:srgbClr val="1D1B43"/>
+                          </a:solidFill>
+                          <a:latin typeface="Calibri"/>
+                        </a:rPr>
+                        <a:t>GO</a:t>
                       </a:r>
                     </a:p>
                   </a:txBody>
@@ -7063,7 +7025,7 @@
                           </a:solidFill>
                           <a:latin typeface="Calibri"/>
                         </a:rPr>
-                        <a:t>3</a:t>
+                        <a:t>1</a:t>
                       </a:r>
                     </a:p>
                   </a:txBody>
@@ -7086,7 +7048,7 @@
                           </a:solidFill>
                           <a:latin typeface="Calibri"/>
                         </a:rPr>
-                        <a:t>2</a:t>
+                        <a:t>1</a:t>
                       </a:r>
                     </a:p>
                   </a:txBody>
@@ -7109,7 +7071,7 @@
                           </a:solidFill>
                           <a:latin typeface="Calibri"/>
                         </a:rPr>
-                        <a:t>1</a:t>
+                        <a:t>0</a:t>
                       </a:r>
                     </a:p>
                   </a:txBody>
@@ -7132,7 +7094,7 @@
                           </a:solidFill>
                           <a:latin typeface="Calibri"/>
                         </a:rPr>
-                        <a:t>66.7%</a:t>
+                        <a:t>100.0%</a:t>
                       </a:r>
                     </a:p>
                   </a:txBody>
@@ -7155,153 +7117,13 @@
                           </a:solidFill>
                           <a:latin typeface="Calibri"/>
                         </a:rPr>
-                        <a:t>Atencao</a:t>
+                        <a:t>Excelente</a:t>
                       </a:r>
                     </a:p>
                   </a:txBody>
                   <a:tcPr>
                     <a:solidFill>
                       <a:srgbClr val="FFFFFF"/>
-                    </a:solidFill>
-                  </a:tcPr>
-                </a:tc>
-              </a:tr>
-              <a:tr h="457200">
-                <a:tc>
-                  <a:txBody>
-                    <a:bodyPr/>
-                    <a:lstStyle/>
-                    <a:p>
-                      <a:pPr algn="l"/>
-                      <a:r>
-                        <a:rPr sz="1000" b="0">
-                          <a:solidFill>
-                            <a:srgbClr val="1D1B43"/>
-                          </a:solidFill>
-                          <a:latin typeface="Calibri"/>
-                        </a:rPr>
-                        <a:t>GO</a:t>
-                      </a:r>
-                    </a:p>
-                  </a:txBody>
-                  <a:tcPr>
-                    <a:solidFill>
-                      <a:srgbClr val="F2F2F2"/>
-                    </a:solidFill>
-                  </a:tcPr>
-                </a:tc>
-                <a:tc>
-                  <a:txBody>
-                    <a:bodyPr/>
-                    <a:lstStyle/>
-                    <a:p>
-                      <a:pPr algn="l"/>
-                      <a:r>
-                        <a:rPr sz="1000" b="0">
-                          <a:solidFill>
-                            <a:srgbClr val="1D1B43"/>
-                          </a:solidFill>
-                          <a:latin typeface="Calibri"/>
-                        </a:rPr>
-                        <a:t>1</a:t>
-                      </a:r>
-                    </a:p>
-                  </a:txBody>
-                  <a:tcPr>
-                    <a:solidFill>
-                      <a:srgbClr val="F2F2F2"/>
-                    </a:solidFill>
-                  </a:tcPr>
-                </a:tc>
-                <a:tc>
-                  <a:txBody>
-                    <a:bodyPr/>
-                    <a:lstStyle/>
-                    <a:p>
-                      <a:pPr algn="l"/>
-                      <a:r>
-                        <a:rPr sz="1000" b="0">
-                          <a:solidFill>
-                            <a:srgbClr val="1D1B43"/>
-                          </a:solidFill>
-                          <a:latin typeface="Calibri"/>
-                        </a:rPr>
-                        <a:t>1</a:t>
-                      </a:r>
-                    </a:p>
-                  </a:txBody>
-                  <a:tcPr>
-                    <a:solidFill>
-                      <a:srgbClr val="F2F2F2"/>
-                    </a:solidFill>
-                  </a:tcPr>
-                </a:tc>
-                <a:tc>
-                  <a:txBody>
-                    <a:bodyPr/>
-                    <a:lstStyle/>
-                    <a:p>
-                      <a:pPr algn="l"/>
-                      <a:r>
-                        <a:rPr sz="1000" b="0">
-                          <a:solidFill>
-                            <a:srgbClr val="1D1B43"/>
-                          </a:solidFill>
-                          <a:latin typeface="Calibri"/>
-                        </a:rPr>
-                        <a:t>0</a:t>
-                      </a:r>
-                    </a:p>
-                  </a:txBody>
-                  <a:tcPr>
-                    <a:solidFill>
-                      <a:srgbClr val="F2F2F2"/>
-                    </a:solidFill>
-                  </a:tcPr>
-                </a:tc>
-                <a:tc>
-                  <a:txBody>
-                    <a:bodyPr/>
-                    <a:lstStyle/>
-                    <a:p>
-                      <a:pPr algn="l"/>
-                      <a:r>
-                        <a:rPr sz="1000" b="0">
-                          <a:solidFill>
-                            <a:srgbClr val="1D1B43"/>
-                          </a:solidFill>
-                          <a:latin typeface="Calibri"/>
-                        </a:rPr>
-                        <a:t>100.0%</a:t>
-                      </a:r>
-                    </a:p>
-                  </a:txBody>
-                  <a:tcPr>
-                    <a:solidFill>
-                      <a:srgbClr val="F2F2F2"/>
-                    </a:solidFill>
-                  </a:tcPr>
-                </a:tc>
-                <a:tc>
-                  <a:txBody>
-                    <a:bodyPr/>
-                    <a:lstStyle/>
-                    <a:p>
-                      <a:pPr algn="l"/>
-                      <a:r>
-                        <a:rPr sz="1000" b="0">
-                          <a:solidFill>
-                            <a:srgbClr val="1D1B43"/>
-                          </a:solidFill>
-                          <a:latin typeface="Calibri"/>
-                        </a:rPr>
-                        <a:t>Excelente</a:t>
-                      </a:r>
-                    </a:p>
-                  </a:txBody>
-                  <a:tcPr>
-                    <a:solidFill>
-                      <a:srgbClr val="F2F2F2"/>
                     </a:solidFill>
                   </a:tcPr>
                 </a:tc>
@@ -7390,7 +7212,7 @@
                 </a:solidFill>
                 <a:latin typeface="Calibri"/>
               </a:rPr>
-              <a:t>TOP DESTINATARIOS (25 pontos)</a:t>
+              <a:t>TOP DESTINATARIOS (24 pontos)</a:t>
             </a:r>
           </a:p>
         </p:txBody>
@@ -7665,7 +7487,7 @@
                           </a:solidFill>
                           <a:latin typeface="Calibri"/>
                         </a:rPr>
-                        <a:t>SIMOLDES ACOS BRASIL - SAO JOSE DOS PINHAIS / PR</a:t>
+                        <a:t>ACQUA SOLAR COMERCIO - NAVEGANTES / SC</a:t>
                       </a:r>
                     </a:p>
                   </a:txBody>
@@ -7688,7 +7510,7 @@
                           </a:solidFill>
                           <a:latin typeface="Calibri"/>
                         </a:rPr>
-                        <a:t>2</a:t>
+                        <a:t>1</a:t>
                       </a:r>
                     </a:p>
                   </a:txBody>
@@ -7711,6 +7533,29 @@
                           </a:solidFill>
                           <a:latin typeface="Calibri"/>
                         </a:rPr>
+                        <a:t>1</a:t>
+                      </a:r>
+                    </a:p>
+                  </a:txBody>
+                  <a:tcPr>
+                    <a:solidFill>
+                      <a:srgbClr val="FFFFFF"/>
+                    </a:solidFill>
+                  </a:tcPr>
+                </a:tc>
+                <a:tc>
+                  <a:txBody>
+                    <a:bodyPr/>
+                    <a:lstStyle/>
+                    <a:p>
+                      <a:pPr algn="l"/>
+                      <a:r>
+                        <a:rPr sz="1000" b="0">
+                          <a:solidFill>
+                            <a:srgbClr val="1D1B43"/>
+                          </a:solidFill>
+                          <a:latin typeface="Calibri"/>
+                        </a:rPr>
                         <a:t>0</a:t>
                       </a:r>
                     </a:p>
@@ -7734,7 +7579,7 @@
                           </a:solidFill>
                           <a:latin typeface="Calibri"/>
                         </a:rPr>
-                        <a:t>2</a:t>
+                        <a:t>100.0%</a:t>
                       </a:r>
                     </a:p>
                   </a:txBody>
@@ -7757,30 +7602,7 @@
                           </a:solidFill>
                           <a:latin typeface="Calibri"/>
                         </a:rPr>
-                        <a:t>0.0%</a:t>
-                      </a:r>
-                    </a:p>
-                  </a:txBody>
-                  <a:tcPr>
-                    <a:solidFill>
-                      <a:srgbClr val="FFFFFF"/>
-                    </a:solidFill>
-                  </a:tcPr>
-                </a:tc>
-                <a:tc>
-                  <a:txBody>
-                    <a:bodyPr/>
-                    <a:lstStyle/>
-                    <a:p>
-                      <a:pPr algn="l"/>
-                      <a:r>
-                        <a:rPr sz="1000" b="0">
-                          <a:solidFill>
-                            <a:srgbClr val="1D1B43"/>
-                          </a:solidFill>
-                          <a:latin typeface="Calibri"/>
-                        </a:rPr>
-                        <a:t>Atencao</a:t>
+                        <a:t>Excelente</a:t>
                       </a:r>
                     </a:p>
                   </a:txBody>
@@ -7828,7 +7650,7 @@
                           </a:solidFill>
                           <a:latin typeface="Calibri"/>
                         </a:rPr>
-                        <a:t>BRASIL SUL DISTRIBUI - CASCAVEL / PR</a:t>
+                        <a:t>ANTONIO ALVES DA SIL - UBERLANDIA / MG</a:t>
                       </a:r>
                     </a:p>
                   </a:txBody>
@@ -7991,7 +7813,7 @@
                           </a:solidFill>
                           <a:latin typeface="Calibri"/>
                         </a:rPr>
-                        <a:t>CAETANO PILOTTO DIEH - ERECHIM / RS</a:t>
+                        <a:t>CENERGY SOLAR TECNOL - SAO PAULO / SP</a:t>
                       </a:r>
                     </a:p>
                   </a:txBody>
@@ -8154,7 +7976,7 @@
                           </a:solidFill>
                           <a:latin typeface="Calibri"/>
                         </a:rPr>
-                        <a:t>CORSOLAR CORDEIRO CA - SAO PAULO / SP</a:t>
+                        <a:t>CHRIS MICHAEL PETRON - FLORIANOPOLIS / SC</a:t>
                       </a:r>
                     </a:p>
                   </a:txBody>
@@ -8317,7 +8139,7 @@
                           </a:solidFill>
                           <a:latin typeface="Calibri"/>
                         </a:rPr>
-                        <a:t>CRISTA MARIA PROCHNO - CAMPINAS / SP</a:t>
+                        <a:t>CORSOLAR CORDEIRO CA - SAO PAULO / SP</a:t>
                       </a:r>
                     </a:p>
                   </a:txBody>
@@ -8480,7 +8302,7 @@
                           </a:solidFill>
                           <a:latin typeface="Calibri"/>
                         </a:rPr>
-                        <a:t>DARLAN SCHLICKMANN - FLORIANOPOLIS / SC</a:t>
+                        <a:t>CUESTA SOLAR ENERGIA - BOTUCATU / SP</a:t>
                       </a:r>
                     </a:p>
                   </a:txBody>
@@ -8643,7 +8465,7 @@
                           </a:solidFill>
                           <a:latin typeface="Calibri"/>
                         </a:rPr>
-                        <a:t>DEUSDELIO GONCALVES - CORDEIRO / RJ</a:t>
+                        <a:t>ERICLEIA APARECIDA D - SANTA FE DO SUL / SP</a:t>
                       </a:r>
                     </a:p>
                   </a:txBody>
@@ -8806,7 +8628,7 @@
                           </a:solidFill>
                           <a:latin typeface="Calibri"/>
                         </a:rPr>
-                        <a:t>EDER TEIXEIRA - PEROLA / PR</a:t>
+                        <a:t>FABIANO OTONE BOCCHI - ERECHIM / RS</a:t>
                       </a:r>
                     </a:p>
                   </a:txBody>
@@ -8969,7 +8791,7 @@
                           </a:solidFill>
                           <a:latin typeface="Calibri"/>
                         </a:rPr>
-                        <a:t>ANTONIO CARLOS LEAL - PORTO FERREIRA / SP</a:t>
+                        <a:t>FABIO MATIAS DOS SAN - BADY BASSITT / SP</a:t>
                       </a:r>
                     </a:p>
                   </a:txBody>
@@ -9132,7 +8954,7 @@
                           </a:solidFill>
                           <a:latin typeface="Calibri"/>
                         </a:rPr>
-                        <a:t>EVERALDO SANTANA - SAPIRANGA / RS</a:t>
+                        <a:t>GUILHERME GRIMALDI - JUNDIAI / SP</a:t>
                       </a:r>
                     </a:p>
                   </a:txBody>
@@ -9295,7 +9117,7 @@
                           </a:solidFill>
                           <a:latin typeface="Calibri"/>
                         </a:rPr>
-                        <a:t>FELIPE LEITHARDT FAG - PASSO FUNDO / RS</a:t>
+                        <a:t>JORGE ANDRE LOURENCO - CIANORTE / PR</a:t>
                       </a:r>
                     </a:p>
                   </a:txBody>
@@ -9458,7 +9280,7 @@
                           </a:solidFill>
                           <a:latin typeface="Calibri"/>
                         </a:rPr>
-                        <a:t>GUILHERME MAIONI PAN - GUARULHOS / SP</a:t>
+                        <a:t>LUANA FERREIRA VAZ - MUNDO NOVO / GO</a:t>
                       </a:r>
                     </a:p>
                   </a:txBody>
@@ -9621,7 +9443,7 @@
                           </a:solidFill>
                           <a:latin typeface="Calibri"/>
                         </a:rPr>
-                        <a:t>GREENCITY ADMINISTRA - MARINGA / PR</a:t>
+                        <a:t>MACDOVEL PASSOS DA S - DUQUE DE CAXIAS / RJ</a:t>
                       </a:r>
                     </a:p>
                   </a:txBody>
@@ -9784,7 +9606,7 @@
                           </a:solidFill>
                           <a:latin typeface="Calibri"/>
                         </a:rPr>
-                        <a:t>JOAO MARQUES RODRIGU - GUAIRA / SP</a:t>
+                        <a:t>MATHEUS DA SILVA VEL - NAVIRAI / MS</a:t>
                       </a:r>
                     </a:p>
                   </a:txBody>

--- a/ACQUA_SOLAR_COMERCIO_DE_EQUIPA.pptx
+++ b/ACQUA_SOLAR_COMERCIO_DE_EQUIPA.pptx
@@ -143,10 +143,13 @@
           </c:spPr>
           <c:cat>
             <c:strRef>
-              <c:f>Sheet1!$A$2:$A$2</c:f>
+              <c:f>Sheet1!$A$2:$A$3</c:f>
               <c:strCache>
-                <c:ptCount val="1"/>
+                <c:ptCount val="2"/>
                 <c:pt idx="0">
+                  <c:v>Maio 2026</c:v>
+                </c:pt>
+                <c:pt idx="1">
                   <c:v>Abril 2026</c:v>
                 </c:pt>
               </c:strCache>
@@ -154,11 +157,14 @@
           </c:cat>
           <c:val>
             <c:numRef>
-              <c:f>Sheet1!$B$2:$B$2</c:f>
+              <c:f>Sheet1!$B$2:$B$3</c:f>
               <c:numCache>
                 <c:formatCode>General</c:formatCode>
-                <c:ptCount val="1"/>
+                <c:ptCount val="2"/>
                 <c:pt idx="0">
+                  <c:v>20</c:v>
+                </c:pt>
+                <c:pt idx="1">
                   <c:v>22</c:v>
                 </c:pt>
               </c:numCache>
@@ -186,10 +192,13 @@
           </c:spPr>
           <c:cat>
             <c:strRef>
-              <c:f>Sheet1!$A$2:$A$2</c:f>
+              <c:f>Sheet1!$A$2:$A$3</c:f>
               <c:strCache>
-                <c:ptCount val="1"/>
+                <c:ptCount val="2"/>
                 <c:pt idx="0">
+                  <c:v>Maio 2026</c:v>
+                </c:pt>
+                <c:pt idx="1">
                   <c:v>Abril 2026</c:v>
                 </c:pt>
               </c:strCache>
@@ -197,11 +206,14 @@
           </c:cat>
           <c:val>
             <c:numRef>
-              <c:f>Sheet1!$C$2:$C$2</c:f>
+              <c:f>Sheet1!$C$2:$C$3</c:f>
               <c:numCache>
                 <c:formatCode>General</c:formatCode>
-                <c:ptCount val="1"/>
+                <c:ptCount val="2"/>
                 <c:pt idx="0">
+                  <c:v>6</c:v>
+                </c:pt>
+                <c:pt idx="1">
                   <c:v>2</c:v>
                 </c:pt>
               </c:numCache>
@@ -4142,7 +4154,7 @@
                           </a:solidFill>
                           <a:latin typeface="Calibri"/>
                         </a:rPr>
-                        <a:t>Marco 2026</a:t>
+                        <a:t>Maio 2026</a:t>
                       </a:r>
                     </a:p>
                   </a:txBody>
@@ -4236,7 +4248,7 @@
                           </a:solidFill>
                           <a:latin typeface="Calibri"/>
                         </a:rPr>
-                        <a:t>-</a:t>
+                        <a:t>26</a:t>
                       </a:r>
                     </a:p>
                   </a:txBody>
@@ -4282,7 +4294,7 @@
                           </a:solidFill>
                           <a:latin typeface="Calibri"/>
                         </a:rPr>
-                        <a:t>-</a:t>
+                        <a:t>- 2</a:t>
                       </a:r>
                     </a:p>
                   </a:txBody>
@@ -4330,7 +4342,7 @@
                           </a:solidFill>
                           <a:latin typeface="Calibri"/>
                         </a:rPr>
-                        <a:t>-</a:t>
+                        <a:t>20</a:t>
                       </a:r>
                     </a:p>
                   </a:txBody>
@@ -4376,7 +4388,7 @@
                           </a:solidFill>
                           <a:latin typeface="Calibri"/>
                         </a:rPr>
-                        <a:t>-</a:t>
+                        <a:t>+ 2</a:t>
                       </a:r>
                     </a:p>
                   </a:txBody>
@@ -4424,7 +4436,7 @@
                           </a:solidFill>
                           <a:latin typeface="Calibri"/>
                         </a:rPr>
-                        <a:t>-</a:t>
+                        <a:t>6</a:t>
                       </a:r>
                     </a:p>
                   </a:txBody>
@@ -4470,7 +4482,7 @@
                           </a:solidFill>
                           <a:latin typeface="Calibri"/>
                         </a:rPr>
-                        <a:t>-</a:t>
+                        <a:t>- 4</a:t>
                       </a:r>
                     </a:p>
                   </a:txBody>
@@ -4518,7 +4530,7 @@
                           </a:solidFill>
                           <a:latin typeface="Calibri"/>
                         </a:rPr>
-                        <a:t>-</a:t>
+                        <a:t>76.9%</a:t>
                       </a:r>
                     </a:p>
                   </a:txBody>
@@ -4564,7 +4576,7 @@
                           </a:solidFill>
                           <a:latin typeface="Calibri"/>
                         </a:rPr>
-                        <a:t>-</a:t>
+                        <a:t>+ 14.8pp</a:t>
                       </a:r>
                     </a:p>
                   </a:txBody>
@@ -4735,7 +4747,7 @@
         </p:nvGraphicFramePr>
         <p:xfrm>
           <a:off x="7955279" y="2286000"/>
-          <a:ext cx="4480560" cy="877824"/>
+          <a:ext cx="4480560" cy="1316736"/>
         </p:xfrm>
         <a:graphic>
           <a:graphicData uri="http://schemas.openxmlformats.org/drawingml/2006/table">
@@ -4881,13 +4893,130 @@
                           </a:solidFill>
                           <a:latin typeface="Calibri"/>
                         </a:rPr>
+                        <a:t>Maio 2026</a:t>
+                      </a:r>
+                    </a:p>
+                  </a:txBody>
+                  <a:tcPr>
+                    <a:solidFill>
+                      <a:srgbClr val="FFFFFF"/>
+                    </a:solidFill>
+                  </a:tcPr>
+                </a:tc>
+                <a:tc>
+                  <a:txBody>
+                    <a:bodyPr/>
+                    <a:lstStyle/>
+                    <a:p>
+                      <a:pPr algn="l"/>
+                      <a:r>
+                        <a:rPr sz="1000" b="0">
+                          <a:solidFill>
+                            <a:srgbClr val="1D1B43"/>
+                          </a:solidFill>
+                          <a:latin typeface="Calibri"/>
+                        </a:rPr>
+                        <a:t>26</a:t>
+                      </a:r>
+                    </a:p>
+                  </a:txBody>
+                  <a:tcPr>
+                    <a:solidFill>
+                      <a:srgbClr val="FFFFFF"/>
+                    </a:solidFill>
+                  </a:tcPr>
+                </a:tc>
+                <a:tc>
+                  <a:txBody>
+                    <a:bodyPr/>
+                    <a:lstStyle/>
+                    <a:p>
+                      <a:pPr algn="l"/>
+                      <a:r>
+                        <a:rPr sz="1000" b="0">
+                          <a:solidFill>
+                            <a:srgbClr val="1D1B43"/>
+                          </a:solidFill>
+                          <a:latin typeface="Calibri"/>
+                        </a:rPr>
+                        <a:t>20</a:t>
+                      </a:r>
+                    </a:p>
+                  </a:txBody>
+                  <a:tcPr>
+                    <a:solidFill>
+                      <a:srgbClr val="FFFFFF"/>
+                    </a:solidFill>
+                  </a:tcPr>
+                </a:tc>
+                <a:tc>
+                  <a:txBody>
+                    <a:bodyPr/>
+                    <a:lstStyle/>
+                    <a:p>
+                      <a:pPr algn="l"/>
+                      <a:r>
+                        <a:rPr sz="1000" b="0">
+                          <a:solidFill>
+                            <a:srgbClr val="1D1B43"/>
+                          </a:solidFill>
+                          <a:latin typeface="Calibri"/>
+                        </a:rPr>
+                        <a:t>6</a:t>
+                      </a:r>
+                    </a:p>
+                  </a:txBody>
+                  <a:tcPr>
+                    <a:solidFill>
+                      <a:srgbClr val="FFFFFF"/>
+                    </a:solidFill>
+                  </a:tcPr>
+                </a:tc>
+                <a:tc>
+                  <a:txBody>
+                    <a:bodyPr/>
+                    <a:lstStyle/>
+                    <a:p>
+                      <a:pPr algn="l"/>
+                      <a:r>
+                        <a:rPr sz="1000" b="0">
+                          <a:solidFill>
+                            <a:srgbClr val="1D1B43"/>
+                          </a:solidFill>
+                          <a:latin typeface="Calibri"/>
+                        </a:rPr>
+                        <a:t>76.9%</a:t>
+                      </a:r>
+                    </a:p>
+                  </a:txBody>
+                  <a:tcPr>
+                    <a:solidFill>
+                      <a:srgbClr val="FFFFFF"/>
+                    </a:solidFill>
+                  </a:tcPr>
+                </a:tc>
+              </a:tr>
+              <a:tr h="438912">
+                <a:tc>
+                  <a:txBody>
+                    <a:bodyPr/>
+                    <a:lstStyle/>
+                    <a:p>
+                      <a:pPr algn="l"/>
+                      <a:r>
+                        <a:rPr sz="1000" b="0">
+                          <a:solidFill>
+                            <a:srgbClr val="1D1B43"/>
+                          </a:solidFill>
+                          <a:latin typeface="Calibri"/>
+                        </a:rPr>
                         <a:t>Abril 2026</a:t>
                       </a:r>
                     </a:p>
                   </a:txBody>
                   <a:tcPr>
                     <a:solidFill>
-                      <a:srgbClr val="FFFFFF"/>
+                      <a:srgbClr val="F2F2F2"/>
                     </a:solidFill>
                   </a:tcPr>
                 </a:tc>
@@ -4910,7 +5039,7 @@
                   </a:txBody>
                   <a:tcPr>
                     <a:solidFill>
-                      <a:srgbClr val="FFFFFF"/>
+                      <a:srgbClr val="F2F2F2"/>
                     </a:solidFill>
                   </a:tcPr>
                 </a:tc>
@@ -4933,7 +5062,7 @@
                   </a:txBody>
                   <a:tcPr>
                     <a:solidFill>
-                      <a:srgbClr val="FFFFFF"/>
+                      <a:srgbClr val="F2F2F2"/>
                     </a:solidFill>
                   </a:tcPr>
                 </a:tc>
@@ -4956,7 +5085,7 @@
                   </a:txBody>
                   <a:tcPr>
                     <a:solidFill>
-                      <a:srgbClr val="FFFFFF"/>
+                      <a:srgbClr val="F2F2F2"/>
                     </a:solidFill>
                   </a:tcPr>
                 </a:tc>
@@ -4979,7 +5108,7 @@
                   </a:txBody>
                   <a:tcPr>
                     <a:solidFill>
-                      <a:srgbClr val="FFFFFF"/>
+                      <a:srgbClr val="F2F2F2"/>
                     </a:solidFill>
                   </a:tcPr>
                 </a:tc>

--- a/ACQUA_SOLAR_COMERCIO_DE_EQUIPA.pptx
+++ b/ACQUA_SOLAR_COMERCIO_DE_EQUIPA.pptx
@@ -162,7 +162,7 @@
                 <c:formatCode>General</c:formatCode>
                 <c:ptCount val="2"/>
                 <c:pt idx="0">
-                  <c:v>20</c:v>
+                  <c:v>30</c:v>
                 </c:pt>
                 <c:pt idx="1">
                   <c:v>22</c:v>
@@ -211,7 +211,7 @@
                 <c:formatCode>General</c:formatCode>
                 <c:ptCount val="2"/>
                 <c:pt idx="0">
-                  <c:v>6</c:v>
+                  <c:v>5</c:v>
                 </c:pt>
                 <c:pt idx="1">
                   <c:v>2</c:v>
@@ -4248,7 +4248,7 @@
                           </a:solidFill>
                           <a:latin typeface="Calibri"/>
                         </a:rPr>
-                        <a:t>26</a:t>
+                        <a:t>35</a:t>
                       </a:r>
                     </a:p>
                   </a:txBody>
@@ -4294,7 +4294,7 @@
                           </a:solidFill>
                           <a:latin typeface="Calibri"/>
                         </a:rPr>
-                        <a:t>- 2</a:t>
+                        <a:t>- 11</a:t>
                       </a:r>
                     </a:p>
                   </a:txBody>
@@ -4342,7 +4342,7 @@
                           </a:solidFill>
                           <a:latin typeface="Calibri"/>
                         </a:rPr>
-                        <a:t>20</a:t>
+                        <a:t>30</a:t>
                       </a:r>
                     </a:p>
                   </a:txBody>
@@ -4388,7 +4388,7 @@
                           </a:solidFill>
                           <a:latin typeface="Calibri"/>
                         </a:rPr>
-                        <a:t>+ 2</a:t>
+                        <a:t>- 8</a:t>
                       </a:r>
                     </a:p>
                   </a:txBody>
@@ -4436,7 +4436,7 @@
                           </a:solidFill>
                           <a:latin typeface="Calibri"/>
                         </a:rPr>
-                        <a:t>6</a:t>
+                        <a:t>5</a:t>
                       </a:r>
                     </a:p>
                   </a:txBody>
@@ -4482,7 +4482,7 @@
                           </a:solidFill>
                           <a:latin typeface="Calibri"/>
                         </a:rPr>
-                        <a:t>- 4</a:t>
+                        <a:t>- 3</a:t>
                       </a:r>
                     </a:p>
                   </a:txBody>
@@ -4530,7 +4530,7 @@
                           </a:solidFill>
                           <a:latin typeface="Calibri"/>
                         </a:rPr>
-                        <a:t>76.9%</a:t>
+                        <a:t>85.7%</a:t>
                       </a:r>
                     </a:p>
                   </a:txBody>
@@ -4576,7 +4576,7 @@
                           </a:solidFill>
                           <a:latin typeface="Calibri"/>
                         </a:rPr>
-                        <a:t>+ 14.8pp</a:t>
+                        <a:t>+ 6.0pp</a:t>
                       </a:r>
                     </a:p>
                   </a:txBody>
@@ -4916,7 +4916,7 @@
                           </a:solidFill>
                           <a:latin typeface="Calibri"/>
                         </a:rPr>
-                        <a:t>26</a:t>
+                        <a:t>35</a:t>
                       </a:r>
                     </a:p>
                   </a:txBody>
@@ -4939,7 +4939,7 @@
                           </a:solidFill>
                           <a:latin typeface="Calibri"/>
                         </a:rPr>
-                        <a:t>20</a:t>
+                        <a:t>30</a:t>
                       </a:r>
                     </a:p>
                   </a:txBody>
@@ -4962,7 +4962,7 @@
                           </a:solidFill>
                           <a:latin typeface="Calibri"/>
                         </a:rPr>
-                        <a:t>6</a:t>
+                        <a:t>5</a:t>
                       </a:r>
                     </a:p>
                   </a:txBody>
@@ -4985,7 +4985,7 @@
                           </a:solidFill>
                           <a:latin typeface="Calibri"/>
                         </a:rPr>
-                        <a:t>76.9%</a:t>
+                        <a:t>85.7%</a:t>
                       </a:r>
                     </a:p>
                   </a:txBody>

--- a/ACQUA_SOLAR_COMERCIO_DE_EQUIPA.pptx
+++ b/ACQUA_SOLAR_COMERCIO_DE_EQUIPA.pptx
@@ -147,10 +147,10 @@
               <c:strCache>
                 <c:ptCount val="2"/>
                 <c:pt idx="0">
-                  <c:v>Maio 2026</c:v>
+                  <c:v>Abril 2026</c:v>
                 </c:pt>
                 <c:pt idx="1">
-                  <c:v>Abril 2026</c:v>
+                  <c:v>Maio 2026</c:v>
                 </c:pt>
               </c:strCache>
             </c:strRef>
@@ -162,10 +162,10 @@
                 <c:formatCode>General</c:formatCode>
                 <c:ptCount val="2"/>
                 <c:pt idx="0">
-                  <c:v>30</c:v>
+                  <c:v>22</c:v>
                 </c:pt>
                 <c:pt idx="1">
-                  <c:v>22</c:v>
+                  <c:v>35</c:v>
                 </c:pt>
               </c:numCache>
             </c:numRef>
@@ -196,10 +196,10 @@
               <c:strCache>
                 <c:ptCount val="2"/>
                 <c:pt idx="0">
-                  <c:v>Maio 2026</c:v>
+                  <c:v>Abril 2026</c:v>
                 </c:pt>
                 <c:pt idx="1">
-                  <c:v>Abril 2026</c:v>
+                  <c:v>Maio 2026</c:v>
                 </c:pt>
               </c:strCache>
             </c:strRef>
@@ -211,10 +211,10 @@
                 <c:formatCode>General</c:formatCode>
                 <c:ptCount val="2"/>
                 <c:pt idx="0">
-                  <c:v>5</c:v>
+                  <c:v>2</c:v>
                 </c:pt>
                 <c:pt idx="1">
-                  <c:v>2</c:v>
+                  <c:v>4</c:v>
                 </c:pt>
               </c:numCache>
             </c:numRef>
@@ -3387,7 +3387,7 @@
                 </a:solidFill>
                 <a:latin typeface="Calibri"/>
               </a:rPr>
-              <a:t>INDICADORES ABRIL 2026</a:t>
+              <a:t>INDICADORES MAIO 2026</a:t>
             </a:r>
           </a:p>
         </p:txBody>
@@ -3708,7 +3708,7 @@
                 </a:solidFill>
                 <a:latin typeface="Calibri"/>
               </a:rPr>
-              <a:t>24</a:t>
+              <a:t>39</a:t>
             </a:r>
           </a:p>
         </p:txBody>
@@ -3823,7 +3823,7 @@
                 </a:solidFill>
                 <a:latin typeface="Calibri"/>
               </a:rPr>
-              <a:t>22</a:t>
+              <a:t>35</a:t>
             </a:r>
           </a:p>
         </p:txBody>
@@ -3938,7 +3938,7 @@
                 </a:solidFill>
                 <a:latin typeface="Calibri"/>
               </a:rPr>
-              <a:t>2</a:t>
+              <a:t>4</a:t>
             </a:r>
           </a:p>
         </p:txBody>
@@ -4053,7 +4053,7 @@
                 </a:solidFill>
                 <a:latin typeface="Calibri"/>
               </a:rPr>
-              <a:t>91.7%</a:t>
+              <a:t>89.7%</a:t>
             </a:r>
           </a:p>
         </p:txBody>
@@ -4154,30 +4154,30 @@
                           </a:solidFill>
                           <a:latin typeface="Calibri"/>
                         </a:rPr>
+                        <a:t>Abril 2026</a:t>
+                      </a:r>
+                    </a:p>
+                  </a:txBody>
+                  <a:tcPr>
+                    <a:solidFill>
+                      <a:srgbClr val="1D1B43"/>
+                    </a:solidFill>
+                  </a:tcPr>
+                </a:tc>
+                <a:tc>
+                  <a:txBody>
+                    <a:bodyPr/>
+                    <a:lstStyle/>
+                    <a:p>
+                      <a:pPr algn="ctr"/>
+                      <a:r>
+                        <a:rPr sz="1100" b="1">
+                          <a:solidFill>
+                            <a:srgbClr val="FFFFFF"/>
+                          </a:solidFill>
+                          <a:latin typeface="Calibri"/>
+                        </a:rPr>
                         <a:t>Maio 2026</a:t>
-                      </a:r>
-                    </a:p>
-                  </a:txBody>
-                  <a:tcPr>
-                    <a:solidFill>
-                      <a:srgbClr val="1D1B43"/>
-                    </a:solidFill>
-                  </a:tcPr>
-                </a:tc>
-                <a:tc>
-                  <a:txBody>
-                    <a:bodyPr/>
-                    <a:lstStyle/>
-                    <a:p>
-                      <a:pPr algn="ctr"/>
-                      <a:r>
-                        <a:rPr sz="1100" b="1">
-                          <a:solidFill>
-                            <a:srgbClr val="FFFFFF"/>
-                          </a:solidFill>
-                          <a:latin typeface="Calibri"/>
-                        </a:rPr>
-                        <a:t>Abril 2026</a:t>
                       </a:r>
                     </a:p>
                   </a:txBody>
@@ -4248,7 +4248,7 @@
                           </a:solidFill>
                           <a:latin typeface="Calibri"/>
                         </a:rPr>
-                        <a:t>35</a:t>
+                        <a:t>24</a:t>
                       </a:r>
                     </a:p>
                   </a:txBody>
@@ -4271,7 +4271,7 @@
                           </a:solidFill>
                           <a:latin typeface="Calibri"/>
                         </a:rPr>
-                        <a:t>24</a:t>
+                        <a:t>39</a:t>
                       </a:r>
                     </a:p>
                   </a:txBody>
@@ -4294,7 +4294,7 @@
                           </a:solidFill>
                           <a:latin typeface="Calibri"/>
                         </a:rPr>
-                        <a:t>- 11</a:t>
+                        <a:t>+ 15</a:t>
                       </a:r>
                     </a:p>
                   </a:txBody>
@@ -4342,7 +4342,7 @@
                           </a:solidFill>
                           <a:latin typeface="Calibri"/>
                         </a:rPr>
-                        <a:t>30</a:t>
+                        <a:t>22</a:t>
                       </a:r>
                     </a:p>
                   </a:txBody>
@@ -4365,7 +4365,7 @@
                           </a:solidFill>
                           <a:latin typeface="Calibri"/>
                         </a:rPr>
-                        <a:t>22</a:t>
+                        <a:t>35</a:t>
                       </a:r>
                     </a:p>
                   </a:txBody>
@@ -4388,7 +4388,7 @@
                           </a:solidFill>
                           <a:latin typeface="Calibri"/>
                         </a:rPr>
-                        <a:t>- 8</a:t>
+                        <a:t>+ 13</a:t>
                       </a:r>
                     </a:p>
                   </a:txBody>
@@ -4436,7 +4436,7 @@
                           </a:solidFill>
                           <a:latin typeface="Calibri"/>
                         </a:rPr>
-                        <a:t>5</a:t>
+                        <a:t>2</a:t>
                       </a:r>
                     </a:p>
                   </a:txBody>
@@ -4459,7 +4459,7 @@
                           </a:solidFill>
                           <a:latin typeface="Calibri"/>
                         </a:rPr>
-                        <a:t>2</a:t>
+                        <a:t>4</a:t>
                       </a:r>
                     </a:p>
                   </a:txBody>
@@ -4482,7 +4482,7 @@
                           </a:solidFill>
                           <a:latin typeface="Calibri"/>
                         </a:rPr>
-                        <a:t>- 3</a:t>
+                        <a:t>+ 2</a:t>
                       </a:r>
                     </a:p>
                   </a:txBody>
@@ -4530,7 +4530,7 @@
                           </a:solidFill>
                           <a:latin typeface="Calibri"/>
                         </a:rPr>
-                        <a:t>85.7%</a:t>
+                        <a:t>91.7%</a:t>
                       </a:r>
                     </a:p>
                   </a:txBody>
@@ -4553,7 +4553,7 @@
                           </a:solidFill>
                           <a:latin typeface="Calibri"/>
                         </a:rPr>
-                        <a:t>91.7%</a:t>
+                        <a:t>89.7%</a:t>
                       </a:r>
                     </a:p>
                   </a:txBody>
@@ -4576,7 +4576,7 @@
                           </a:solidFill>
                           <a:latin typeface="Calibri"/>
                         </a:rPr>
-                        <a:t>+ 6.0pp</a:t>
+                        <a:t>- 2.0pp</a:t>
                       </a:r>
                     </a:p>
                   </a:txBody>
@@ -4893,7 +4893,7 @@
                           </a:solidFill>
                           <a:latin typeface="Calibri"/>
                         </a:rPr>
-                        <a:t>Maio 2026</a:t>
+                        <a:t>Abril 2026</a:t>
                       </a:r>
                     </a:p>
                   </a:txBody>
@@ -4916,7 +4916,7 @@
                           </a:solidFill>
                           <a:latin typeface="Calibri"/>
                         </a:rPr>
-                        <a:t>35</a:t>
+                        <a:t>24</a:t>
                       </a:r>
                     </a:p>
                   </a:txBody>
@@ -4939,7 +4939,7 @@
                           </a:solidFill>
                           <a:latin typeface="Calibri"/>
                         </a:rPr>
-                        <a:t>30</a:t>
+                        <a:t>22</a:t>
                       </a:r>
                     </a:p>
                   </a:txBody>
@@ -4962,7 +4962,7 @@
                           </a:solidFill>
                           <a:latin typeface="Calibri"/>
                         </a:rPr>
-                        <a:t>5</a:t>
+                        <a:t>2</a:t>
                       </a:r>
                     </a:p>
                   </a:txBody>
@@ -4985,7 +4985,7 @@
                           </a:solidFill>
                           <a:latin typeface="Calibri"/>
                         </a:rPr>
-                        <a:t>85.7%</a:t>
+                        <a:t>91.7%</a:t>
                       </a:r>
                     </a:p>
                   </a:txBody>
@@ -5010,7 +5010,7 @@
                           </a:solidFill>
                           <a:latin typeface="Calibri"/>
                         </a:rPr>
-                        <a:t>Abril 2026</a:t>
+                        <a:t>Maio 2026</a:t>
                       </a:r>
                     </a:p>
                   </a:txBody>
@@ -5033,7 +5033,7 @@
                           </a:solidFill>
                           <a:latin typeface="Calibri"/>
                         </a:rPr>
-                        <a:t>24</a:t>
+                        <a:t>39</a:t>
                       </a:r>
                     </a:p>
                   </a:txBody>
@@ -5056,7 +5056,7 @@
                           </a:solidFill>
                           <a:latin typeface="Calibri"/>
                         </a:rPr>
-                        <a:t>22</a:t>
+                        <a:t>35</a:t>
                       </a:r>
                     </a:p>
                   </a:txBody>
@@ -5079,7 +5079,7 @@
                           </a:solidFill>
                           <a:latin typeface="Calibri"/>
                         </a:rPr>
-                        <a:t>2</a:t>
+                        <a:t>4</a:t>
                       </a:r>
                     </a:p>
                   </a:txBody>
@@ -5102,7 +5102,7 @@
                           </a:solidFill>
                           <a:latin typeface="Calibri"/>
                         </a:rPr>
-                        <a:t>91.7%</a:t>
+                        <a:t>89.7%</a:t>
                       </a:r>
                     </a:p>
                   </a:txBody>
@@ -5190,7 +5190,7 @@
                 </a:solidFill>
                 <a:latin typeface="Calibri"/>
               </a:rPr>
-              <a:t>PERFORMANCE: 91.7% - REGULAR</a:t>
+              <a:t>PERFORMANCE: 89.7% - REGULAR</a:t>
             </a:r>
           </a:p>
         </p:txBody>
@@ -5275,7 +5275,7 @@
                 </a:solidFill>
                 <a:latin typeface="Calibri"/>
               </a:rPr>
-              <a:t>OCORRENCIAS FORA DO PRAZO (2)</a:t>
+              <a:t>OCORRENCIAS FORA DO PRAZO (4)</a:t>
             </a:r>
           </a:p>
         </p:txBody>
@@ -5333,7 +5333,7 @@
         </p:nvGraphicFramePr>
         <p:xfrm>
           <a:off x="457200" y="1828800"/>
-          <a:ext cx="11429999" cy="1152144"/>
+          <a:ext cx="11429999" cy="1920240"/>
         </p:xfrm>
         <a:graphic>
           <a:graphicData uri="http://schemas.openxmlformats.org/drawingml/2006/table">
@@ -5479,7 +5479,7 @@
                           </a:solidFill>
                           <a:latin typeface="Calibri"/>
                         </a:rPr>
-                        <a:t>278683</a:t>
+                        <a:t>281664</a:t>
                       </a:r>
                     </a:p>
                   </a:txBody>
@@ -5502,7 +5502,7 @@
                           </a:solidFill>
                           <a:latin typeface="Calibri"/>
                         </a:rPr>
-                        <a:t>TIAGO WYSOCZNSKI - GUARANIACU / PR</a:t>
+                        <a:t>FELIPE LEITHARDT FAG - PASSO FUNDO / RS</a:t>
                       </a:r>
                     </a:p>
                   </a:txBody>
@@ -5525,7 +5525,7 @@
                           </a:solidFill>
                           <a:latin typeface="Calibri"/>
                         </a:rPr>
-                        <a:t>GUARANIACU/PR</a:t>
+                        <a:t>PASSO FUNDO/RS</a:t>
                       </a:r>
                     </a:p>
                   </a:txBody>
@@ -5548,7 +5548,7 @@
                           </a:solidFill>
                           <a:latin typeface="Calibri"/>
                         </a:rPr>
-                        <a:t>20/04/2026</a:t>
+                        <a:t>11/05/2026</a:t>
                       </a:r>
                     </a:p>
                   </a:txBody>
@@ -5596,7 +5596,7 @@
                           </a:solidFill>
                           <a:latin typeface="Calibri"/>
                         </a:rPr>
-                        <a:t>278980</a:t>
+                        <a:t>281795</a:t>
                       </a:r>
                     </a:p>
                   </a:txBody>
@@ -5619,7 +5619,7 @@
                           </a:solidFill>
                           <a:latin typeface="Calibri"/>
                         </a:rPr>
-                        <a:t>JORGE ANDRE LOURENCO - CIANORTE / PR</a:t>
+                        <a:t>LUDIERO ADRIANO RAMI - SANTA ROSA / RS</a:t>
                       </a:r>
                     </a:p>
                   </a:txBody>
@@ -5642,7 +5642,7 @@
                           </a:solidFill>
                           <a:latin typeface="Calibri"/>
                         </a:rPr>
-                        <a:t>CIANORTE/PR</a:t>
+                        <a:t>SANTA ROSA/RS</a:t>
                       </a:r>
                     </a:p>
                   </a:txBody>
@@ -5665,7 +5665,241 @@
                           </a:solidFill>
                           <a:latin typeface="Calibri"/>
                         </a:rPr>
-                        <a:t>20/04/2026</a:t>
+                        <a:t>12/05/2026</a:t>
+                      </a:r>
+                    </a:p>
+                  </a:txBody>
+                  <a:tcPr>
+                    <a:solidFill>
+                      <a:srgbClr val="F2F2F2"/>
+                    </a:solidFill>
+                  </a:tcPr>
+                </a:tc>
+                <a:tc>
+                  <a:txBody>
+                    <a:bodyPr/>
+                    <a:lstStyle/>
+                    <a:p>
+                      <a:pPr algn="l"/>
+                      <a:r>
+                        <a:rPr sz="1000" b="0">
+                          <a:solidFill>
+                            <a:srgbClr val="1D1B43"/>
+                          </a:solidFill>
+                          <a:latin typeface="Calibri"/>
+                        </a:rPr>
+                        <a:t>ENTREGUE FORA DO PRAZO</a:t>
+                      </a:r>
+                    </a:p>
+                  </a:txBody>
+                  <a:tcPr>
+                    <a:solidFill>
+                      <a:srgbClr val="F2F2F2"/>
+                    </a:solidFill>
+                  </a:tcPr>
+                </a:tc>
+              </a:tr>
+              <a:tr h="384048">
+                <a:tc>
+                  <a:txBody>
+                    <a:bodyPr/>
+                    <a:lstStyle/>
+                    <a:p>
+                      <a:pPr algn="l"/>
+                      <a:r>
+                        <a:rPr sz="1000" b="0">
+                          <a:solidFill>
+                            <a:srgbClr val="1D1B43"/>
+                          </a:solidFill>
+                          <a:latin typeface="Calibri"/>
+                        </a:rPr>
+                        <a:t>282512</a:t>
+                      </a:r>
+                    </a:p>
+                  </a:txBody>
+                  <a:tcPr>
+                    <a:solidFill>
+                      <a:srgbClr val="FFFFFF"/>
+                    </a:solidFill>
+                  </a:tcPr>
+                </a:tc>
+                <a:tc>
+                  <a:txBody>
+                    <a:bodyPr/>
+                    <a:lstStyle/>
+                    <a:p>
+                      <a:pPr algn="l"/>
+                      <a:r>
+                        <a:rPr sz="1000" b="0">
+                          <a:solidFill>
+                            <a:srgbClr val="1D1B43"/>
+                          </a:solidFill>
+                          <a:latin typeface="Calibri"/>
+                        </a:rPr>
+                        <a:t>MEIO CONGELADO LTDA - SAO PAULO / SP</a:t>
+                      </a:r>
+                    </a:p>
+                  </a:txBody>
+                  <a:tcPr>
+                    <a:solidFill>
+                      <a:srgbClr val="FFFFFF"/>
+                    </a:solidFill>
+                  </a:tcPr>
+                </a:tc>
+                <a:tc>
+                  <a:txBody>
+                    <a:bodyPr/>
+                    <a:lstStyle/>
+                    <a:p>
+                      <a:pPr algn="l"/>
+                      <a:r>
+                        <a:rPr sz="1000" b="0">
+                          <a:solidFill>
+                            <a:srgbClr val="1D1B43"/>
+                          </a:solidFill>
+                          <a:latin typeface="Calibri"/>
+                        </a:rPr>
+                        <a:t>SAO PAULO/SP</a:t>
+                      </a:r>
+                    </a:p>
+                  </a:txBody>
+                  <a:tcPr>
+                    <a:solidFill>
+                      <a:srgbClr val="FFFFFF"/>
+                    </a:solidFill>
+                  </a:tcPr>
+                </a:tc>
+                <a:tc>
+                  <a:txBody>
+                    <a:bodyPr/>
+                    <a:lstStyle/>
+                    <a:p>
+                      <a:pPr algn="l"/>
+                      <a:r>
+                        <a:rPr sz="1000" b="0">
+                          <a:solidFill>
+                            <a:srgbClr val="1D1B43"/>
+                          </a:solidFill>
+                          <a:latin typeface="Calibri"/>
+                        </a:rPr>
+                        <a:t>15/05/2026</a:t>
+                      </a:r>
+                    </a:p>
+                  </a:txBody>
+                  <a:tcPr>
+                    <a:solidFill>
+                      <a:srgbClr val="FFFFFF"/>
+                    </a:solidFill>
+                  </a:tcPr>
+                </a:tc>
+                <a:tc>
+                  <a:txBody>
+                    <a:bodyPr/>
+                    <a:lstStyle/>
+                    <a:p>
+                      <a:pPr algn="l"/>
+                      <a:r>
+                        <a:rPr sz="1000" b="0">
+                          <a:solidFill>
+                            <a:srgbClr val="1D1B43"/>
+                          </a:solidFill>
+                          <a:latin typeface="Calibri"/>
+                        </a:rPr>
+                        <a:t>ENTREGUE FORA DO PRAZO</a:t>
+                      </a:r>
+                    </a:p>
+                  </a:txBody>
+                  <a:tcPr>
+                    <a:solidFill>
+                      <a:srgbClr val="FFFFFF"/>
+                    </a:solidFill>
+                  </a:tcPr>
+                </a:tc>
+              </a:tr>
+              <a:tr h="384048">
+                <a:tc>
+                  <a:txBody>
+                    <a:bodyPr/>
+                    <a:lstStyle/>
+                    <a:p>
+                      <a:pPr algn="l"/>
+                      <a:r>
+                        <a:rPr sz="1000" b="0">
+                          <a:solidFill>
+                            <a:srgbClr val="1D1B43"/>
+                          </a:solidFill>
+                          <a:latin typeface="Calibri"/>
+                        </a:rPr>
+                        <a:t>282514</a:t>
+                      </a:r>
+                    </a:p>
+                  </a:txBody>
+                  <a:tcPr>
+                    <a:solidFill>
+                      <a:srgbClr val="F2F2F2"/>
+                    </a:solidFill>
+                  </a:tcPr>
+                </a:tc>
+                <a:tc>
+                  <a:txBody>
+                    <a:bodyPr/>
+                    <a:lstStyle/>
+                    <a:p>
+                      <a:pPr algn="l"/>
+                      <a:r>
+                        <a:rPr sz="1000" b="0">
+                          <a:solidFill>
+                            <a:srgbClr val="1D1B43"/>
+                          </a:solidFill>
+                          <a:latin typeface="Calibri"/>
+                        </a:rPr>
+                        <a:t>SAFEVOLT ENERGY LTDA - IRACEMINHA / SC</a:t>
+                      </a:r>
+                    </a:p>
+                  </a:txBody>
+                  <a:tcPr>
+                    <a:solidFill>
+                      <a:srgbClr val="F2F2F2"/>
+                    </a:solidFill>
+                  </a:tcPr>
+                </a:tc>
+                <a:tc>
+                  <a:txBody>
+                    <a:bodyPr/>
+                    <a:lstStyle/>
+                    <a:p>
+                      <a:pPr algn="l"/>
+                      <a:r>
+                        <a:rPr sz="1000" b="0">
+                          <a:solidFill>
+                            <a:srgbClr val="1D1B43"/>
+                          </a:solidFill>
+                          <a:latin typeface="Calibri"/>
+                        </a:rPr>
+                        <a:t>IRACEMINHA/SC</a:t>
+                      </a:r>
+                    </a:p>
+                  </a:txBody>
+                  <a:tcPr>
+                    <a:solidFill>
+                      <a:srgbClr val="F2F2F2"/>
+                    </a:solidFill>
+                  </a:tcPr>
+                </a:tc>
+                <a:tc>
+                  <a:txBody>
+                    <a:bodyPr/>
+                    <a:lstStyle/>
+                    <a:p>
+                      <a:pPr algn="l"/>
+                      <a:r>
+                        <a:rPr sz="1000" b="0">
+                          <a:solidFill>
+                            <a:srgbClr val="1D1B43"/>
+                          </a:solidFill>
+                          <a:latin typeface="Calibri"/>
+                        </a:rPr>
+                        <a:t>14/05/2026</a:t>
                       </a:r>
                     </a:p>
                   </a:txBody>
@@ -6011,7 +6245,7 @@
                           </a:solidFill>
                           <a:latin typeface="Calibri"/>
                         </a:rPr>
-                        <a:t>SP</a:t>
+                        <a:t>PR</a:t>
                       </a:r>
                     </a:p>
                   </a:txBody>
@@ -6034,7 +6268,7 @@
                           </a:solidFill>
                           <a:latin typeface="Calibri"/>
                         </a:rPr>
-                        <a:t>7</a:t>
+                        <a:t>11</a:t>
                       </a:r>
                     </a:p>
                   </a:txBody>
@@ -6057,7 +6291,7 @@
                           </a:solidFill>
                           <a:latin typeface="Calibri"/>
                         </a:rPr>
-                        <a:t>7</a:t>
+                        <a:t>11</a:t>
                       </a:r>
                     </a:p>
                   </a:txBody>
@@ -6151,7 +6385,7 @@
                           </a:solidFill>
                           <a:latin typeface="Calibri"/>
                         </a:rPr>
-                        <a:t>SC</a:t>
+                        <a:t>SP</a:t>
                       </a:r>
                     </a:p>
                   </a:txBody>
@@ -6174,7 +6408,7 @@
                           </a:solidFill>
                           <a:latin typeface="Calibri"/>
                         </a:rPr>
-                        <a:t>4</a:t>
+                        <a:t>9</a:t>
                       </a:r>
                     </a:p>
                   </a:txBody>
@@ -6197,7 +6431,7 @@
                           </a:solidFill>
                           <a:latin typeface="Calibri"/>
                         </a:rPr>
-                        <a:t>4</a:t>
+                        <a:t>8</a:t>
                       </a:r>
                     </a:p>
                   </a:txBody>
@@ -6220,7 +6454,7 @@
                           </a:solidFill>
                           <a:latin typeface="Calibri"/>
                         </a:rPr>
-                        <a:t>0</a:t>
+                        <a:t>1</a:t>
                       </a:r>
                     </a:p>
                   </a:txBody>
@@ -6243,7 +6477,7 @@
                           </a:solidFill>
                           <a:latin typeface="Calibri"/>
                         </a:rPr>
-                        <a:t>100.0%</a:t>
+                        <a:t>88.9%</a:t>
                       </a:r>
                     </a:p>
                   </a:txBody>
@@ -6266,7 +6500,7 @@
                           </a:solidFill>
                           <a:latin typeface="Calibri"/>
                         </a:rPr>
-                        <a:t>Excelente</a:t>
+                        <a:t>Regular</a:t>
                       </a:r>
                     </a:p>
                   </a:txBody>
@@ -6291,7 +6525,7 @@
                           </a:solidFill>
                           <a:latin typeface="Calibri"/>
                         </a:rPr>
-                        <a:t>PR</a:t>
+                        <a:t>SC</a:t>
                       </a:r>
                     </a:p>
                   </a:txBody>
@@ -6314,7 +6548,7 @@
                           </a:solidFill>
                           <a:latin typeface="Calibri"/>
                         </a:rPr>
-                        <a:t>3</a:t>
+                        <a:t>5</a:t>
                       </a:r>
                     </a:p>
                   </a:txBody>
@@ -6337,6 +6571,29 @@
                           </a:solidFill>
                           <a:latin typeface="Calibri"/>
                         </a:rPr>
+                        <a:t>4</a:t>
+                      </a:r>
+                    </a:p>
+                  </a:txBody>
+                  <a:tcPr>
+                    <a:solidFill>
+                      <a:srgbClr val="FFFFFF"/>
+                    </a:solidFill>
+                  </a:tcPr>
+                </a:tc>
+                <a:tc>
+                  <a:txBody>
+                    <a:bodyPr/>
+                    <a:lstStyle/>
+                    <a:p>
+                      <a:pPr algn="l"/>
+                      <a:r>
+                        <a:rPr sz="1000" b="0">
+                          <a:solidFill>
+                            <a:srgbClr val="1D1B43"/>
+                          </a:solidFill>
+                          <a:latin typeface="Calibri"/>
+                        </a:rPr>
                         <a:t>1</a:t>
                       </a:r>
                     </a:p>
@@ -6360,30 +6617,7 @@
                           </a:solidFill>
                           <a:latin typeface="Calibri"/>
                         </a:rPr>
-                        <a:t>2</a:t>
-                      </a:r>
-                    </a:p>
-                  </a:txBody>
-                  <a:tcPr>
-                    <a:solidFill>
-                      <a:srgbClr val="FFFFFF"/>
-                    </a:solidFill>
-                  </a:tcPr>
-                </a:tc>
-                <a:tc>
-                  <a:txBody>
-                    <a:bodyPr/>
-                    <a:lstStyle/>
-                    <a:p>
-                      <a:pPr algn="l"/>
-                      <a:r>
-                        <a:rPr sz="1000" b="0">
-                          <a:solidFill>
-                            <a:srgbClr val="1D1B43"/>
-                          </a:solidFill>
-                          <a:latin typeface="Calibri"/>
-                        </a:rPr>
-                        <a:t>33.3%</a:t>
+                        <a:t>80.0%</a:t>
                       </a:r>
                     </a:p>
                   </a:txBody>
@@ -6431,7 +6665,7 @@
                           </a:solidFill>
                           <a:latin typeface="Calibri"/>
                         </a:rPr>
-                        <a:t>DF</a:t>
+                        <a:t>RJ</a:t>
                       </a:r>
                     </a:p>
                   </a:txBody>
@@ -6454,7 +6688,7 @@
                           </a:solidFill>
                           <a:latin typeface="Calibri"/>
                         </a:rPr>
-                        <a:t>2</a:t>
+                        <a:t>5</a:t>
                       </a:r>
                     </a:p>
                   </a:txBody>
@@ -6477,7 +6711,7 @@
                           </a:solidFill>
                           <a:latin typeface="Calibri"/>
                         </a:rPr>
-                        <a:t>2</a:t>
+                        <a:t>5</a:t>
                       </a:r>
                     </a:p>
                   </a:txBody>
@@ -6571,7 +6805,7 @@
                           </a:solidFill>
                           <a:latin typeface="Calibri"/>
                         </a:rPr>
-                        <a:t>MG</a:t>
+                        <a:t>RS</a:t>
                       </a:r>
                     </a:p>
                   </a:txBody>
@@ -6594,6 +6828,52 @@
                           </a:solidFill>
                           <a:latin typeface="Calibri"/>
                         </a:rPr>
+                        <a:t>5</a:t>
+                      </a:r>
+                    </a:p>
+                  </a:txBody>
+                  <a:tcPr>
+                    <a:solidFill>
+                      <a:srgbClr val="FFFFFF"/>
+                    </a:solidFill>
+                  </a:tcPr>
+                </a:tc>
+                <a:tc>
+                  <a:txBody>
+                    <a:bodyPr/>
+                    <a:lstStyle/>
+                    <a:p>
+                      <a:pPr algn="l"/>
+                      <a:r>
+                        <a:rPr sz="1000" b="0">
+                          <a:solidFill>
+                            <a:srgbClr val="1D1B43"/>
+                          </a:solidFill>
+                          <a:latin typeface="Calibri"/>
+                        </a:rPr>
+                        <a:t>3</a:t>
+                      </a:r>
+                    </a:p>
+                  </a:txBody>
+                  <a:tcPr>
+                    <a:solidFill>
+                      <a:srgbClr val="FFFFFF"/>
+                    </a:solidFill>
+                  </a:tcPr>
+                </a:tc>
+                <a:tc>
+                  <a:txBody>
+                    <a:bodyPr/>
+                    <a:lstStyle/>
+                    <a:p>
+                      <a:pPr algn="l"/>
+                      <a:r>
+                        <a:rPr sz="1000" b="0">
+                          <a:solidFill>
+                            <a:srgbClr val="1D1B43"/>
+                          </a:solidFill>
+                          <a:latin typeface="Calibri"/>
+                        </a:rPr>
                         <a:t>2</a:t>
                       </a:r>
                     </a:p>
@@ -6617,7 +6897,7 @@
                           </a:solidFill>
                           <a:latin typeface="Calibri"/>
                         </a:rPr>
-                        <a:t>2</a:t>
+                        <a:t>60.0%</a:t>
                       </a:r>
                     </a:p>
                   </a:txBody>
@@ -6640,53 +6920,7 @@
                           </a:solidFill>
                           <a:latin typeface="Calibri"/>
                         </a:rPr>
-                        <a:t>0</a:t>
-                      </a:r>
-                    </a:p>
-                  </a:txBody>
-                  <a:tcPr>
-                    <a:solidFill>
-                      <a:srgbClr val="FFFFFF"/>
-                    </a:solidFill>
-                  </a:tcPr>
-                </a:tc>
-                <a:tc>
-                  <a:txBody>
-                    <a:bodyPr/>
-                    <a:lstStyle/>
-                    <a:p>
-                      <a:pPr algn="l"/>
-                      <a:r>
-                        <a:rPr sz="1000" b="0">
-                          <a:solidFill>
-                            <a:srgbClr val="1D1B43"/>
-                          </a:solidFill>
-                          <a:latin typeface="Calibri"/>
-                        </a:rPr>
-                        <a:t>100.0%</a:t>
-                      </a:r>
-                    </a:p>
-                  </a:txBody>
-                  <a:tcPr>
-                    <a:solidFill>
-                      <a:srgbClr val="FFFFFF"/>
-                    </a:solidFill>
-                  </a:tcPr>
-                </a:tc>
-                <a:tc>
-                  <a:txBody>
-                    <a:bodyPr/>
-                    <a:lstStyle/>
-                    <a:p>
-                      <a:pPr algn="l"/>
-                      <a:r>
-                        <a:rPr sz="1000" b="0">
-                          <a:solidFill>
-                            <a:srgbClr val="1D1B43"/>
-                          </a:solidFill>
-                          <a:latin typeface="Calibri"/>
-                        </a:rPr>
-                        <a:t>Excelente</a:t>
+                        <a:t>Atencao</a:t>
                       </a:r>
                     </a:p>
                   </a:txBody>
@@ -6711,7 +6945,7 @@
                           </a:solidFill>
                           <a:latin typeface="Calibri"/>
                         </a:rPr>
-                        <a:t>RS</a:t>
+                        <a:t>DF</a:t>
                       </a:r>
                     </a:p>
                   </a:txBody>
@@ -6734,7 +6968,7 @@
                           </a:solidFill>
                           <a:latin typeface="Calibri"/>
                         </a:rPr>
-                        <a:t>2</a:t>
+                        <a:t>1</a:t>
                       </a:r>
                     </a:p>
                   </a:txBody>
@@ -6757,7 +6991,7 @@
                           </a:solidFill>
                           <a:latin typeface="Calibri"/>
                         </a:rPr>
-                        <a:t>2</a:t>
+                        <a:t>1</a:t>
                       </a:r>
                     </a:p>
                   </a:txBody>
@@ -6851,7 +7085,7 @@
                           </a:solidFill>
                           <a:latin typeface="Calibri"/>
                         </a:rPr>
-                        <a:t>RJ</a:t>
+                        <a:t>PI</a:t>
                       </a:r>
                     </a:p>
                   </a:txBody>
@@ -6874,7 +7108,7 @@
                           </a:solidFill>
                           <a:latin typeface="Calibri"/>
                         </a:rPr>
-                        <a:t>2</a:t>
+                        <a:t>1</a:t>
                       </a:r>
                     </a:p>
                   </a:txBody>
@@ -6897,7 +7131,7 @@
                           </a:solidFill>
                           <a:latin typeface="Calibri"/>
                         </a:rPr>
-                        <a:t>2</a:t>
+                        <a:t>1</a:t>
                       </a:r>
                     </a:p>
                   </a:txBody>
@@ -6991,7 +7225,7 @@
                           </a:solidFill>
                           <a:latin typeface="Calibri"/>
                         </a:rPr>
-                        <a:t>MS</a:t>
+                        <a:t>GO</a:t>
                       </a:r>
                     </a:p>
                   </a:txBody>
@@ -7131,7 +7365,7 @@
                           </a:solidFill>
                           <a:latin typeface="Calibri"/>
                         </a:rPr>
-                        <a:t>GO</a:t>
+                        <a:t>MG</a:t>
                       </a:r>
                     </a:p>
                   </a:txBody>
@@ -7341,7 +7575,7 @@
                 </a:solidFill>
                 <a:latin typeface="Calibri"/>
               </a:rPr>
-              <a:t>TOP DESTINATARIOS (24 pontos)</a:t>
+              <a:t>TOP DESTINATARIOS (36 pontos)</a:t>
             </a:r>
           </a:p>
         </p:txBody>
@@ -7616,7 +7850,7 @@
                           </a:solidFill>
                           <a:latin typeface="Calibri"/>
                         </a:rPr>
-                        <a:t>ACQUA SOLAR COMERCIO - NAVEGANTES / SC</a:t>
+                        <a:t>BRASIL SUL DISTRIBUI - CASCAVEL / PR</a:t>
                       </a:r>
                     </a:p>
                   </a:txBody>
@@ -7639,7 +7873,7 @@
                           </a:solidFill>
                           <a:latin typeface="Calibri"/>
                         </a:rPr>
-                        <a:t>1</a:t>
+                        <a:t>2</a:t>
                       </a:r>
                     </a:p>
                   </a:txBody>
@@ -7662,7 +7896,7 @@
                           </a:solidFill>
                           <a:latin typeface="Calibri"/>
                         </a:rPr>
-                        <a:t>1</a:t>
+                        <a:t>2</a:t>
                       </a:r>
                     </a:p>
                   </a:txBody>
@@ -7779,7 +8013,7 @@
                           </a:solidFill>
                           <a:latin typeface="Calibri"/>
                         </a:rPr>
-                        <a:t>ANTONIO ALVES DA SIL - UBERLANDIA / MG</a:t>
+                        <a:t>GREENCITY ADMINISTRA - MARINGA / PR</a:t>
                       </a:r>
                     </a:p>
                   </a:txBody>
@@ -7802,7 +8036,7 @@
                           </a:solidFill>
                           <a:latin typeface="Calibri"/>
                         </a:rPr>
-                        <a:t>1</a:t>
+                        <a:t>2</a:t>
                       </a:r>
                     </a:p>
                   </a:txBody>
@@ -7825,7 +8059,7 @@
                           </a:solidFill>
                           <a:latin typeface="Calibri"/>
                         </a:rPr>
-                        <a:t>1</a:t>
+                        <a:t>2</a:t>
                       </a:r>
                     </a:p>
                   </a:txBody>
@@ -7942,7 +8176,7 @@
                           </a:solidFill>
                           <a:latin typeface="Calibri"/>
                         </a:rPr>
-                        <a:t>CENERGY SOLAR TECNOL - SAO PAULO / SP</a:t>
+                        <a:t>SIMOLDES ACOS BRASIL - SAO JOSE DOS PINHAIS / PR</a:t>
                       </a:r>
                     </a:p>
                   </a:txBody>
@@ -7965,7 +8199,7 @@
                           </a:solidFill>
                           <a:latin typeface="Calibri"/>
                         </a:rPr>
-                        <a:t>1</a:t>
+                        <a:t>2</a:t>
                       </a:r>
                     </a:p>
                   </a:txBody>
@@ -7988,7 +8222,7 @@
                           </a:solidFill>
                           <a:latin typeface="Calibri"/>
                         </a:rPr>
-                        <a:t>1</a:t>
+                        <a:t>2</a:t>
                       </a:r>
                     </a:p>
                   </a:txBody>
@@ -8105,7 +8339,7 @@
                           </a:solidFill>
                           <a:latin typeface="Calibri"/>
                         </a:rPr>
-                        <a:t>CHRIS MICHAEL PETRON - FLORIANOPOLIS / SC</a:t>
+                        <a:t>ANGULO45 EMPREENDIME - OEIRAS / PI</a:t>
                       </a:r>
                     </a:p>
                   </a:txBody>
@@ -8268,7 +8502,7 @@
                           </a:solidFill>
                           <a:latin typeface="Calibri"/>
                         </a:rPr>
-                        <a:t>CORSOLAR CORDEIRO CA - SAO PAULO / SP</a:t>
+                        <a:t>CAETANO PILOTTO DIEH - ERECHIM / RS</a:t>
                       </a:r>
                     </a:p>
                   </a:txBody>
@@ -8431,7 +8665,7 @@
                           </a:solidFill>
                           <a:latin typeface="Calibri"/>
                         </a:rPr>
-                        <a:t>CUESTA SOLAR ENERGIA - BOTUCATU / SP</a:t>
+                        <a:t>ANTONIO CARLOS LEAL - PORTO FERREIRA / SP</a:t>
                       </a:r>
                     </a:p>
                   </a:txBody>
@@ -8594,7 +8828,7 @@
                           </a:solidFill>
                           <a:latin typeface="Calibri"/>
                         </a:rPr>
-                        <a:t>ERICLEIA APARECIDA D - SANTA FE DO SUL / SP</a:t>
+                        <a:t>COMERCIAL ELETRICA D - CASCAVEL / PR</a:t>
                       </a:r>
                     </a:p>
                   </a:txBody>
@@ -8757,7 +8991,7 @@
                           </a:solidFill>
                           <a:latin typeface="Calibri"/>
                         </a:rPr>
-                        <a:t>FABIANO OTONE BOCCHI - ERECHIM / RS</a:t>
+                        <a:t>CAMBOTA SUPERMERCADO - BARAO DE COCAIS / MG</a:t>
                       </a:r>
                     </a:p>
                   </a:txBody>
@@ -8920,7 +9154,7 @@
                           </a:solidFill>
                           <a:latin typeface="Calibri"/>
                         </a:rPr>
-                        <a:t>FABIO MATIAS DOS SAN - BADY BASSITT / SP</a:t>
+                        <a:t>CRISTA MARIA PROCHNO - CAMPINAS / SP</a:t>
                       </a:r>
                     </a:p>
                   </a:txBody>
@@ -9083,7 +9317,7 @@
                           </a:solidFill>
                           <a:latin typeface="Calibri"/>
                         </a:rPr>
-                        <a:t>GUILHERME GRIMALDI - JUNDIAI / SP</a:t>
+                        <a:t>DARLAN SCHLICKMANN - FLORIANOPOLIS / SC</a:t>
                       </a:r>
                     </a:p>
                   </a:txBody>
@@ -9246,7 +9480,7 @@
                           </a:solidFill>
                           <a:latin typeface="Calibri"/>
                         </a:rPr>
-                        <a:t>JORGE ANDRE LOURENCO - CIANORTE / PR</a:t>
+                        <a:t>DEUSDELIO GONCALVES - CORDEIRO / RJ</a:t>
                       </a:r>
                     </a:p>
                   </a:txBody>
@@ -9292,6 +9526,29 @@
                           </a:solidFill>
                           <a:latin typeface="Calibri"/>
                         </a:rPr>
+                        <a:t>1</a:t>
+                      </a:r>
+                    </a:p>
+                  </a:txBody>
+                  <a:tcPr>
+                    <a:solidFill>
+                      <a:srgbClr val="FFFFFF"/>
+                    </a:solidFill>
+                  </a:tcPr>
+                </a:tc>
+                <a:tc>
+                  <a:txBody>
+                    <a:bodyPr/>
+                    <a:lstStyle/>
+                    <a:p>
+                      <a:pPr algn="l"/>
+                      <a:r>
+                        <a:rPr sz="1000" b="0">
+                          <a:solidFill>
+                            <a:srgbClr val="1D1B43"/>
+                          </a:solidFill>
+                          <a:latin typeface="Calibri"/>
+                        </a:rPr>
                         <a:t>0</a:t>
                       </a:r>
                     </a:p>
@@ -9315,7 +9572,7 @@
                           </a:solidFill>
                           <a:latin typeface="Calibri"/>
                         </a:rPr>
-                        <a:t>1</a:t>
+                        <a:t>100.0%</a:t>
                       </a:r>
                     </a:p>
                   </a:txBody>
@@ -9338,30 +9595,7 @@
                           </a:solidFill>
                           <a:latin typeface="Calibri"/>
                         </a:rPr>
-                        <a:t>0.0%</a:t>
-                      </a:r>
-                    </a:p>
-                  </a:txBody>
-                  <a:tcPr>
-                    <a:solidFill>
-                      <a:srgbClr val="FFFFFF"/>
-                    </a:solidFill>
-                  </a:tcPr>
-                </a:tc>
-                <a:tc>
-                  <a:txBody>
-                    <a:bodyPr/>
-                    <a:lstStyle/>
-                    <a:p>
-                      <a:pPr algn="l"/>
-                      <a:r>
-                        <a:rPr sz="1000" b="0">
-                          <a:solidFill>
-                            <a:srgbClr val="1D1B43"/>
-                          </a:solidFill>
-                          <a:latin typeface="Calibri"/>
-                        </a:rPr>
-                        <a:t>Atencao</a:t>
+                        <a:t>Excelente</a:t>
                       </a:r>
                     </a:p>
                   </a:txBody>
@@ -9409,7 +9643,7 @@
                           </a:solidFill>
                           <a:latin typeface="Calibri"/>
                         </a:rPr>
-                        <a:t>LUANA FERREIRA VAZ - MUNDO NOVO / GO</a:t>
+                        <a:t>CHARLES RODRIGO DE A - CAMPOS DOS GOYTACAZES / R</a:t>
                       </a:r>
                     </a:p>
                   </a:txBody>
@@ -9572,7 +9806,7 @@
                           </a:solidFill>
                           <a:latin typeface="Calibri"/>
                         </a:rPr>
-                        <a:t>MACDOVEL PASSOS DA S - DUQUE DE CAXIAS / RJ</a:t>
+                        <a:t>DOUGLAS DOS SANTOS B - SAO MIGUEL DO OESTE / SC</a:t>
                       </a:r>
                     </a:p>
                   </a:txBody>
@@ -9735,7 +9969,7 @@
                           </a:solidFill>
                           <a:latin typeface="Calibri"/>
                         </a:rPr>
-                        <a:t>MATHEUS DA SILVA VEL - NAVIRAI / MS</a:t>
+                        <a:t>DUOC ARQUITETURA E E - BRASILIA / DF</a:t>
                       </a:r>
                     </a:p>
                   </a:txBody>
